--- a/docs/entrega/presentacion.pptx
+++ b/docs/entrega/presentacion.pptx
@@ -927,7 +927,7 @@
 · El dominio contiene los modelos del Convenio y las reglas. No importa nada externo:
   ni FastAPI, ni LangGraph, ni el SDK de OpenAI, ni el cliente de Qdrant.
 · La aplicación define los puertos: 5 de entrada (responder pregunta, analizar siniestro,
-  resolver consulta, ingerir documento, inspeccionar manual) y 13 de salida.
+  resolver consulta, ingerir documento, inspeccionar manual) y 12 de salida.
 · La infraestructura los implementa. Un nombre funcional conecta cada puerto con el
   directorio de su adaptador, así que la correspondencia se ve en el árbol de ficheros.
 REMATE: ejecutar el grep de la banda inferior si alguien lo pide. Devuelve cero.
@@ -3119,6 +3119,9 @@
             <a:r>
               <a:rPr lang="en-US" dirty="0"/>
               <a:t>PROTOCOLO DE EVALUACIÓN (60 s). Lámina delicada: hay que ser exacto.
+COMPROBADO el 2026-09-03: allianz golden validate devuelve errors: [] e item_count: 110,
+y el proyecto de Langfuse en uso todavía no tiene el dataset publicado (la API de datasets
+devuelve 0). Por eso la caja ámbar lo pone en "en curso" y no en "construido".
 · Contar primero el protocolo. Es lo que se está evaluando en esta prueba: si sé montar una
   evaluación creíble, no si tengo un número bonito.
 · «Abstención correcta» como métrica principal es la consecuencia directa del bloque 01:
@@ -9104,7 +9107,7 @@
                 <a:ea typeface="Calibri" pitchFamily="34" charset="-122"/>
                 <a:cs typeface="Calibri" pitchFamily="34" charset="-120"/>
               </a:rPr>
-              <a:t>casos de uso · servicios · 5 puertos de entrada · 13 puertos de salida</a:t>
+              <a:t>casos de uso · servicios · 5 puertos de entrada · 12 puertos de salida</a:t>
             </a:r>
             <a:endParaRPr lang="en-US" sz="1100" dirty="0"/>
           </a:p>
@@ -11617,7 +11620,7 @@
                 <a:ea typeface="Calibri" pitchFamily="34" charset="-122"/>
                 <a:cs typeface="Calibri" pitchFamily="34" charset="-120"/>
               </a:rPr>
-              <a:t>13 puertos de salida y 5 de entrada. Ninguna decisión del Convenio cambia si mañana se sustituye el proveedor de modelos, el índice o el orquestador.</a:t>
+              <a:t>12 puertos de salida y 5 de entrada. Ninguna decisión del Convenio cambia si mañana se sustituye el proveedor de modelos, el índice o el orquestador.</a:t>
             </a:r>
             <a:endParaRPr lang="en-US" sz="1250" dirty="0"/>
           </a:p>
@@ -31653,7 +31656,7 @@
                 <a:ea typeface="Calibri" pitchFamily="34" charset="-122"/>
                 <a:cs typeface="Calibri" pitchFamily="34" charset="-120"/>
               </a:rPr>
-              <a:t>Colisión en cadena excluida · p. 57-58</a:t>
+              <a:t>Colisión en cadena excluida · p. 57</a:t>
             </a:r>
             <a:endParaRPr lang="en-US" sz="950" dirty="0"/>
           </a:p>
@@ -36147,7 +36150,7 @@
                 <a:ea typeface="Calibri" pitchFamily="34" charset="-122"/>
                 <a:cs typeface="Calibri" pitchFamily="34" charset="-120"/>
               </a:rPr>
-              <a:t>La colisión múltiple se declara no aplicable citando la página 56 y las 57-58. No hay conclusión inventada ni un «depende».</a:t>
+              <a:t>La colisión múltiple se declara no aplicable citando las páginas 56 y 57. No hay conclusión inventada ni un «depende».</a:t>
             </a:r>
             <a:endParaRPr lang="en-US" sz="1200" dirty="0"/>
           </a:p>
@@ -41998,7 +42001,7 @@
                 <a:ea typeface="Calibri" pitchFamily="34" charset="-122"/>
                 <a:cs typeface="Calibri" pitchFamily="34" charset="-120"/>
               </a:rPr>
-              <a:t>Dataset publicado como release en Langfuse</a:t>
+              <a:t>La release congelada se publica como dataset</a:t>
             </a:r>
             <a:endParaRPr lang="en-US" sz="1150" dirty="0"/>
           </a:p>
@@ -42620,7 +42623,7 @@
                 <a:ea typeface="Calibri" pitchFamily="34" charset="-122"/>
                 <a:cs typeface="Calibri" pitchFamily="34" charset="-120"/>
               </a:rPr>
-              <a:t>Construido y verificable: el golden de 110 casos, la release congelada con sus hashes, el dataset publicado y el ejecutor de experimentos sobre el recorrido documental.   ·   En curso: la campaña completa sobre los 110 casos y los evaluadores de siniestro y de enrutado.   ·   Pendiente por decisión: congelar la reserva de holdout, que se abre una sola vez y todavía no toca.</a:t>
+              <a:t>Construido y comprobable ahora mismo: el golden de 110 casos (allianz golden validate → errors: [], item_count: 110), la release congelada con sus hashes y el ejecutor de experimentos sobre el recorrido documental.   ·   En curso: la campaña completa sobre los 110 casos, los evaluadores de siniestro y de enrutado, y publicar esta release como dataset en el proyecto de Langfuse en uso.   ·   Pendiente por decisión: congelar la reserva de holdout, que se abre una sola vez y todavía no toca.</a:t>
             </a:r>
             <a:endParaRPr lang="en-US" sz="1050" dirty="0"/>
           </a:p>
@@ -43336,7 +43339,7 @@
                 <a:ea typeface="Calibri" pitchFamily="34" charset="-122"/>
                 <a:cs typeface="Calibri" pitchFamily="34" charset="-120"/>
               </a:rPr>
-              <a:t>Datasets, versiones y experimentos</a:t>
+              <a:t>Datasets y experimentos, junto a las trazas</a:t>
             </a:r>
             <a:endParaRPr lang="en-US" sz="1250" dirty="0"/>
           </a:p>
@@ -43378,7 +43381,7 @@
                 <a:ea typeface="Calibri" pitchFamily="34" charset="-122"/>
                 <a:cs typeface="Calibri" pitchFamily="34" charset="-120"/>
               </a:rPr>
-              <a:t>La release del golden vive en el mismo sitio que las trazas, no en una hoja aparte.</a:t>
+              <a:t>El mismo despliegue aloja el dataset del golden y las ejecuciones de evaluación: no acaban en una hoja de cálculo aparte.</a:t>
             </a:r>
             <a:endParaRPr lang="en-US" sz="1100" dirty="0"/>
           </a:p>
@@ -55820,7 +55823,7 @@
                 <a:ea typeface="Calibri" pitchFamily="34" charset="-122"/>
                 <a:cs typeface="Calibri" pitchFamily="34" charset="-120"/>
               </a:rPr>
-              <a:t>El Convenio exige dos vehículos en colisión directa · pág. 56 — y excluye la colisión en cadena · págs. 57-58</a:t>
+              <a:t>Exige dos vehículos en colisión directa · pág. 56 — y excluye la colisión en cadena · pág. 57</a:t>
             </a:r>
             <a:endParaRPr lang="en-US" sz="1150" dirty="0"/>
           </a:p>
@@ -56001,7 +56004,7 @@
                 <a:ea typeface="Calibri" pitchFamily="34" charset="-122"/>
                 <a:cs typeface="Calibri" pitchFamily="34" charset="-120"/>
               </a:rPr>
-              <a:t>Indeterminado</a:t>
+              <a:t>Indeterminado · condicionado</a:t>
             </a:r>
             <a:endParaRPr lang="en-US" sz="1100" dirty="0"/>
           </a:p>
@@ -56043,7 +56046,7 @@
                 <a:ea typeface="Calibri" pitchFamily="34" charset="-122"/>
                 <a:cs typeface="Calibri" pitchFamily="34" charset="-120"/>
               </a:rPr>
-              <a:t>El segundo vehículo no está identificado: no hay dos partes entre las que repartir · pág. 56</a:t>
+              <a:t>Sin identificar al causante no hay segunda parte: la norma del vehículo aparcado exige conocerla · pág. 73</a:t>
             </a:r>
             <a:endParaRPr lang="en-US" sz="1150" dirty="0"/>
           </a:p>
@@ -56244,7 +56247,7 @@
                 <a:ea typeface="Calibri" pitchFamily="34" charset="-122"/>
                 <a:cs typeface="Calibri" pitchFamily="34" charset="-120"/>
               </a:rPr>
-              <a:t>Norma subsidiaria: si ambos reconocen el cambio de carril, responde quien lo efectúa · pág. 75</a:t>
+              <a:t>Norma subsidiaria: si ambos reconocen el cambio de carril, responde quien lo efectúa · págs. 75 y 111</a:t>
             </a:r>
             <a:endParaRPr lang="en-US" sz="1150" dirty="0"/>
           </a:p>

--- a/docs/entrega/presentacion.pptx
+++ b/docs/entrega/presentacion.pptx
@@ -17102,7 +17102,7 @@
                 <a:ea typeface="Arial" pitchFamily="34" charset="-122"/>
                 <a:cs typeface="Arial" pitchFamily="34" charset="-120"/>
               </a:rPr>
-              <a:t>Cuarenta y cinco minutos: veinte de diseño, quince de demo en vivo, diez de preguntas.</a:t>
+              <a:t>Cuarenta y cinco minutos, y casi un tercio de ellos con el sistema delante.</a:t>
             </a:r>
             <a:endParaRPr lang="en-US" sz="2600" dirty="0"/>
           </a:p>
@@ -17367,7 +17367,7 @@
                 <a:ea typeface="Courier New" pitchFamily="34" charset="-122"/>
                 <a:cs typeface="Courier New" pitchFamily="34" charset="-120"/>
               </a:rPr>
-              <a:t>3 min</a:t>
+              <a:t>4 min</a:t>
             </a:r>
             <a:endParaRPr lang="en-US" sz="1050" dirty="0"/>
           </a:p>
@@ -17791,7 +17791,7 @@
                 <a:ea typeface="Courier New" pitchFamily="34" charset="-122"/>
                 <a:cs typeface="Courier New" pitchFamily="34" charset="-120"/>
               </a:rPr>
-              <a:t>11 min</a:t>
+              <a:t>10 min</a:t>
             </a:r>
             <a:endParaRPr lang="en-US" sz="1050" dirty="0"/>
           </a:p>

--- a/docs/entrega/presentacion.pptx
+++ b/docs/entrega/presentacion.pptx
@@ -50,9 +50,10 @@
     <p:sldId id="298" r:id="rId44"/>
     <p:sldId id="299" r:id="rId45"/>
     <p:sldId id="300" r:id="rId46"/>
+    <p:sldId id="301" r:id="rId47"/>
   </p:sldIdLst>
   <p:notesMasterIdLst>
-    <p:notesMasterId r:id="rId47"/>
+    <p:notesMasterId r:id="rId48"/>
   </p:notesMasterIdLst>
   <p:sldSz cx="12192000" cy="6858000"/>
   <p:notesSz cx="6858000" cy="12192000"/>
@@ -1314,6 +1315,8 @@
             <a:r>
               <a:rPr lang="en-US" dirty="0"/>
               <a:t>LA INTERFAZ (50 s). Es una captura real, tomada del sistema corriendo hoy.
+SALTABLE si la demo va bien: la demo 2 enseña esto mismo en vivo. Esta lámina es la red
+de seguridad para contarlo sin sistema delante.
 · Merece la pena detenerse en la columna de reglas que NO casan. Casi todas las demos
   esconden eso. Aquí es deliberado: si el sistema no puede aplicar la tabla de culpabilidad
   porque el relato no trae las casillas, se ve escrito, con el nombre de la regla.
@@ -1508,6 +1511,7 @@
             <a:r>
               <a:rPr lang="en-US" dirty="0"/>
               <a:t>EVIDENCIA ABRIBLE (45 s). Segunda captura real.
+SALTABLE si la demo va bien: la demo 1 abre esta misma cita en vivo.
 · El detalle que suele pasar desapercibido y que más importa a los seis meses: el
   identificador de evidencia apunta al documento y a la página física, no al fragmento del
   índice. Reindexar con otro parser no invalida ni una cita.
@@ -1607,8 +1611,14 @@
 1) El bloque más largo es la demo. Es deliberado.
 2) El bloque 05 incluye una lámina de límites: lo que el sistema NO hace se cuenta aquí,
    no en la letra pequeña ni cuando alguien lo pregunte.
-Si el tiempo aprieta: los bloques 01 y 02 se pueden comprimir a 5 min entre los dos;
-nunca recortar la demo ni la lámina de límites.</a:t>
+RUTA CORTA, si hay que bajar de 45 a 35 minutos (en este orden):
+1) Saltar las láminas 17 y 19 — la interfaz y la cita abrible — porque la demo 1 y la 2
+   las enseñan en vivo. Están ahí como red de seguridad si la demo falla. (-1:35)
+2) Comprimir la 22 (grafo documental) a media frase: los tres nodos y el límite de 8. (-0:25)
+3) Fundir 09 (supuestos) y 10 (riesgos) en un solo pase, leyendo sólo los titulares. (-1:00)
+4) Recortar la demo 1 a la mitad: se puede ir directo a la 2. (-1:30)
+Nunca recortar: la 05 (los cinco veredictos), la demo 3 y la 38 (lo que el sistema no hace).
+El apéndice (42-45) no se pasa: está para las preguntas.</a:t>
             </a:r>
             <a:endParaRPr lang="en-US" dirty="0"/>
           </a:p>
@@ -3983,7 +3993,9 @@
           <a:p>
             <a:r>
               <a:rPr lang="en-US" dirty="0"/>
-              <a:t>Apéndice. Sólo si preguntan por el stack. La columna de la derecha explica el porqué de cada elección, que suele ser la pregunta real.</a:t>
+              <a:t>Apéndice. NO se pasa en la presentación: está para tenerla a mano en el turno de preguntas
+y para repasarla cinco minutos antes de entrar.
+La columna de la derecha dice a qué lámina saltar si conviene enseñarla al responder.</a:t>
             </a:r>
             <a:endParaRPr lang="en-US" dirty="0"/>
           </a:p>
@@ -4071,7 +4083,7 @@
           <a:p>
             <a:r>
               <a:rPr lang="en-US" dirty="0"/>
-              <a:t>Apéndice. El sobre de respuesta es común a los tres recorridos: identifica el modo seguido, las etapas ejecutadas, las citas y el estado. Es lo que permite que la interfaz enseñe el razonamiento sin lógica duplicada.</a:t>
+              <a:t>Apéndice. Sólo si preguntan por el stack. La columna de la derecha explica el porqué de cada elección, que suele ser la pregunta real.</a:t>
             </a:r>
             <a:endParaRPr lang="en-US" dirty="0"/>
           </a:p>
@@ -4159,7 +4171,7 @@
           <a:p>
             <a:r>
               <a:rPr lang="en-US" dirty="0"/>
-              <a:t>Apéndice. Útil si en la sala hay perfiles no aseguradores. Los cinco primeros términos aparecen en la demo.</a:t>
+              <a:t>Apéndice. El sobre de respuesta es común a los tres recorridos: identifica el modo seguido, las etapas ejecutadas, las citas y el estado. Es lo que permite que la interfaz enseñe el razonamiento sin lógica duplicada.</a:t>
             </a:r>
             <a:endParaRPr lang="en-US" dirty="0"/>
           </a:p>
@@ -4247,7 +4259,7 @@
           <a:p>
             <a:r>
               <a:rPr lang="en-US" dirty="0"/>
-              <a:t>Apéndice. Si alguien quiere verificar algo en el momento, está aquí. Todos se ejecutan en local y ninguno necesita credenciales externas salvo la clave del modelo.</a:t>
+              <a:t>Apéndice. Útil si en la sala hay perfiles no aseguradores. Los cinco primeros términos aparecen en la demo.</a:t>
             </a:r>
             <a:endParaRPr lang="en-US" dirty="0"/>
           </a:p>
@@ -4271,6 +4283,94 @@
             <a:fld id="{F7021451-1387-4CA6-816F-3879F97B5CBC}" type="slidenum">
               <a:rPr lang="en-US"/>
               <a:t>45</a:t>
+            </a:fld>
+            <a:endParaRPr lang="en-US"/>
+          </a:p>
+        </p:txBody>
+      </p:sp>
+    </p:spTree>
+    <p:extLst>
+      <p:ext uri="{BB962C8B-B14F-4D97-AF65-F5344CB8AC3E}">
+        <p14:creationId xmlns:p14="http://schemas.microsoft.com/office/powerpoint/2010/main" val="1024086991"/>
+      </p:ext>
+    </p:extLst>
+  </p:cSld>
+  <p:clrMapOvr>
+    <a:masterClrMapping/>
+  </p:clrMapOvr>
+</p:notes>
+</file>
+
+<file path=ppt/notesSlides/notesSlide46.xml><?xml version="1.0" encoding="utf-8"?>
+<p:notes xmlns:a="http://schemas.openxmlformats.org/drawingml/2006/main" xmlns:r="http://schemas.openxmlformats.org/officeDocument/2006/relationships" xmlns:p="http://schemas.openxmlformats.org/presentationml/2006/main">
+  <p:cSld>
+    <p:spTree>
+      <p:nvGrpSpPr>
+        <p:cNvPr id="1" name=""/>
+        <p:cNvGrpSpPr/>
+        <p:nvPr/>
+      </p:nvGrpSpPr>
+      <p:grpSpPr>
+        <a:xfrm>
+          <a:off x="0" y="0"/>
+          <a:ext cx="0" cy="0"/>
+          <a:chOff x="0" y="0"/>
+          <a:chExt cx="0" cy="0"/>
+        </a:xfrm>
+      </p:grpSpPr>
+      <p:sp>
+        <p:nvSpPr>
+          <p:cNvPr id="2" name="Slide Image Placeholder 1"/>
+          <p:cNvSpPr>
+            <a:spLocks noGrp="1" noRot="1" noChangeAspect="1"/>
+          </p:cNvSpPr>
+          <p:nvPr>
+            <p:ph type="sldImg"/>
+          </p:nvPr>
+        </p:nvSpPr>
+        <p:spPr/>
+      </p:sp>
+      <p:sp>
+        <p:nvSpPr>
+          <p:cNvPr id="3" name="Notes Placeholder 2"/>
+          <p:cNvSpPr>
+            <a:spLocks noGrp="1"/>
+          </p:cNvSpPr>
+          <p:nvPr>
+            <p:ph type="body" idx="1"/>
+          </p:nvPr>
+        </p:nvSpPr>
+        <p:spPr/>
+        <p:txBody>
+          <a:bodyPr/>
+          <a:lstStyle/>
+          <a:p>
+            <a:r>
+              <a:rPr lang="en-US" dirty="0"/>
+              <a:t>Apéndice. Si alguien quiere verificar algo en el momento, está aquí. Todos se ejecutan en local y ninguno necesita credenciales externas salvo la clave del modelo.</a:t>
+            </a:r>
+            <a:endParaRPr lang="en-US" dirty="0"/>
+          </a:p>
+        </p:txBody>
+      </p:sp>
+      <p:sp>
+        <p:nvSpPr>
+          <p:cNvPr id="4" name="Slide Number Placeholder 3"/>
+          <p:cNvSpPr>
+            <a:spLocks noGrp="1"/>
+          </p:cNvSpPr>
+          <p:nvPr>
+            <p:ph type="sldNum" sz="quarter" idx="10"/>
+          </p:nvPr>
+        </p:nvSpPr>
+        <p:spPr/>
+        <p:txBody>
+          <a:bodyPr/>
+          <a:lstStyle/>
+          <a:p>
+            <a:fld id="{F7021451-1387-4CA6-816F-3879F97B5CBC}" type="slidenum">
+              <a:rPr lang="en-US"/>
+              <a:t>46</a:t>
             </a:fld>
             <a:endParaRPr lang="en-US"/>
           </a:p>
@@ -17102,7 +17202,7 @@
                 <a:ea typeface="Arial" pitchFamily="34" charset="-122"/>
                 <a:cs typeface="Arial" pitchFamily="34" charset="-120"/>
               </a:rPr>
-              <a:t>Cuarenta y cinco minutos, y casi un tercio de ellos con el sistema delante.</a:t>
+              <a:t>Cuarenta y cinco minutos, y un cuarto de ellos con el sistema delante.</a:t>
             </a:r>
             <a:endParaRPr lang="en-US" sz="2600" dirty="0"/>
           </a:p>
@@ -17791,7 +17891,7 @@
                 <a:ea typeface="Courier New" pitchFamily="34" charset="-122"/>
                 <a:cs typeface="Courier New" pitchFamily="34" charset="-120"/>
               </a:rPr>
-              <a:t>10 min</a:t>
+              <a:t>12 min</a:t>
             </a:r>
             <a:endParaRPr lang="en-US" sz="1050" dirty="0"/>
           </a:p>
@@ -17992,7 +18092,7 @@
                 <a:ea typeface="Courier New" pitchFamily="34" charset="-122"/>
                 <a:cs typeface="Courier New" pitchFamily="34" charset="-120"/>
               </a:rPr>
-              <a:t>14 min</a:t>
+              <a:t>12 min</a:t>
             </a:r>
             <a:endParaRPr lang="en-US" sz="1050" dirty="0"/>
           </a:p>
@@ -18215,7 +18315,7 @@
                 <a:ea typeface="Courier New" pitchFamily="34" charset="-122"/>
                 <a:cs typeface="Courier New" pitchFamily="34" charset="-120"/>
               </a:rPr>
-              <a:t>5 min</a:t>
+              <a:t>6 min</a:t>
             </a:r>
             <a:endParaRPr lang="en-US" sz="1050" dirty="0"/>
           </a:p>
@@ -18416,7 +18516,7 @@
                 <a:ea typeface="Courier New" pitchFamily="34" charset="-122"/>
                 <a:cs typeface="Courier New" pitchFamily="34" charset="-120"/>
               </a:rPr>
-              <a:t>8 min</a:t>
+              <a:t>7 min</a:t>
             </a:r>
             <a:endParaRPr lang="en-US" sz="1050" dirty="0"/>
           </a:p>
@@ -18480,7 +18580,7 @@
                 <a:ea typeface="Calibri" pitchFamily="34" charset="-122"/>
                 <a:cs typeface="Calibri" pitchFamily="34" charset="-120"/>
               </a:rPr>
-              <a:t>La demo ocupa un tercio del tiempo a propósito: lo que hay que creerse no son las láminas, es el sistema corriendo.</a:t>
+              <a:t>La demo ocupa un cuarto del tiempo a propósito: lo que hay que creerse no son las láminas, es el sistema corriendo.</a:t>
             </a:r>
             <a:endParaRPr lang="en-US" sz="1250" dirty="0"/>
           </a:p>
@@ -51468,7 +51568,7 @@
                 <a:ea typeface="Arial" pitchFamily="34" charset="-122"/>
                 <a:cs typeface="Arial" pitchFamily="34" charset="-120"/>
               </a:rPr>
-              <a:t>APÉNDICE · STACK</a:t>
+              <a:t>APÉNDICE · PREGUNTAS</a:t>
             </a:r>
             <a:endParaRPr lang="en-US" sz="1050" dirty="0"/>
           </a:p>
@@ -51572,7 +51672,7 @@
                 <a:ea typeface="Arial" pitchFamily="34" charset="-122"/>
                 <a:cs typeface="Arial" pitchFamily="34" charset="-120"/>
               </a:rPr>
-              <a:t>Stack completo, y el puerto por el que cada pieza es sustituible.</a:t>
+              <a:t>Las preguntas incómodas, con la respuesta corta y dónde está la larga.</a:t>
             </a:r>
             <a:endParaRPr lang="en-US" sz="2600" dirty="0"/>
           </a:p>
@@ -51586,12 +51686,12 @@
         </p:nvSpPr>
         <p:spPr>
           <a:xfrm>
-            <a:off x="566928" y="1700784"/>
-            <a:ext cx="11057839" cy="420624"/>
+            <a:off x="566928" y="1755648"/>
+            <a:ext cx="11057839" cy="530352"/>
           </a:xfrm>
           <a:prstGeom prst="roundRect">
             <a:avLst>
-              <a:gd name="adj" fmla="val 19565"/>
+              <a:gd name="adj" fmla="val 15517"/>
             </a:avLst>
           </a:prstGeom>
           <a:solidFill>
@@ -51608,20 +51708,23 @@
         </p:nvSpPr>
         <p:spPr>
           <a:xfrm>
-            <a:off x="713232" y="1828800"/>
-            <a:ext cx="2651760" cy="274320"/>
-          </a:xfrm>
-          <a:prstGeom prst="rect">
-            <a:avLst/>
-          </a:prstGeom>
-          <a:noFill/>
-          <a:ln/>
-        </p:spPr>
-        <p:txBody>
-          <a:bodyPr wrap="square" lIns="0" tIns="0" rIns="0" bIns="0" rtlCol="0" anchor="t"/>
-          <a:lstStyle/>
-          <a:p>
-            <a:pPr indent="0" marL="0">
+            <a:off x="694944" y="1847088"/>
+            <a:ext cx="3566160" cy="402336"/>
+          </a:xfrm>
+          <a:prstGeom prst="rect">
+            <a:avLst/>
+          </a:prstGeom>
+          <a:noFill/>
+          <a:ln/>
+        </p:spPr>
+        <p:txBody>
+          <a:bodyPr wrap="square" lIns="0" tIns="0" rIns="0" bIns="0" rtlCol="0" anchor="t"/>
+          <a:lstStyle/>
+          <a:p>
+            <a:pPr indent="0" marL="0">
+              <a:lnSpc>
+                <a:spcPct val="100000"/>
+              </a:lnSpc>
               <a:buNone/>
             </a:pPr>
             <a:r>
@@ -51633,7 +51736,7 @@
                 <a:ea typeface="Calibri" pitchFamily="34" charset="-122"/>
                 <a:cs typeface="Calibri" pitchFamily="34" charset="-120"/>
               </a:rPr>
-              <a:t>Lenguaje y ejecución</a:t>
+              <a:t>«¿Esto no lo está inventando el modelo?»</a:t>
             </a:r>
             <a:endParaRPr lang="en-US" sz="1150" dirty="0"/>
           </a:p>
@@ -51647,59 +51750,23 @@
         </p:nvSpPr>
         <p:spPr>
           <a:xfrm>
-            <a:off x="3493008" y="1837944"/>
-            <a:ext cx="4023360" cy="274320"/>
-          </a:xfrm>
-          <a:prstGeom prst="rect">
-            <a:avLst/>
-          </a:prstGeom>
-          <a:noFill/>
-          <a:ln/>
-        </p:spPr>
-        <p:txBody>
-          <a:bodyPr wrap="square" lIns="0" tIns="0" rIns="0" bIns="0" rtlCol="0" anchor="t"/>
-          <a:lstStyle/>
-          <a:p>
-            <a:pPr indent="0" marL="0">
-              <a:buNone/>
-            </a:pPr>
-            <a:r>
-              <a:rPr lang="en-US" sz="950" dirty="0">
-                <a:solidFill>
-                  <a:srgbClr val="003781"/>
-                </a:solidFill>
-                <a:latin typeface="Courier New" pitchFamily="34" charset="0"/>
-                <a:ea typeface="Courier New" pitchFamily="34" charset="-122"/>
-                <a:cs typeface="Courier New" pitchFamily="34" charset="-120"/>
-              </a:rPr>
-              <a:t>Python 3.14 · uv</a:t>
-            </a:r>
-            <a:endParaRPr lang="en-US" sz="950" dirty="0"/>
-          </a:p>
-        </p:txBody>
-      </p:sp>
-      <p:sp>
-        <p:nvSpPr>
-          <p:cNvPr id="9" name="Text 6"/>
-          <p:cNvSpPr txBox="1"/>
-          <p:nvPr/>
-        </p:nvSpPr>
-        <p:spPr>
-          <a:xfrm>
-            <a:off x="7699248" y="1837944"/>
-            <a:ext cx="3779215" cy="274320"/>
-          </a:xfrm>
-          <a:prstGeom prst="rect">
-            <a:avLst/>
-          </a:prstGeom>
-          <a:noFill/>
-          <a:ln/>
-        </p:spPr>
-        <p:txBody>
-          <a:bodyPr wrap="square" lIns="0" tIns="0" rIns="0" bIns="0" rtlCol="0" anchor="t"/>
-          <a:lstStyle/>
-          <a:p>
-            <a:pPr indent="0" marL="0">
+            <a:off x="4370832" y="1837944"/>
+            <a:ext cx="5577840" cy="420624"/>
+          </a:xfrm>
+          <a:prstGeom prst="rect">
+            <a:avLst/>
+          </a:prstGeom>
+          <a:noFill/>
+          <a:ln/>
+        </p:spPr>
+        <p:txBody>
+          <a:bodyPr wrap="square" lIns="0" tIns="0" rIns="0" bIns="0" rtlCol="0" anchor="t"/>
+          <a:lstStyle/>
+          <a:p>
+            <a:pPr indent="0" marL="0">
+              <a:lnSpc>
+                <a:spcPct val="102000"/>
+              </a:lnSpc>
               <a:buNone/>
             </a:pPr>
             <a:r>
@@ -51711,7 +51778,7 @@
                 <a:ea typeface="Calibri" pitchFamily="34" charset="-122"/>
                 <a:cs typeface="Calibri" pitchFamily="34" charset="-120"/>
               </a:rPr>
-              <a:t>Entorno reproducible y resolución de dependencias rápida</a:t>
+              <a:t>No: la decisión la emite un evaluador determinista sobre reglas firmadas, y una invariante del dominio impide publicar un culpable sin las reglas que lo sostienen.</a:t>
             </a:r>
             <a:endParaRPr lang="en-US" sz="1050" dirty="0"/>
           </a:p>
@@ -51719,282 +51786,213 @@
       </p:sp>
       <p:sp>
         <p:nvSpPr>
-          <p:cNvPr id="10" name="Text 7"/>
-          <p:cNvSpPr txBox="1"/>
-          <p:nvPr/>
-        </p:nvSpPr>
-        <p:spPr>
-          <a:xfrm>
-            <a:off x="713232" y="2286000"/>
-            <a:ext cx="2651760" cy="274320"/>
-          </a:xfrm>
-          <a:prstGeom prst="rect">
-            <a:avLst/>
-          </a:prstGeom>
-          <a:noFill/>
-          <a:ln/>
-        </p:spPr>
-        <p:txBody>
-          <a:bodyPr wrap="square" lIns="0" tIns="0" rIns="0" bIns="0" rtlCol="0" anchor="t"/>
-          <a:lstStyle/>
-          <a:p>
-            <a:pPr indent="0" marL="0">
-              <a:buNone/>
-            </a:pPr>
-            <a:r>
-              <a:rPr lang="en-US" sz="1150" b="1" dirty="0">
-                <a:solidFill>
-                  <a:srgbClr val="0B1F3A"/>
+          <p:cNvPr id="9" name="Text 6"/>
+          <p:cNvSpPr txBox="1"/>
+          <p:nvPr/>
+        </p:nvSpPr>
+        <p:spPr>
+          <a:xfrm>
+            <a:off x="10168128" y="1911096"/>
+            <a:ext cx="1456639" cy="237744"/>
+          </a:xfrm>
+          <a:prstGeom prst="rect">
+            <a:avLst/>
+          </a:prstGeom>
+          <a:noFill/>
+          <a:ln/>
+        </p:spPr>
+        <p:txBody>
+          <a:bodyPr wrap="square" lIns="0" tIns="0" rIns="0" bIns="0" rtlCol="0" anchor="t"/>
+          <a:lstStyle/>
+          <a:p>
+            <a:pPr algn="r" indent="0" marL="0">
+              <a:buNone/>
+            </a:pPr>
+            <a:r>
+              <a:rPr lang="en-US" sz="1000" b="1" dirty="0">
+                <a:solidFill>
+                  <a:srgbClr val="0079C1"/>
                 </a:solidFill>
                 <a:latin typeface="Calibri" pitchFamily="34" charset="0"/>
                 <a:ea typeface="Calibri" pitchFamily="34" charset="-122"/>
                 <a:cs typeface="Calibri" pitchFamily="34" charset="-120"/>
               </a:rPr>
-              <a:t>API</a:t>
-            </a:r>
-            <a:endParaRPr lang="en-US" sz="1150" dirty="0"/>
-          </a:p>
-        </p:txBody>
-      </p:sp>
-      <p:sp>
-        <p:nvSpPr>
-          <p:cNvPr id="11" name="Text 8"/>
-          <p:cNvSpPr txBox="1"/>
-          <p:nvPr/>
-        </p:nvSpPr>
-        <p:spPr>
-          <a:xfrm>
-            <a:off x="3493008" y="2295144"/>
-            <a:ext cx="4023360" cy="274320"/>
-          </a:xfrm>
-          <a:prstGeom prst="rect">
-            <a:avLst/>
-          </a:prstGeom>
-          <a:noFill/>
-          <a:ln/>
-        </p:spPr>
-        <p:txBody>
-          <a:bodyPr wrap="square" lIns="0" tIns="0" rIns="0" bIns="0" rtlCol="0" anchor="t"/>
-          <a:lstStyle/>
-          <a:p>
-            <a:pPr indent="0" marL="0">
-              <a:buNone/>
-            </a:pPr>
-            <a:r>
-              <a:rPr lang="en-US" sz="950" dirty="0">
-                <a:solidFill>
-                  <a:srgbClr val="003781"/>
-                </a:solidFill>
-                <a:latin typeface="Courier New" pitchFamily="34" charset="0"/>
-                <a:ea typeface="Courier New" pitchFamily="34" charset="-122"/>
-                <a:cs typeface="Courier New" pitchFamily="34" charset="-120"/>
-              </a:rPr>
-              <a:t>FastAPI · Pydantic 2 · SSE</a:t>
-            </a:r>
-            <a:endParaRPr lang="en-US" sz="950" dirty="0"/>
-          </a:p>
-        </p:txBody>
-      </p:sp>
-      <p:sp>
-        <p:nvSpPr>
-          <p:cNvPr id="12" name="Text 9"/>
-          <p:cNvSpPr txBox="1"/>
-          <p:nvPr/>
-        </p:nvSpPr>
-        <p:spPr>
-          <a:xfrm>
-            <a:off x="7699248" y="2295144"/>
-            <a:ext cx="3779215" cy="274320"/>
-          </a:xfrm>
-          <a:prstGeom prst="rect">
-            <a:avLst/>
-          </a:prstGeom>
-          <a:noFill/>
-          <a:ln/>
-        </p:spPr>
-        <p:txBody>
-          <a:bodyPr wrap="square" lIns="0" tIns="0" rIns="0" bIns="0" rtlCol="0" anchor="t"/>
-          <a:lstStyle/>
-          <a:p>
-            <a:pPr indent="0" marL="0">
-              <a:buNone/>
-            </a:pPr>
-            <a:r>
-              <a:rPr lang="en-US" sz="1050" dirty="0">
-                <a:solidFill>
-                  <a:srgbClr val="5D7189"/>
+              <a:t>Láminas 24 y 17</a:t>
+            </a:r>
+            <a:endParaRPr lang="en-US" sz="1000" dirty="0"/>
+          </a:p>
+        </p:txBody>
+      </p:sp>
+      <p:sp>
+        <p:nvSpPr>
+          <p:cNvPr id="10" name="Text 7"/>
+          <p:cNvSpPr txBox="1"/>
+          <p:nvPr/>
+        </p:nvSpPr>
+        <p:spPr>
+          <a:xfrm>
+            <a:off x="694944" y="2423160"/>
+            <a:ext cx="3566160" cy="402336"/>
+          </a:xfrm>
+          <a:prstGeom prst="rect">
+            <a:avLst/>
+          </a:prstGeom>
+          <a:noFill/>
+          <a:ln/>
+        </p:spPr>
+        <p:txBody>
+          <a:bodyPr wrap="square" lIns="0" tIns="0" rIns="0" bIns="0" rtlCol="0" anchor="t"/>
+          <a:lstStyle/>
+          <a:p>
+            <a:pPr indent="0" marL="0">
+              <a:lnSpc>
+                <a:spcPct val="100000"/>
+              </a:lnSpc>
+              <a:buNone/>
+            </a:pPr>
+            <a:r>
+              <a:rPr lang="en-US" sz="1150" b="1" dirty="0">
+                <a:solidFill>
+                  <a:srgbClr val="0B1F3A"/>
                 </a:solidFill>
                 <a:latin typeface="Calibri" pitchFamily="34" charset="0"/>
                 <a:ea typeface="Calibri" pitchFamily="34" charset="-122"/>
                 <a:cs typeface="Calibri" pitchFamily="34" charset="-120"/>
               </a:rPr>
-              <a:t>Contrato tipado y publicación del OpenAPI que consume el cliente</a:t>
-            </a:r>
-            <a:endParaRPr lang="en-US" sz="1050" dirty="0"/>
-          </a:p>
-        </p:txBody>
-      </p:sp>
-      <p:sp>
-        <p:nvSpPr>
-          <p:cNvPr id="13" name="Shape 10"/>
-          <p:cNvSpPr/>
-          <p:nvPr/>
-        </p:nvSpPr>
-        <p:spPr>
-          <a:xfrm>
-            <a:off x="566928" y="2615184"/>
-            <a:ext cx="11057839" cy="420624"/>
-          </a:xfrm>
-          <a:prstGeom prst="roundRect">
-            <a:avLst>
-              <a:gd name="adj" fmla="val 19565"/>
-            </a:avLst>
-          </a:prstGeom>
-          <a:solidFill>
-            <a:srgbClr val="F1F6FC"/>
-          </a:solidFill>
-          <a:ln/>
-        </p:spPr>
-      </p:sp>
-      <p:sp>
-        <p:nvSpPr>
-          <p:cNvPr id="14" name="Text 11"/>
-          <p:cNvSpPr txBox="1"/>
-          <p:nvPr/>
-        </p:nvSpPr>
-        <p:spPr>
-          <a:xfrm>
-            <a:off x="713232" y="2743200"/>
-            <a:ext cx="2651760" cy="274320"/>
-          </a:xfrm>
-          <a:prstGeom prst="rect">
-            <a:avLst/>
-          </a:prstGeom>
-          <a:noFill/>
-          <a:ln/>
-        </p:spPr>
-        <p:txBody>
-          <a:bodyPr wrap="square" lIns="0" tIns="0" rIns="0" bIns="0" rtlCol="0" anchor="t"/>
-          <a:lstStyle/>
-          <a:p>
-            <a:pPr indent="0" marL="0">
-              <a:buNone/>
-            </a:pPr>
-            <a:r>
-              <a:rPr lang="en-US" sz="1150" b="1" dirty="0">
-                <a:solidFill>
-                  <a:srgbClr val="0B1F3A"/>
+              <a:t>«¿Por qué no resuelve los cinco accidentes?»</a:t>
+            </a:r>
+            <a:endParaRPr lang="en-US" sz="1150" dirty="0"/>
+          </a:p>
+        </p:txBody>
+      </p:sp>
+      <p:sp>
+        <p:nvSpPr>
+          <p:cNvPr id="11" name="Text 8"/>
+          <p:cNvSpPr txBox="1"/>
+          <p:nvPr/>
+        </p:nvSpPr>
+        <p:spPr>
+          <a:xfrm>
+            <a:off x="4370832" y="2414016"/>
+            <a:ext cx="5577840" cy="420624"/>
+          </a:xfrm>
+          <a:prstGeom prst="rect">
+            <a:avLst/>
+          </a:prstGeom>
+          <a:noFill/>
+          <a:ln/>
+        </p:spPr>
+        <p:txBody>
+          <a:bodyPr wrap="square" lIns="0" tIns="0" rIns="0" bIns="0" rtlCol="0" anchor="t"/>
+          <a:lstStyle/>
+          <a:p>
+            <a:pPr indent="0" marL="0">
+              <a:lnSpc>
+                <a:spcPct val="102000"/>
+              </a:lnSpc>
+              <a:buNone/>
+            </a:pPr>
+            <a:r>
+              <a:rPr lang="en-US" sz="1050" dirty="0">
+                <a:solidFill>
+                  <a:srgbClr val="5D7189"/>
                 </a:solidFill>
                 <a:latin typeface="Calibri" pitchFamily="34" charset="0"/>
                 <a:ea typeface="Calibri" pitchFamily="34" charset="-122"/>
                 <a:cs typeface="Calibri" pitchFamily="34" charset="-120"/>
               </a:rPr>
-              <a:t>Orquestación</a:t>
-            </a:r>
-            <a:endParaRPr lang="en-US" sz="1150" dirty="0"/>
-          </a:p>
-        </p:txBody>
-      </p:sp>
-      <p:sp>
-        <p:nvSpPr>
-          <p:cNvPr id="15" name="Text 12"/>
-          <p:cNvSpPr txBox="1"/>
-          <p:nvPr/>
-        </p:nvSpPr>
-        <p:spPr>
-          <a:xfrm>
-            <a:off x="3493008" y="2752344"/>
-            <a:ext cx="4023360" cy="274320"/>
-          </a:xfrm>
-          <a:prstGeom prst="rect">
-            <a:avLst/>
-          </a:prstGeom>
-          <a:noFill/>
-          <a:ln/>
-        </p:spPr>
-        <p:txBody>
-          <a:bodyPr wrap="square" lIns="0" tIns="0" rIns="0" bIns="0" rtlCol="0" anchor="t"/>
-          <a:lstStyle/>
-          <a:p>
-            <a:pPr indent="0" marL="0">
-              <a:buNone/>
-            </a:pPr>
-            <a:r>
-              <a:rPr lang="en-US" sz="950" dirty="0">
-                <a:solidFill>
-                  <a:srgbClr val="003781"/>
-                </a:solidFill>
-                <a:latin typeface="Courier New" pitchFamily="34" charset="0"/>
-                <a:ea typeface="Courier New" pitchFamily="34" charset="-122"/>
-                <a:cs typeface="Courier New" pitchFamily="34" charset="-120"/>
-              </a:rPr>
-              <a:t>LangGraph · MemorySaver</a:t>
-            </a:r>
-            <a:endParaRPr lang="en-US" sz="950" dirty="0"/>
-          </a:p>
-        </p:txBody>
-      </p:sp>
-      <p:sp>
-        <p:nvSpPr>
-          <p:cNvPr id="16" name="Text 13"/>
-          <p:cNvSpPr txBox="1"/>
-          <p:nvPr/>
-        </p:nvSpPr>
-        <p:spPr>
-          <a:xfrm>
-            <a:off x="7699248" y="2752344"/>
-            <a:ext cx="3779215" cy="274320"/>
-          </a:xfrm>
-          <a:prstGeom prst="rect">
-            <a:avLst/>
-          </a:prstGeom>
-          <a:noFill/>
-          <a:ln/>
-        </p:spPr>
-        <p:txBody>
-          <a:bodyPr wrap="square" lIns="0" tIns="0" rIns="0" bIns="0" rtlCol="0" anchor="t"/>
-          <a:lstStyle/>
-          <a:p>
-            <a:pPr indent="0" marL="0">
-              <a:buNone/>
-            </a:pPr>
-            <a:r>
-              <a:rPr lang="en-US" sz="1050" dirty="0">
-                <a:solidFill>
-                  <a:srgbClr val="5D7189"/>
+              <a:t>Porque el manual no da para más con los datos de cada relato. En cuanto el parte aporta las casillas del apartado 12, la tabla entra y resuelve.</a:t>
+            </a:r>
+            <a:endParaRPr lang="en-US" sz="1050" dirty="0"/>
+          </a:p>
+        </p:txBody>
+      </p:sp>
+      <p:sp>
+        <p:nvSpPr>
+          <p:cNvPr id="12" name="Text 9"/>
+          <p:cNvSpPr txBox="1"/>
+          <p:nvPr/>
+        </p:nvSpPr>
+        <p:spPr>
+          <a:xfrm>
+            <a:off x="10168128" y="2487168"/>
+            <a:ext cx="1456639" cy="237744"/>
+          </a:xfrm>
+          <a:prstGeom prst="rect">
+            <a:avLst/>
+          </a:prstGeom>
+          <a:noFill/>
+          <a:ln/>
+        </p:spPr>
+        <p:txBody>
+          <a:bodyPr wrap="square" lIns="0" tIns="0" rIns="0" bIns="0" rtlCol="0" anchor="t"/>
+          <a:lstStyle/>
+          <a:p>
+            <a:pPr algn="r" indent="0" marL="0">
+              <a:buNone/>
+            </a:pPr>
+            <a:r>
+              <a:rPr lang="en-US" sz="1000" b="1" dirty="0">
+                <a:solidFill>
+                  <a:srgbClr val="0079C1"/>
                 </a:solidFill>
                 <a:latin typeface="Calibri" pitchFamily="34" charset="0"/>
                 <a:ea typeface="Calibri" pitchFamily="34" charset="-122"/>
                 <a:cs typeface="Calibri" pitchFamily="34" charset="-120"/>
               </a:rPr>
-              <a:t>Grafos tipados con checkpoint e interrupción humana</a:t>
-            </a:r>
-            <a:endParaRPr lang="en-US" sz="1050" dirty="0"/>
-          </a:p>
-        </p:txBody>
-      </p:sp>
-      <p:sp>
-        <p:nvSpPr>
-          <p:cNvPr id="17" name="Text 14"/>
-          <p:cNvSpPr txBox="1"/>
-          <p:nvPr/>
-        </p:nvSpPr>
-        <p:spPr>
-          <a:xfrm>
-            <a:off x="713232" y="3200400"/>
-            <a:ext cx="2651760" cy="274320"/>
-          </a:xfrm>
-          <a:prstGeom prst="rect">
-            <a:avLst/>
-          </a:prstGeom>
-          <a:noFill/>
-          <a:ln/>
-        </p:spPr>
-        <p:txBody>
-          <a:bodyPr wrap="square" lIns="0" tIns="0" rIns="0" bIns="0" rtlCol="0" anchor="t"/>
-          <a:lstStyle/>
-          <a:p>
-            <a:pPr indent="0" marL="0">
+              <a:t>Lámina 05 y demo 3</a:t>
+            </a:r>
+            <a:endParaRPr lang="en-US" sz="1000" dirty="0"/>
+          </a:p>
+        </p:txBody>
+      </p:sp>
+      <p:sp>
+        <p:nvSpPr>
+          <p:cNvPr id="13" name="Shape 10"/>
+          <p:cNvSpPr/>
+          <p:nvPr/>
+        </p:nvSpPr>
+        <p:spPr>
+          <a:xfrm>
+            <a:off x="566928" y="2907792"/>
+            <a:ext cx="11057839" cy="530352"/>
+          </a:xfrm>
+          <a:prstGeom prst="roundRect">
+            <a:avLst>
+              <a:gd name="adj" fmla="val 15517"/>
+            </a:avLst>
+          </a:prstGeom>
+          <a:solidFill>
+            <a:srgbClr val="F1F6FC"/>
+          </a:solidFill>
+          <a:ln/>
+        </p:spPr>
+      </p:sp>
+      <p:sp>
+        <p:nvSpPr>
+          <p:cNvPr id="14" name="Text 11"/>
+          <p:cNvSpPr txBox="1"/>
+          <p:nvPr/>
+        </p:nvSpPr>
+        <p:spPr>
+          <a:xfrm>
+            <a:off x="694944" y="2999232"/>
+            <a:ext cx="3566160" cy="402336"/>
+          </a:xfrm>
+          <a:prstGeom prst="rect">
+            <a:avLst/>
+          </a:prstGeom>
+          <a:noFill/>
+          <a:ln/>
+        </p:spPr>
+        <p:txBody>
+          <a:bodyPr wrap="square" lIns="0" tIns="0" rIns="0" bIns="0" rtlCol="0" anchor="t"/>
+          <a:lstStyle/>
+          <a:p>
+            <a:pPr indent="0" marL="0">
+              <a:lnSpc>
+                <a:spcPct val="100000"/>
+              </a:lnSpc>
               <a:buNone/>
             </a:pPr>
             <a:r>
@@ -52006,7 +52004,7 @@
                 <a:ea typeface="Calibri" pitchFamily="34" charset="-122"/>
                 <a:cs typeface="Calibri" pitchFamily="34" charset="-120"/>
               </a:rPr>
-              <a:t>Modelos</a:t>
+              <a:t>«¿Qué métricas tenéis?»</a:t>
             </a:r>
             <a:endParaRPr lang="en-US" sz="1150" dirty="0"/>
           </a:p>
@@ -52014,65 +52012,29 @@
       </p:sp>
       <p:sp>
         <p:nvSpPr>
-          <p:cNvPr id="18" name="Text 15"/>
-          <p:cNvSpPr txBox="1"/>
-          <p:nvPr/>
-        </p:nvSpPr>
-        <p:spPr>
-          <a:xfrm>
-            <a:off x="3493008" y="3209544"/>
-            <a:ext cx="4023360" cy="274320"/>
-          </a:xfrm>
-          <a:prstGeom prst="rect">
-            <a:avLst/>
-          </a:prstGeom>
-          <a:noFill/>
-          <a:ln/>
-        </p:spPr>
-        <p:txBody>
-          <a:bodyPr wrap="square" lIns="0" tIns="0" rIns="0" bIns="0" rtlCol="0" anchor="t"/>
-          <a:lstStyle/>
-          <a:p>
-            <a:pPr indent="0" marL="0">
-              <a:buNone/>
-            </a:pPr>
-            <a:r>
-              <a:rPr lang="en-US" sz="950" dirty="0">
-                <a:solidFill>
-                  <a:srgbClr val="003781"/>
-                </a:solidFill>
-                <a:latin typeface="Courier New" pitchFamily="34" charset="0"/>
-                <a:ea typeface="Courier New" pitchFamily="34" charset="-122"/>
-                <a:cs typeface="Courier New" pitchFamily="34" charset="-120"/>
-              </a:rPr>
-              <a:t>OpenAI (generación, extracción, embeddings, enrutado)</a:t>
-            </a:r>
-            <a:endParaRPr lang="en-US" sz="950" dirty="0"/>
-          </a:p>
-        </p:txBody>
-      </p:sp>
-      <p:sp>
-        <p:nvSpPr>
-          <p:cNvPr id="19" name="Text 16"/>
-          <p:cNvSpPr txBox="1"/>
-          <p:nvPr/>
-        </p:nvSpPr>
-        <p:spPr>
-          <a:xfrm>
-            <a:off x="7699248" y="3209544"/>
-            <a:ext cx="3779215" cy="274320"/>
-          </a:xfrm>
-          <a:prstGeom prst="rect">
-            <a:avLst/>
-          </a:prstGeom>
-          <a:noFill/>
-          <a:ln/>
-        </p:spPr>
-        <p:txBody>
-          <a:bodyPr wrap="square" lIns="0" tIns="0" rIns="0" bIns="0" rtlCol="0" anchor="t"/>
-          <a:lstStyle/>
-          <a:p>
-            <a:pPr indent="0" marL="0">
+          <p:cNvPr id="15" name="Text 12"/>
+          <p:cNvSpPr txBox="1"/>
+          <p:nvPr/>
+        </p:nvSpPr>
+        <p:spPr>
+          <a:xfrm>
+            <a:off x="4370832" y="2990088"/>
+            <a:ext cx="5577840" cy="420624"/>
+          </a:xfrm>
+          <a:prstGeom prst="rect">
+            <a:avLst/>
+          </a:prstGeom>
+          <a:noFill/>
+          <a:ln/>
+        </p:spPr>
+        <p:txBody>
+          <a:bodyPr wrap="square" lIns="0" tIns="0" rIns="0" bIns="0" rtlCol="0" anchor="t"/>
+          <a:lstStyle/>
+          <a:p>
+            <a:pPr indent="0" marL="0">
+              <a:lnSpc>
+                <a:spcPct val="102000"/>
+              </a:lnSpc>
               <a:buNone/>
             </a:pPr>
             <a:r>
@@ -52084,7 +52046,7 @@
                 <a:ea typeface="Calibri" pitchFamily="34" charset="-122"/>
                 <a:cs typeface="Calibri" pitchFamily="34" charset="-120"/>
               </a:rPr>
-              <a:t>Cuatro usos distintos tras tres puertos separados</a:t>
+              <a:t>El protocolo está terminado y la campaña completa está en curso. Prefiero enseñar la caja de estado real antes que un número que no pueda defender.</a:t>
             </a:r>
             <a:endParaRPr lang="en-US" sz="1050" dirty="0"/>
           </a:p>
@@ -52092,274 +52054,180 @@
       </p:sp>
       <p:sp>
         <p:nvSpPr>
-          <p:cNvPr id="20" name="Shape 17"/>
-          <p:cNvSpPr/>
-          <p:nvPr/>
-        </p:nvSpPr>
-        <p:spPr>
-          <a:xfrm>
-            <a:off x="566928" y="3529584"/>
-            <a:ext cx="11057839" cy="420624"/>
-          </a:xfrm>
-          <a:prstGeom prst="roundRect">
-            <a:avLst>
-              <a:gd name="adj" fmla="val 19565"/>
-            </a:avLst>
-          </a:prstGeom>
-          <a:solidFill>
-            <a:srgbClr val="F1F6FC"/>
-          </a:solidFill>
-          <a:ln/>
-        </p:spPr>
-      </p:sp>
-      <p:sp>
-        <p:nvSpPr>
-          <p:cNvPr id="21" name="Text 18"/>
-          <p:cNvSpPr txBox="1"/>
-          <p:nvPr/>
-        </p:nvSpPr>
-        <p:spPr>
-          <a:xfrm>
-            <a:off x="713232" y="3657600"/>
-            <a:ext cx="2651760" cy="274320"/>
-          </a:xfrm>
-          <a:prstGeom prst="rect">
-            <a:avLst/>
-          </a:prstGeom>
-          <a:noFill/>
-          <a:ln/>
-        </p:spPr>
-        <p:txBody>
-          <a:bodyPr wrap="square" lIns="0" tIns="0" rIns="0" bIns="0" rtlCol="0" anchor="t"/>
-          <a:lstStyle/>
-          <a:p>
-            <a:pPr indent="0" marL="0">
-              <a:buNone/>
-            </a:pPr>
-            <a:r>
-              <a:rPr lang="en-US" sz="1150" b="1" dirty="0">
-                <a:solidFill>
-                  <a:srgbClr val="0B1F3A"/>
+          <p:cNvPr id="16" name="Text 13"/>
+          <p:cNvSpPr txBox="1"/>
+          <p:nvPr/>
+        </p:nvSpPr>
+        <p:spPr>
+          <a:xfrm>
+            <a:off x="10168128" y="3063240"/>
+            <a:ext cx="1456639" cy="237744"/>
+          </a:xfrm>
+          <a:prstGeom prst="rect">
+            <a:avLst/>
+          </a:prstGeom>
+          <a:noFill/>
+          <a:ln/>
+        </p:spPr>
+        <p:txBody>
+          <a:bodyPr wrap="square" lIns="0" tIns="0" rIns="0" bIns="0" rtlCol="0" anchor="t"/>
+          <a:lstStyle/>
+          <a:p>
+            <a:pPr algn="r" indent="0" marL="0">
+              <a:buNone/>
+            </a:pPr>
+            <a:r>
+              <a:rPr lang="en-US" sz="1000" b="1" dirty="0">
+                <a:solidFill>
+                  <a:srgbClr val="0079C1"/>
                 </a:solidFill>
                 <a:latin typeface="Calibri" pitchFamily="34" charset="0"/>
                 <a:ea typeface="Calibri" pitchFamily="34" charset="-122"/>
                 <a:cs typeface="Calibri" pitchFamily="34" charset="-120"/>
               </a:rPr>
-              <a:t>Índice</a:t>
-            </a:r>
-            <a:endParaRPr lang="en-US" sz="1150" dirty="0"/>
-          </a:p>
-        </p:txBody>
-      </p:sp>
-      <p:sp>
-        <p:nvSpPr>
-          <p:cNvPr id="22" name="Text 19"/>
-          <p:cNvSpPr txBox="1"/>
-          <p:nvPr/>
-        </p:nvSpPr>
-        <p:spPr>
-          <a:xfrm>
-            <a:off x="3493008" y="3666744"/>
-            <a:ext cx="4023360" cy="274320"/>
-          </a:xfrm>
-          <a:prstGeom prst="rect">
-            <a:avLst/>
-          </a:prstGeom>
-          <a:noFill/>
-          <a:ln/>
-        </p:spPr>
-        <p:txBody>
-          <a:bodyPr wrap="square" lIns="0" tIns="0" rIns="0" bIns="0" rtlCol="0" anchor="t"/>
-          <a:lstStyle/>
-          <a:p>
-            <a:pPr indent="0" marL="0">
-              <a:buNone/>
-            </a:pPr>
-            <a:r>
-              <a:rPr lang="en-US" sz="950" dirty="0">
-                <a:solidFill>
-                  <a:srgbClr val="003781"/>
-                </a:solidFill>
-                <a:latin typeface="Courier New" pitchFamily="34" charset="0"/>
-                <a:ea typeface="Courier New" pitchFamily="34" charset="-122"/>
-                <a:cs typeface="Courier New" pitchFamily="34" charset="-120"/>
-              </a:rPr>
-              <a:t>Qdrant · denso + BM25 español (fastembed) · RRF nativo</a:t>
-            </a:r>
-            <a:endParaRPr lang="en-US" sz="950" dirty="0"/>
-          </a:p>
-        </p:txBody>
-      </p:sp>
-      <p:sp>
-        <p:nvSpPr>
-          <p:cNvPr id="23" name="Text 20"/>
-          <p:cNvSpPr txBox="1"/>
-          <p:nvPr/>
-        </p:nvSpPr>
-        <p:spPr>
-          <a:xfrm>
-            <a:off x="7699248" y="3666744"/>
-            <a:ext cx="3779215" cy="274320"/>
-          </a:xfrm>
-          <a:prstGeom prst="rect">
-            <a:avLst/>
-          </a:prstGeom>
-          <a:noFill/>
-          <a:ln/>
-        </p:spPr>
-        <p:txBody>
-          <a:bodyPr wrap="square" lIns="0" tIns="0" rIns="0" bIns="0" rtlCol="0" anchor="t"/>
-          <a:lstStyle/>
-          <a:p>
-            <a:pPr indent="0" marL="0">
-              <a:buNone/>
-            </a:pPr>
-            <a:r>
-              <a:rPr lang="en-US" sz="1050" dirty="0">
-                <a:solidFill>
-                  <a:srgbClr val="5D7189"/>
+              <a:t>Lámina 35</a:t>
+            </a:r>
+            <a:endParaRPr lang="en-US" sz="1000" dirty="0"/>
+          </a:p>
+        </p:txBody>
+      </p:sp>
+      <p:sp>
+        <p:nvSpPr>
+          <p:cNvPr id="17" name="Text 14"/>
+          <p:cNvSpPr txBox="1"/>
+          <p:nvPr/>
+        </p:nvSpPr>
+        <p:spPr>
+          <a:xfrm>
+            <a:off x="694944" y="3575304"/>
+            <a:ext cx="3566160" cy="402336"/>
+          </a:xfrm>
+          <a:prstGeom prst="rect">
+            <a:avLst/>
+          </a:prstGeom>
+          <a:noFill/>
+          <a:ln/>
+        </p:spPr>
+        <p:txBody>
+          <a:bodyPr wrap="square" lIns="0" tIns="0" rIns="0" bIns="0" rtlCol="0" anchor="t"/>
+          <a:lstStyle/>
+          <a:p>
+            <a:pPr indent="0" marL="0">
+              <a:lnSpc>
+                <a:spcPct val="100000"/>
+              </a:lnSpc>
+              <a:buNone/>
+            </a:pPr>
+            <a:r>
+              <a:rPr lang="en-US" sz="1150" b="1" dirty="0">
+                <a:solidFill>
+                  <a:srgbClr val="0B1F3A"/>
                 </a:solidFill>
                 <a:latin typeface="Calibri" pitchFamily="34" charset="0"/>
                 <a:ea typeface="Calibri" pitchFamily="34" charset="-122"/>
                 <a:cs typeface="Calibri" pitchFamily="34" charset="-120"/>
               </a:rPr>
-              <a:t>Fusión determinista dentro del motor</a:t>
-            </a:r>
-            <a:endParaRPr lang="en-US" sz="1050" dirty="0"/>
-          </a:p>
-        </p:txBody>
-      </p:sp>
-      <p:sp>
-        <p:nvSpPr>
-          <p:cNvPr id="24" name="Text 21"/>
-          <p:cNvSpPr txBox="1"/>
-          <p:nvPr/>
-        </p:nvSpPr>
-        <p:spPr>
-          <a:xfrm>
-            <a:off x="713232" y="4114800"/>
-            <a:ext cx="2651760" cy="274320"/>
-          </a:xfrm>
-          <a:prstGeom prst="rect">
-            <a:avLst/>
-          </a:prstGeom>
-          <a:noFill/>
-          <a:ln/>
-        </p:spPr>
-        <p:txBody>
-          <a:bodyPr wrap="square" lIns="0" tIns="0" rIns="0" bIns="0" rtlCol="0" anchor="t"/>
-          <a:lstStyle/>
-          <a:p>
-            <a:pPr indent="0" marL="0">
-              <a:buNone/>
-            </a:pPr>
-            <a:r>
-              <a:rPr lang="en-US" sz="1150" b="1" dirty="0">
-                <a:solidFill>
-                  <a:srgbClr val="0B1F3A"/>
+              <a:t>«¿Por qué no usáis Docling, si es mejor?»</a:t>
+            </a:r>
+            <a:endParaRPr lang="en-US" sz="1150" dirty="0"/>
+          </a:p>
+        </p:txBody>
+      </p:sp>
+      <p:sp>
+        <p:nvSpPr>
+          <p:cNvPr id="18" name="Text 15"/>
+          <p:cNvSpPr txBox="1"/>
+          <p:nvPr/>
+        </p:nvSpPr>
+        <p:spPr>
+          <a:xfrm>
+            <a:off x="4370832" y="3566160"/>
+            <a:ext cx="5577840" cy="420624"/>
+          </a:xfrm>
+          <a:prstGeom prst="rect">
+            <a:avLst/>
+          </a:prstGeom>
+          <a:noFill/>
+          <a:ln/>
+        </p:spPr>
+        <p:txBody>
+          <a:bodyPr wrap="square" lIns="0" tIns="0" rIns="0" bIns="0" rtlCol="0" anchor="t"/>
+          <a:lstStyle/>
+          <a:p>
+            <a:pPr indent="0" marL="0">
+              <a:lnSpc>
+                <a:spcPct val="102000"/>
+              </a:lnSpc>
+              <a:buNone/>
+            </a:pPr>
+            <a:r>
+              <a:rPr lang="en-US" sz="1050" dirty="0">
+                <a:solidFill>
+                  <a:srgbClr val="5D7189"/>
                 </a:solidFill>
                 <a:latin typeface="Calibri" pitchFamily="34" charset="0"/>
                 <a:ea typeface="Calibri" pitchFamily="34" charset="-122"/>
                 <a:cs typeface="Calibri" pitchFamily="34" charset="-120"/>
               </a:rPr>
-              <a:t>Extracción de PDF</a:t>
-            </a:r>
-            <a:endParaRPr lang="en-US" sz="1150" dirty="0"/>
-          </a:p>
-        </p:txBody>
-      </p:sp>
-      <p:sp>
-        <p:nvSpPr>
-          <p:cNvPr id="25" name="Text 22"/>
-          <p:cNvSpPr txBox="1"/>
-          <p:nvPr/>
-        </p:nvSpPr>
-        <p:spPr>
-          <a:xfrm>
-            <a:off x="3493008" y="4123944"/>
-            <a:ext cx="4023360" cy="274320"/>
-          </a:xfrm>
-          <a:prstGeom prst="rect">
-            <a:avLst/>
-          </a:prstGeom>
-          <a:noFill/>
-          <a:ln/>
-        </p:spPr>
-        <p:txBody>
-          <a:bodyPr wrap="square" lIns="0" tIns="0" rIns="0" bIns="0" rtlCol="0" anchor="t"/>
-          <a:lstStyle/>
-          <a:p>
-            <a:pPr indent="0" marL="0">
-              <a:buNone/>
-            </a:pPr>
-            <a:r>
-              <a:rPr lang="en-US" sz="950" dirty="0">
-                <a:solidFill>
-                  <a:srgbClr val="003781"/>
-                </a:solidFill>
-                <a:latin typeface="Courier New" pitchFamily="34" charset="0"/>
-                <a:ea typeface="Courier New" pitchFamily="34" charset="-122"/>
-                <a:cs typeface="Courier New" pitchFamily="34" charset="-120"/>
-              </a:rPr>
-              <a:t>pypdf 6.16.2 · Docling 2.124.0</a:t>
-            </a:r>
-            <a:endParaRPr lang="en-US" sz="950" dirty="0"/>
-          </a:p>
-        </p:txBody>
-      </p:sp>
-      <p:sp>
-        <p:nvSpPr>
-          <p:cNvPr id="26" name="Text 23"/>
-          <p:cNvSpPr txBox="1"/>
-          <p:nvPr/>
-        </p:nvSpPr>
-        <p:spPr>
-          <a:xfrm>
-            <a:off x="7699248" y="4123944"/>
-            <a:ext cx="3779215" cy="274320"/>
-          </a:xfrm>
-          <a:prstGeom prst="rect">
-            <a:avLst/>
-          </a:prstGeom>
-          <a:noFill/>
-          <a:ln/>
-        </p:spPr>
-        <p:txBody>
-          <a:bodyPr wrap="square" lIns="0" tIns="0" rIns="0" bIns="0" rtlCol="0" anchor="t"/>
-          <a:lstStyle/>
-          <a:p>
-            <a:pPr indent="0" marL="0">
-              <a:buNone/>
-            </a:pPr>
-            <a:r>
-              <a:rPr lang="en-US" sz="1050" dirty="0">
-                <a:solidFill>
-                  <a:srgbClr val="5D7189"/>
+              <a:t>Porque disponible no es lo mismo que mejor. Está publicado y esperando la comparación de evaluación que lo justifique; el comando para compararlos existe.</a:t>
+            </a:r>
+            <a:endParaRPr lang="en-US" sz="1050" dirty="0"/>
+          </a:p>
+        </p:txBody>
+      </p:sp>
+      <p:sp>
+        <p:nvSpPr>
+          <p:cNvPr id="19" name="Text 16"/>
+          <p:cNvSpPr txBox="1"/>
+          <p:nvPr/>
+        </p:nvSpPr>
+        <p:spPr>
+          <a:xfrm>
+            <a:off x="10168128" y="3639312"/>
+            <a:ext cx="1456639" cy="237744"/>
+          </a:xfrm>
+          <a:prstGeom prst="rect">
+            <a:avLst/>
+          </a:prstGeom>
+          <a:noFill/>
+          <a:ln/>
+        </p:spPr>
+        <p:txBody>
+          <a:bodyPr wrap="square" lIns="0" tIns="0" rIns="0" bIns="0" rtlCol="0" anchor="t"/>
+          <a:lstStyle/>
+          <a:p>
+            <a:pPr algn="r" indent="0" marL="0">
+              <a:buNone/>
+            </a:pPr>
+            <a:r>
+              <a:rPr lang="en-US" sz="1000" b="1" dirty="0">
+                <a:solidFill>
+                  <a:srgbClr val="0079C1"/>
                 </a:solidFill>
                 <a:latin typeface="Calibri" pitchFamily="34" charset="0"/>
                 <a:ea typeface="Calibri" pitchFamily="34" charset="-122"/>
                 <a:cs typeface="Calibri" pitchFamily="34" charset="-120"/>
               </a:rPr>
-              <a:t>Dos perfiles publicados para el mismo documento verificado</a:t>
-            </a:r>
-            <a:endParaRPr lang="en-US" sz="1050" dirty="0"/>
-          </a:p>
-        </p:txBody>
-      </p:sp>
-      <p:sp>
-        <p:nvSpPr>
-          <p:cNvPr id="27" name="Shape 24"/>
-          <p:cNvSpPr/>
-          <p:nvPr/>
-        </p:nvSpPr>
-        <p:spPr>
-          <a:xfrm>
-            <a:off x="566928" y="4443984"/>
-            <a:ext cx="11057839" cy="420624"/>
+              <a:t>Lámina 20</a:t>
+            </a:r>
+            <a:endParaRPr lang="en-US" sz="1000" dirty="0"/>
+          </a:p>
+        </p:txBody>
+      </p:sp>
+      <p:sp>
+        <p:nvSpPr>
+          <p:cNvPr id="20" name="Shape 17"/>
+          <p:cNvSpPr/>
+          <p:nvPr/>
+        </p:nvSpPr>
+        <p:spPr>
+          <a:xfrm>
+            <a:off x="566928" y="4059936"/>
+            <a:ext cx="11057839" cy="530352"/>
           </a:xfrm>
           <a:prstGeom prst="roundRect">
             <a:avLst>
-              <a:gd name="adj" fmla="val 19565"/>
+              <a:gd name="adj" fmla="val 15517"/>
             </a:avLst>
           </a:prstGeom>
           <a:solidFill>
@@ -52370,26 +52238,29 @@
       </p:sp>
       <p:sp>
         <p:nvSpPr>
-          <p:cNvPr id="28" name="Text 25"/>
-          <p:cNvSpPr txBox="1"/>
-          <p:nvPr/>
-        </p:nvSpPr>
-        <p:spPr>
-          <a:xfrm>
-            <a:off x="713232" y="4572000"/>
-            <a:ext cx="2651760" cy="274320"/>
-          </a:xfrm>
-          <a:prstGeom prst="rect">
-            <a:avLst/>
-          </a:prstGeom>
-          <a:noFill/>
-          <a:ln/>
-        </p:spPr>
-        <p:txBody>
-          <a:bodyPr wrap="square" lIns="0" tIns="0" rIns="0" bIns="0" rtlCol="0" anchor="t"/>
-          <a:lstStyle/>
-          <a:p>
-            <a:pPr indent="0" marL="0">
+          <p:cNvPr id="21" name="Text 18"/>
+          <p:cNvSpPr txBox="1"/>
+          <p:nvPr/>
+        </p:nvSpPr>
+        <p:spPr>
+          <a:xfrm>
+            <a:off x="694944" y="4151376"/>
+            <a:ext cx="3566160" cy="402336"/>
+          </a:xfrm>
+          <a:prstGeom prst="rect">
+            <a:avLst/>
+          </a:prstGeom>
+          <a:noFill/>
+          <a:ln/>
+        </p:spPr>
+        <p:txBody>
+          <a:bodyPr wrap="square" lIns="0" tIns="0" rIns="0" bIns="0" rtlCol="0" anchor="t"/>
+          <a:lstStyle/>
+          <a:p>
+            <a:pPr indent="0" marL="0">
+              <a:lnSpc>
+                <a:spcPct val="100000"/>
+              </a:lnSpc>
               <a:buNone/>
             </a:pPr>
             <a:r>
@@ -52401,7 +52272,7 @@
                 <a:ea typeface="Calibri" pitchFamily="34" charset="-122"/>
                 <a:cs typeface="Calibri" pitchFamily="34" charset="-120"/>
               </a:rPr>
-              <a:t>Observabilidad y evaluación</a:t>
+              <a:t>«¿Y si cambiáis de proveedor de modelo?»</a:t>
             </a:r>
             <a:endParaRPr lang="en-US" sz="1150" dirty="0"/>
           </a:p>
@@ -52409,65 +52280,29 @@
       </p:sp>
       <p:sp>
         <p:nvSpPr>
-          <p:cNvPr id="29" name="Text 26"/>
-          <p:cNvSpPr txBox="1"/>
-          <p:nvPr/>
-        </p:nvSpPr>
-        <p:spPr>
-          <a:xfrm>
-            <a:off x="3493008" y="4581144"/>
-            <a:ext cx="4023360" cy="274320"/>
-          </a:xfrm>
-          <a:prstGeom prst="rect">
-            <a:avLst/>
-          </a:prstGeom>
-          <a:noFill/>
-          <a:ln/>
-        </p:spPr>
-        <p:txBody>
-          <a:bodyPr wrap="square" lIns="0" tIns="0" rIns="0" bIns="0" rtlCol="0" anchor="t"/>
-          <a:lstStyle/>
-          <a:p>
-            <a:pPr indent="0" marL="0">
-              <a:buNone/>
-            </a:pPr>
-            <a:r>
-              <a:rPr lang="en-US" sz="950" dirty="0">
-                <a:solidFill>
-                  <a:srgbClr val="003781"/>
-                </a:solidFill>
-                <a:latin typeface="Courier New" pitchFamily="34" charset="0"/>
-                <a:ea typeface="Courier New" pitchFamily="34" charset="-122"/>
-                <a:cs typeface="Courier New" pitchFamily="34" charset="-120"/>
-              </a:rPr>
-              <a:t>Langfuse autoalojado · Ragas</a:t>
-            </a:r>
-            <a:endParaRPr lang="en-US" sz="950" dirty="0"/>
-          </a:p>
-        </p:txBody>
-      </p:sp>
-      <p:sp>
-        <p:nvSpPr>
-          <p:cNvPr id="30" name="Text 27"/>
-          <p:cNvSpPr txBox="1"/>
-          <p:nvPr/>
-        </p:nvSpPr>
-        <p:spPr>
-          <a:xfrm>
-            <a:off x="7699248" y="4581144"/>
-            <a:ext cx="3779215" cy="274320"/>
-          </a:xfrm>
-          <a:prstGeom prst="rect">
-            <a:avLst/>
-          </a:prstGeom>
-          <a:noFill/>
-          <a:ln/>
-        </p:spPr>
-        <p:txBody>
-          <a:bodyPr wrap="square" lIns="0" tIns="0" rIns="0" bIns="0" rtlCol="0" anchor="t"/>
-          <a:lstStyle/>
-          <a:p>
-            <a:pPr indent="0" marL="0">
+          <p:cNvPr id="22" name="Text 19"/>
+          <p:cNvSpPr txBox="1"/>
+          <p:nvPr/>
+        </p:nvSpPr>
+        <p:spPr>
+          <a:xfrm>
+            <a:off x="4370832" y="4142232"/>
+            <a:ext cx="5577840" cy="420624"/>
+          </a:xfrm>
+          <a:prstGeom prst="rect">
+            <a:avLst/>
+          </a:prstGeom>
+          <a:noFill/>
+          <a:ln/>
+        </p:spPr>
+        <p:txBody>
+          <a:bodyPr wrap="square" lIns="0" tIns="0" rIns="0" bIns="0" rtlCol="0" anchor="t"/>
+          <a:lstStyle/>
+          <a:p>
+            <a:pPr indent="0" marL="0">
+              <a:lnSpc>
+                <a:spcPct val="102000"/>
+              </a:lnSpc>
               <a:buNone/>
             </a:pPr>
             <a:r>
@@ -52479,7 +52314,7 @@
                 <a:ea typeface="Calibri" pitchFamily="34" charset="-122"/>
                 <a:cs typeface="Calibri" pitchFamily="34" charset="-120"/>
               </a:rPr>
-              <a:t>Trazas, datasets, releases y experimentos en local</a:t>
+              <a:t>Son tres puertos distintos —generar, extraer, clasificar— más el de embeddings. El único que no se puede cambiar sin reindexar es el embedding, y la firma del índice lo impide.</a:t>
             </a:r>
             <a:endParaRPr lang="en-US" sz="1050" dirty="0"/>
           </a:p>
@@ -52487,257 +52322,372 @@
       </p:sp>
       <p:sp>
         <p:nvSpPr>
-          <p:cNvPr id="31" name="Text 28"/>
-          <p:cNvSpPr txBox="1"/>
-          <p:nvPr/>
-        </p:nvSpPr>
-        <p:spPr>
-          <a:xfrm>
-            <a:off x="713232" y="5029200"/>
-            <a:ext cx="2651760" cy="274320"/>
-          </a:xfrm>
-          <a:prstGeom prst="rect">
-            <a:avLst/>
-          </a:prstGeom>
-          <a:noFill/>
-          <a:ln/>
-        </p:spPr>
-        <p:txBody>
-          <a:bodyPr wrap="square" lIns="0" tIns="0" rIns="0" bIns="0" rtlCol="0" anchor="t"/>
-          <a:lstStyle/>
-          <a:p>
-            <a:pPr indent="0" marL="0">
-              <a:buNone/>
-            </a:pPr>
-            <a:r>
-              <a:rPr lang="en-US" sz="1150" b="1" dirty="0">
-                <a:solidFill>
-                  <a:srgbClr val="0B1F3A"/>
+          <p:cNvPr id="23" name="Text 20"/>
+          <p:cNvSpPr txBox="1"/>
+          <p:nvPr/>
+        </p:nvSpPr>
+        <p:spPr>
+          <a:xfrm>
+            <a:off x="10168128" y="4215384"/>
+            <a:ext cx="1456639" cy="237744"/>
+          </a:xfrm>
+          <a:prstGeom prst="rect">
+            <a:avLst/>
+          </a:prstGeom>
+          <a:noFill/>
+          <a:ln/>
+        </p:spPr>
+        <p:txBody>
+          <a:bodyPr wrap="square" lIns="0" tIns="0" rIns="0" bIns="0" rtlCol="0" anchor="t"/>
+          <a:lstStyle/>
+          <a:p>
+            <a:pPr algn="r" indent="0" marL="0">
+              <a:buNone/>
+            </a:pPr>
+            <a:r>
+              <a:rPr lang="en-US" sz="1000" b="1" dirty="0">
+                <a:solidFill>
+                  <a:srgbClr val="0079C1"/>
                 </a:solidFill>
                 <a:latin typeface="Calibri" pitchFamily="34" charset="0"/>
                 <a:ea typeface="Calibri" pitchFamily="34" charset="-122"/>
                 <a:cs typeface="Calibri" pitchFamily="34" charset="-120"/>
               </a:rPr>
-              <a:t>Cliente</a:t>
-            </a:r>
-            <a:endParaRPr lang="en-US" sz="1150" dirty="0"/>
-          </a:p>
-        </p:txBody>
-      </p:sp>
-      <p:sp>
-        <p:nvSpPr>
-          <p:cNvPr id="32" name="Text 29"/>
-          <p:cNvSpPr txBox="1"/>
-          <p:nvPr/>
-        </p:nvSpPr>
-        <p:spPr>
-          <a:xfrm>
-            <a:off x="3493008" y="5038344"/>
-            <a:ext cx="4023360" cy="274320"/>
-          </a:xfrm>
-          <a:prstGeom prst="rect">
-            <a:avLst/>
-          </a:prstGeom>
-          <a:noFill/>
-          <a:ln/>
-        </p:spPr>
-        <p:txBody>
-          <a:bodyPr wrap="square" lIns="0" tIns="0" rIns="0" bIns="0" rtlCol="0" anchor="t"/>
-          <a:lstStyle/>
-          <a:p>
-            <a:pPr indent="0" marL="0">
-              <a:buNone/>
-            </a:pPr>
-            <a:r>
-              <a:rPr lang="en-US" sz="950" dirty="0">
-                <a:solidFill>
-                  <a:srgbClr val="003781"/>
-                </a:solidFill>
-                <a:latin typeface="Courier New" pitchFamily="34" charset="0"/>
-                <a:ea typeface="Courier New" pitchFamily="34" charset="-122"/>
-                <a:cs typeface="Courier New" pitchFamily="34" charset="-120"/>
-              </a:rPr>
-              <a:t>React 19 · Vite · TypeScript estricto · pdfjs-dist</a:t>
-            </a:r>
-            <a:endParaRPr lang="en-US" sz="950" dirty="0"/>
-          </a:p>
-        </p:txBody>
-      </p:sp>
-      <p:sp>
-        <p:nvSpPr>
-          <p:cNvPr id="33" name="Text 30"/>
-          <p:cNvSpPr txBox="1"/>
-          <p:nvPr/>
-        </p:nvSpPr>
-        <p:spPr>
-          <a:xfrm>
-            <a:off x="7699248" y="5038344"/>
-            <a:ext cx="3779215" cy="274320"/>
-          </a:xfrm>
-          <a:prstGeom prst="rect">
-            <a:avLst/>
-          </a:prstGeom>
-          <a:noFill/>
-          <a:ln/>
-        </p:spPr>
-        <p:txBody>
-          <a:bodyPr wrap="square" lIns="0" tIns="0" rIns="0" bIns="0" rtlCol="0" anchor="t"/>
-          <a:lstStyle/>
-          <a:p>
-            <a:pPr indent="0" marL="0">
-              <a:buNone/>
-            </a:pPr>
-            <a:r>
-              <a:rPr lang="en-US" sz="1050" dirty="0">
-                <a:solidFill>
-                  <a:srgbClr val="5D7189"/>
+              <a:t>Láminas 14 y 15</a:t>
+            </a:r>
+            <a:endParaRPr lang="en-US" sz="1000" dirty="0"/>
+          </a:p>
+        </p:txBody>
+      </p:sp>
+      <p:sp>
+        <p:nvSpPr>
+          <p:cNvPr id="24" name="Text 21"/>
+          <p:cNvSpPr txBox="1"/>
+          <p:nvPr/>
+        </p:nvSpPr>
+        <p:spPr>
+          <a:xfrm>
+            <a:off x="694944" y="4727448"/>
+            <a:ext cx="3566160" cy="402336"/>
+          </a:xfrm>
+          <a:prstGeom prst="rect">
+            <a:avLst/>
+          </a:prstGeom>
+          <a:noFill/>
+          <a:ln/>
+        </p:spPr>
+        <p:txBody>
+          <a:bodyPr wrap="square" lIns="0" tIns="0" rIns="0" bIns="0" rtlCol="0" anchor="t"/>
+          <a:lstStyle/>
+          <a:p>
+            <a:pPr indent="0" marL="0">
+              <a:lnSpc>
+                <a:spcPct val="100000"/>
+              </a:lnSpc>
+              <a:buNone/>
+            </a:pPr>
+            <a:r>
+              <a:rPr lang="en-US" sz="1150" b="1" dirty="0">
+                <a:solidFill>
+                  <a:srgbClr val="0B1F3A"/>
                 </a:solidFill>
                 <a:latin typeface="Calibri" pitchFamily="34" charset="0"/>
                 <a:ea typeface="Calibri" pitchFamily="34" charset="-122"/>
                 <a:cs typeface="Calibri" pitchFamily="34" charset="-120"/>
               </a:rPr>
-              <a:t>Tipos generados del OpenAPI; visor que rasteriza sólo la página visible</a:t>
-            </a:r>
-            <a:endParaRPr lang="en-US" sz="1050" dirty="0"/>
-          </a:p>
-        </p:txBody>
-      </p:sp>
-      <p:sp>
-        <p:nvSpPr>
-          <p:cNvPr id="34" name="Shape 31"/>
-          <p:cNvSpPr/>
-          <p:nvPr/>
-        </p:nvSpPr>
-        <p:spPr>
-          <a:xfrm>
-            <a:off x="566928" y="5358384"/>
-            <a:ext cx="11057839" cy="420624"/>
-          </a:xfrm>
-          <a:prstGeom prst="roundRect">
-            <a:avLst>
-              <a:gd name="adj" fmla="val 19565"/>
-            </a:avLst>
-          </a:prstGeom>
-          <a:solidFill>
-            <a:srgbClr val="F1F6FC"/>
-          </a:solidFill>
-          <a:ln/>
-        </p:spPr>
-      </p:sp>
-      <p:sp>
-        <p:nvSpPr>
-          <p:cNvPr id="35" name="Text 32"/>
-          <p:cNvSpPr txBox="1"/>
-          <p:nvPr/>
-        </p:nvSpPr>
-        <p:spPr>
-          <a:xfrm>
-            <a:off x="713232" y="5486400"/>
-            <a:ext cx="2651760" cy="274320"/>
-          </a:xfrm>
-          <a:prstGeom prst="rect">
-            <a:avLst/>
-          </a:prstGeom>
-          <a:noFill/>
-          <a:ln/>
-        </p:spPr>
-        <p:txBody>
-          <a:bodyPr wrap="square" lIns="0" tIns="0" rIns="0" bIns="0" rtlCol="0" anchor="t"/>
-          <a:lstStyle/>
-          <a:p>
-            <a:pPr indent="0" marL="0">
-              <a:buNone/>
-            </a:pPr>
-            <a:r>
-              <a:rPr lang="en-US" sz="1150" b="1" dirty="0">
-                <a:solidFill>
-                  <a:srgbClr val="0B1F3A"/>
+              <a:t>«¿Esto no es sobreingeniería para cinco días?»</a:t>
+            </a:r>
+            <a:endParaRPr lang="en-US" sz="1150" dirty="0"/>
+          </a:p>
+        </p:txBody>
+      </p:sp>
+      <p:sp>
+        <p:nvSpPr>
+          <p:cNvPr id="25" name="Text 22"/>
+          <p:cNvSpPr txBox="1"/>
+          <p:nvPr/>
+        </p:nvSpPr>
+        <p:spPr>
+          <a:xfrm>
+            <a:off x="4370832" y="4718304"/>
+            <a:ext cx="5577840" cy="420624"/>
+          </a:xfrm>
+          <a:prstGeom prst="rect">
+            <a:avLst/>
+          </a:prstGeom>
+          <a:noFill/>
+          <a:ln/>
+        </p:spPr>
+        <p:txBody>
+          <a:bodyPr wrap="square" lIns="0" tIns="0" rIns="0" bIns="0" rtlCol="0" anchor="t"/>
+          <a:lstStyle/>
+          <a:p>
+            <a:pPr indent="0" marL="0">
+              <a:lnSpc>
+                <a:spcPct val="102000"/>
+              </a:lnSpc>
+              <a:buNone/>
+            </a:pPr>
+            <a:r>
+              <a:rPr lang="en-US" sz="1050" dirty="0">
+                <a:solidFill>
+                  <a:srgbClr val="5D7189"/>
                 </a:solidFill>
                 <a:latin typeface="Calibri" pitchFamily="34" charset="0"/>
                 <a:ea typeface="Calibri" pitchFamily="34" charset="-122"/>
                 <a:cs typeface="Calibri" pitchFamily="34" charset="-120"/>
               </a:rPr>
-              <a:t>Calidad</a:t>
-            </a:r>
-            <a:endParaRPr lang="en-US" sz="1150" dirty="0"/>
-          </a:p>
-        </p:txBody>
-      </p:sp>
-      <p:sp>
-        <p:nvSpPr>
-          <p:cNvPr id="36" name="Text 33"/>
-          <p:cNvSpPr txBox="1"/>
-          <p:nvPr/>
-        </p:nvSpPr>
-        <p:spPr>
-          <a:xfrm>
-            <a:off x="3493008" y="5495544"/>
-            <a:ext cx="4023360" cy="274320"/>
-          </a:xfrm>
-          <a:prstGeom prst="rect">
-            <a:avLst/>
-          </a:prstGeom>
-          <a:noFill/>
-          <a:ln/>
-        </p:spPr>
-        <p:txBody>
-          <a:bodyPr wrap="square" lIns="0" tIns="0" rIns="0" bIns="0" rtlCol="0" anchor="t"/>
-          <a:lstStyle/>
-          <a:p>
-            <a:pPr indent="0" marL="0">
-              <a:buNone/>
-            </a:pPr>
-            <a:r>
-              <a:rPr lang="en-US" sz="950" dirty="0">
-                <a:solidFill>
-                  <a:srgbClr val="003781"/>
-                </a:solidFill>
-                <a:latin typeface="Courier New" pitchFamily="34" charset="0"/>
-                <a:ea typeface="Courier New" pitchFamily="34" charset="-122"/>
-                <a:cs typeface="Courier New" pitchFamily="34" charset="-120"/>
-              </a:rPr>
-              <a:t>pytest · vitest · pyright · ruff · eslint</a:t>
-            </a:r>
-            <a:endParaRPr lang="en-US" sz="950" dirty="0"/>
-          </a:p>
-        </p:txBody>
-      </p:sp>
-      <p:sp>
-        <p:nvSpPr>
-          <p:cNvPr id="37" name="Text 34"/>
-          <p:cNvSpPr txBox="1"/>
-          <p:nvPr/>
-        </p:nvSpPr>
-        <p:spPr>
-          <a:xfrm>
-            <a:off x="7699248" y="5495544"/>
-            <a:ext cx="3779215" cy="274320"/>
-          </a:xfrm>
-          <a:prstGeom prst="rect">
-            <a:avLst/>
-          </a:prstGeom>
-          <a:noFill/>
-          <a:ln/>
-        </p:spPr>
-        <p:txBody>
-          <a:bodyPr wrap="square" lIns="0" tIns="0" rIns="0" bIns="0" rtlCol="0" anchor="t"/>
-          <a:lstStyle/>
-          <a:p>
-            <a:pPr indent="0" marL="0">
-              <a:buNone/>
-            </a:pPr>
-            <a:r>
-              <a:rPr lang="en-US" sz="1050" dirty="0">
-                <a:solidFill>
-                  <a:srgbClr val="5D7189"/>
+              <a:t>Costó tiempo el día 1 y lo devolvió el día 4, cuando hubo que meter la tabla de 324 celdas en el flujo sin romper nada de lo anterior.</a:t>
+            </a:r>
+            <a:endParaRPr lang="en-US" sz="1050" dirty="0"/>
+          </a:p>
+        </p:txBody>
+      </p:sp>
+      <p:sp>
+        <p:nvSpPr>
+          <p:cNvPr id="26" name="Text 23"/>
+          <p:cNvSpPr txBox="1"/>
+          <p:nvPr/>
+        </p:nvSpPr>
+        <p:spPr>
+          <a:xfrm>
+            <a:off x="10168128" y="4791456"/>
+            <a:ext cx="1456639" cy="237744"/>
+          </a:xfrm>
+          <a:prstGeom prst="rect">
+            <a:avLst/>
+          </a:prstGeom>
+          <a:noFill/>
+          <a:ln/>
+        </p:spPr>
+        <p:txBody>
+          <a:bodyPr wrap="square" lIns="0" tIns="0" rIns="0" bIns="0" rtlCol="0" anchor="t"/>
+          <a:lstStyle/>
+          <a:p>
+            <a:pPr algn="r" indent="0" marL="0">
+              <a:buNone/>
+            </a:pPr>
+            <a:r>
+              <a:rPr lang="en-US" sz="1000" b="1" dirty="0">
+                <a:solidFill>
+                  <a:srgbClr val="0079C1"/>
                 </a:solidFill>
                 <a:latin typeface="Calibri" pitchFamily="34" charset="0"/>
                 <a:ea typeface="Calibri" pitchFamily="34" charset="-122"/>
                 <a:cs typeface="Calibri" pitchFamily="34" charset="-120"/>
               </a:rPr>
-              <a:t>Cinco puertas reproducibles con un comando</a:t>
+              <a:t>Láminas 11 y 13</a:t>
+            </a:r>
+            <a:endParaRPr lang="en-US" sz="1000" dirty="0"/>
+          </a:p>
+        </p:txBody>
+      </p:sp>
+      <p:sp>
+        <p:nvSpPr>
+          <p:cNvPr id="27" name="Shape 24"/>
+          <p:cNvSpPr/>
+          <p:nvPr/>
+        </p:nvSpPr>
+        <p:spPr>
+          <a:xfrm>
+            <a:off x="566928" y="5212080"/>
+            <a:ext cx="11057839" cy="530352"/>
+          </a:xfrm>
+          <a:prstGeom prst="roundRect">
+            <a:avLst>
+              <a:gd name="adj" fmla="val 15517"/>
+            </a:avLst>
+          </a:prstGeom>
+          <a:solidFill>
+            <a:srgbClr val="F1F6FC"/>
+          </a:solidFill>
+          <a:ln/>
+        </p:spPr>
+      </p:sp>
+      <p:sp>
+        <p:nvSpPr>
+          <p:cNvPr id="28" name="Text 25"/>
+          <p:cNvSpPr txBox="1"/>
+          <p:nvPr/>
+        </p:nvSpPr>
+        <p:spPr>
+          <a:xfrm>
+            <a:off x="694944" y="5303520"/>
+            <a:ext cx="3566160" cy="402336"/>
+          </a:xfrm>
+          <a:prstGeom prst="rect">
+            <a:avLst/>
+          </a:prstGeom>
+          <a:noFill/>
+          <a:ln/>
+        </p:spPr>
+        <p:txBody>
+          <a:bodyPr wrap="square" lIns="0" tIns="0" rIns="0" bIns="0" rtlCol="0" anchor="t"/>
+          <a:lstStyle/>
+          <a:p>
+            <a:pPr indent="0" marL="0">
+              <a:lnSpc>
+                <a:spcPct val="100000"/>
+              </a:lnSpc>
+              <a:buNone/>
+            </a:pPr>
+            <a:r>
+              <a:rPr lang="en-US" sz="1150" b="1" dirty="0">
+                <a:solidFill>
+                  <a:srgbClr val="0B1F3A"/>
+                </a:solidFill>
+                <a:latin typeface="Calibri" pitchFamily="34" charset="0"/>
+                <a:ea typeface="Calibri" pitchFamily="34" charset="-122"/>
+                <a:cs typeface="Calibri" pitchFamily="34" charset="-120"/>
+              </a:rPr>
+              <a:t>«¿Quién ha validado el golden set?»</a:t>
+            </a:r>
+            <a:endParaRPr lang="en-US" sz="1150" dirty="0"/>
+          </a:p>
+        </p:txBody>
+      </p:sp>
+      <p:sp>
+        <p:nvSpPr>
+          <p:cNvPr id="29" name="Text 26"/>
+          <p:cNvSpPr txBox="1"/>
+          <p:nvPr/>
+        </p:nvSpPr>
+        <p:spPr>
+          <a:xfrm>
+            <a:off x="4370832" y="5294376"/>
+            <a:ext cx="5577840" cy="420624"/>
+          </a:xfrm>
+          <a:prstGeom prst="rect">
+            <a:avLst/>
+          </a:prstGeom>
+          <a:noFill/>
+          <a:ln/>
+        </p:spPr>
+        <p:txBody>
+          <a:bodyPr wrap="square" lIns="0" tIns="0" rIns="0" bIns="0" rtlCol="0" anchor="t"/>
+          <a:lstStyle/>
+          <a:p>
+            <a:pPr indent="0" marL="0">
+              <a:lnSpc>
+                <a:spcPct val="102000"/>
+              </a:lnSpc>
+              <a:buNone/>
+            </a:pPr>
+            <a:r>
+              <a:rPr lang="en-US" sz="1050" dirty="0">
+                <a:solidFill>
+                  <a:srgbClr val="5D7189"/>
+                </a:solidFill>
+                <a:latin typeface="Calibri" pitchFamily="34" charset="0"/>
+                <a:ea typeface="Calibri" pitchFamily="34" charset="-122"/>
+                <a:cs typeface="Calibri" pitchFamily="34" charset="-120"/>
+              </a:rPr>
+              <a:t>Una IA en tres pasos, documentados caso a caso. No un experto humano del dominio: es la limitación declarada más seria y la primera del roadmap.</a:t>
             </a:r>
             <a:endParaRPr lang="en-US" sz="1050" dirty="0"/>
+          </a:p>
+        </p:txBody>
+      </p:sp>
+      <p:sp>
+        <p:nvSpPr>
+          <p:cNvPr id="30" name="Text 27"/>
+          <p:cNvSpPr txBox="1"/>
+          <p:nvPr/>
+        </p:nvSpPr>
+        <p:spPr>
+          <a:xfrm>
+            <a:off x="10168128" y="5367528"/>
+            <a:ext cx="1456639" cy="237744"/>
+          </a:xfrm>
+          <a:prstGeom prst="rect">
+            <a:avLst/>
+          </a:prstGeom>
+          <a:noFill/>
+          <a:ln/>
+        </p:spPr>
+        <p:txBody>
+          <a:bodyPr wrap="square" lIns="0" tIns="0" rIns="0" bIns="0" rtlCol="0" anchor="t"/>
+          <a:lstStyle/>
+          <a:p>
+            <a:pPr algn="r" indent="0" marL="0">
+              <a:buNone/>
+            </a:pPr>
+            <a:r>
+              <a:rPr lang="en-US" sz="1000" b="1" dirty="0">
+                <a:solidFill>
+                  <a:srgbClr val="0079C1"/>
+                </a:solidFill>
+                <a:latin typeface="Calibri" pitchFamily="34" charset="0"/>
+                <a:ea typeface="Calibri" pitchFamily="34" charset="-122"/>
+                <a:cs typeface="Calibri" pitchFamily="34" charset="-120"/>
+              </a:rPr>
+              <a:t>Láminas 34 y 38</a:t>
+            </a:r>
+            <a:endParaRPr lang="en-US" sz="1000" dirty="0"/>
+          </a:p>
+        </p:txBody>
+      </p:sp>
+      <p:sp>
+        <p:nvSpPr>
+          <p:cNvPr id="31" name="Shape 28"/>
+          <p:cNvSpPr/>
+          <p:nvPr/>
+        </p:nvSpPr>
+        <p:spPr>
+          <a:xfrm>
+            <a:off x="566928" y="5852160"/>
+            <a:ext cx="11057839" cy="493776"/>
+          </a:xfrm>
+          <a:prstGeom prst="roundRect">
+            <a:avLst>
+              <a:gd name="adj" fmla="val 16667"/>
+            </a:avLst>
+          </a:prstGeom>
+          <a:solidFill>
+            <a:srgbClr val="003781"/>
+          </a:solidFill>
+          <a:ln/>
+        </p:spPr>
+      </p:sp>
+      <p:sp>
+        <p:nvSpPr>
+          <p:cNvPr id="32" name="Text 29"/>
+          <p:cNvSpPr txBox="1"/>
+          <p:nvPr/>
+        </p:nvSpPr>
+        <p:spPr>
+          <a:xfrm>
+            <a:off x="841248" y="5943600"/>
+            <a:ext cx="10509199" cy="329184"/>
+          </a:xfrm>
+          <a:prstGeom prst="rect">
+            <a:avLst/>
+          </a:prstGeom>
+          <a:noFill/>
+          <a:ln/>
+        </p:spPr>
+        <p:txBody>
+          <a:bodyPr wrap="square" lIns="0" tIns="0" rIns="0" bIns="0" rtlCol="0" anchor="t"/>
+          <a:lstStyle/>
+          <a:p>
+            <a:pPr algn="ctr" indent="0" marL="0">
+              <a:lnSpc>
+                <a:spcPct val="95000"/>
+              </a:lnSpc>
+              <a:buNone/>
+            </a:pPr>
+            <a:r>
+              <a:rPr lang="en-US" sz="1250" b="1" dirty="0">
+                <a:solidFill>
+                  <a:srgbClr val="FFFFFF"/>
+                </a:solidFill>
+                <a:latin typeface="Calibri" pitchFamily="34" charset="0"/>
+                <a:ea typeface="Calibri" pitchFamily="34" charset="-122"/>
+                <a:cs typeface="Calibri" pitchFamily="34" charset="-120"/>
+              </a:rPr>
+              <a:t>La regla para el turno de preguntas: si no lo puedo enseñar o citar, lo digo como pendiente. Nadie penaliza un límite declarado; todo el mundo penaliza uno descubierto.</a:t>
+            </a:r>
+            <a:endParaRPr lang="en-US" sz="1250" dirty="0"/>
           </a:p>
         </p:txBody>
       </p:sp>
@@ -52806,7 +52756,7 @@
                 <a:ea typeface="Arial" pitchFamily="34" charset="-122"/>
                 <a:cs typeface="Arial" pitchFamily="34" charset="-120"/>
               </a:rPr>
-              <a:t>APÉNDICE · API</a:t>
+              <a:t>APÉNDICE · STACK</a:t>
             </a:r>
             <a:endParaRPr lang="en-US" sz="1050" dirty="0"/>
           </a:p>
@@ -52910,7 +52860,7 @@
                 <a:ea typeface="Arial" pitchFamily="34" charset="-122"/>
                 <a:cs typeface="Arial" pitchFamily="34" charset="-120"/>
               </a:rPr>
-              <a:t>Superficie de API: un sobre común tipado para los tres recorridos.</a:t>
+              <a:t>Stack completo, y el puerto por el que cada pieza es sustituible.</a:t>
             </a:r>
             <a:endParaRPr lang="en-US" sz="2600" dirty="0"/>
           </a:p>
@@ -52918,57 +52868,18 @@
       </p:sp>
       <p:sp>
         <p:nvSpPr>
-          <p:cNvPr id="6" name="Text 3"/>
-          <p:cNvSpPr txBox="1"/>
-          <p:nvPr/>
-        </p:nvSpPr>
-        <p:spPr>
-          <a:xfrm>
-            <a:off x="566928" y="2011680"/>
-            <a:ext cx="3503066" cy="219456"/>
-          </a:xfrm>
-          <a:prstGeom prst="rect">
-            <a:avLst/>
-          </a:prstGeom>
-          <a:noFill/>
-          <a:ln/>
-        </p:spPr>
-        <p:txBody>
-          <a:bodyPr wrap="square" lIns="0" tIns="0" rIns="0" bIns="0" rtlCol="0" anchor="t"/>
-          <a:lstStyle/>
-          <a:p>
-            <a:pPr indent="0" marL="0">
-              <a:buNone/>
-            </a:pPr>
-            <a:r>
-              <a:rPr lang="en-US" sz="950" b="1" spc="120" kern="0" dirty="0">
-                <a:solidFill>
-                  <a:srgbClr val="003781"/>
-                </a:solidFill>
-                <a:latin typeface="Arial" pitchFamily="34" charset="0"/>
-                <a:ea typeface="Arial" pitchFamily="34" charset="-122"/>
-                <a:cs typeface="Arial" pitchFamily="34" charset="-120"/>
-              </a:rPr>
-              <a:t>CONVERSACIÓN</a:t>
-            </a:r>
-            <a:endParaRPr lang="en-US" sz="950" dirty="0"/>
-          </a:p>
-        </p:txBody>
-      </p:sp>
-      <p:sp>
-        <p:nvSpPr>
-          <p:cNvPr id="7" name="Shape 4"/>
-          <p:cNvSpPr/>
-          <p:nvPr/>
-        </p:nvSpPr>
-        <p:spPr>
-          <a:xfrm>
-            <a:off x="566928" y="2340864"/>
-            <a:ext cx="3503066" cy="768096"/>
+          <p:cNvPr id="6" name="Shape 3"/>
+          <p:cNvSpPr/>
+          <p:nvPr/>
+        </p:nvSpPr>
+        <p:spPr>
+          <a:xfrm>
+            <a:off x="566928" y="1700784"/>
+            <a:ext cx="11057839" cy="420624"/>
           </a:xfrm>
           <a:prstGeom prst="roundRect">
             <a:avLst>
-              <a:gd name="adj" fmla="val 10714"/>
+              <a:gd name="adj" fmla="val 19565"/>
             </a:avLst>
           </a:prstGeom>
           <a:solidFill>
@@ -52979,14 +52890,53 @@
       </p:sp>
       <p:sp>
         <p:nvSpPr>
+          <p:cNvPr id="7" name="Text 4"/>
+          <p:cNvSpPr txBox="1"/>
+          <p:nvPr/>
+        </p:nvSpPr>
+        <p:spPr>
+          <a:xfrm>
+            <a:off x="713232" y="1828800"/>
+            <a:ext cx="2651760" cy="274320"/>
+          </a:xfrm>
+          <a:prstGeom prst="rect">
+            <a:avLst/>
+          </a:prstGeom>
+          <a:noFill/>
+          <a:ln/>
+        </p:spPr>
+        <p:txBody>
+          <a:bodyPr wrap="square" lIns="0" tIns="0" rIns="0" bIns="0" rtlCol="0" anchor="t"/>
+          <a:lstStyle/>
+          <a:p>
+            <a:pPr indent="0" marL="0">
+              <a:buNone/>
+            </a:pPr>
+            <a:r>
+              <a:rPr lang="en-US" sz="1150" b="1" dirty="0">
+                <a:solidFill>
+                  <a:srgbClr val="0B1F3A"/>
+                </a:solidFill>
+                <a:latin typeface="Calibri" pitchFamily="34" charset="0"/>
+                <a:ea typeface="Calibri" pitchFamily="34" charset="-122"/>
+                <a:cs typeface="Calibri" pitchFamily="34" charset="-120"/>
+              </a:rPr>
+              <a:t>Lenguaje y ejecución</a:t>
+            </a:r>
+            <a:endParaRPr lang="en-US" sz="1150" dirty="0"/>
+          </a:p>
+        </p:txBody>
+      </p:sp>
+      <p:sp>
+        <p:nvSpPr>
           <p:cNvPr id="8" name="Text 5"/>
           <p:cNvSpPr txBox="1"/>
           <p:nvPr/>
         </p:nvSpPr>
         <p:spPr>
           <a:xfrm>
-            <a:off x="786384" y="2468880"/>
-            <a:ext cx="3064154" cy="219456"/>
+            <a:off x="3493008" y="1837944"/>
+            <a:ext cx="4023360" cy="274320"/>
           </a:xfrm>
           <a:prstGeom prst="rect">
             <a:avLst/>
@@ -53010,7 +52960,7 @@
                 <a:ea typeface="Courier New" pitchFamily="34" charset="-122"/>
                 <a:cs typeface="Courier New" pitchFamily="34" charset="-120"/>
               </a:rPr>
-              <a:t>POST /api/v1/queries/resolve</a:t>
+              <a:t>Python 3.14 · uv</a:t>
             </a:r>
             <a:endParaRPr lang="en-US" sz="950" dirty="0"/>
           </a:p>
@@ -53024,23 +52974,20 @@
         </p:nvSpPr>
         <p:spPr>
           <a:xfrm>
-            <a:off x="786384" y="2706624"/>
-            <a:ext cx="3064154" cy="329184"/>
-          </a:xfrm>
-          <a:prstGeom prst="rect">
-            <a:avLst/>
-          </a:prstGeom>
-          <a:noFill/>
-          <a:ln/>
-        </p:spPr>
-        <p:txBody>
-          <a:bodyPr wrap="square" lIns="0" tIns="0" rIns="0" bIns="0" rtlCol="0" anchor="t"/>
-          <a:lstStyle/>
-          <a:p>
-            <a:pPr indent="0" marL="0">
-              <a:lnSpc>
-                <a:spcPct val="102000"/>
-              </a:lnSpc>
+            <a:off x="7699248" y="1837944"/>
+            <a:ext cx="3779215" cy="274320"/>
+          </a:xfrm>
+          <a:prstGeom prst="rect">
+            <a:avLst/>
+          </a:prstGeom>
+          <a:noFill/>
+          <a:ln/>
+        </p:spPr>
+        <p:txBody>
+          <a:bodyPr wrap="square" lIns="0" tIns="0" rIns="0" bIns="0" rtlCol="0" anchor="t"/>
+          <a:lstStyle/>
+          <a:p>
+            <a:pPr indent="0" marL="0">
               <a:buNone/>
             </a:pPr>
             <a:r>
@@ -53052,7 +52999,7 @@
                 <a:ea typeface="Calibri" pitchFamily="34" charset="-122"/>
                 <a:cs typeface="Calibri" pitchFamily="34" charset="-120"/>
               </a:rPr>
-              <a:t>Modo automático: clasifica y delega en el recorrido correcto</a:t>
+              <a:t>Entorno reproducible y resolución de dependencias rápida</a:t>
             </a:r>
             <a:endParaRPr lang="en-US" sz="1050" dirty="0"/>
           </a:p>
@@ -53060,25 +53007,42 @@
       </p:sp>
       <p:sp>
         <p:nvSpPr>
-          <p:cNvPr id="10" name="Shape 7"/>
-          <p:cNvSpPr/>
-          <p:nvPr/>
-        </p:nvSpPr>
-        <p:spPr>
-          <a:xfrm>
-            <a:off x="566928" y="3200400"/>
-            <a:ext cx="3503066" cy="768096"/>
-          </a:xfrm>
-          <a:prstGeom prst="roundRect">
-            <a:avLst>
-              <a:gd name="adj" fmla="val 10714"/>
-            </a:avLst>
-          </a:prstGeom>
-          <a:solidFill>
-            <a:srgbClr val="F1F6FC"/>
-          </a:solidFill>
-          <a:ln/>
-        </p:spPr>
+          <p:cNvPr id="10" name="Text 7"/>
+          <p:cNvSpPr txBox="1"/>
+          <p:nvPr/>
+        </p:nvSpPr>
+        <p:spPr>
+          <a:xfrm>
+            <a:off x="713232" y="2286000"/>
+            <a:ext cx="2651760" cy="274320"/>
+          </a:xfrm>
+          <a:prstGeom prst="rect">
+            <a:avLst/>
+          </a:prstGeom>
+          <a:noFill/>
+          <a:ln/>
+        </p:spPr>
+        <p:txBody>
+          <a:bodyPr wrap="square" lIns="0" tIns="0" rIns="0" bIns="0" rtlCol="0" anchor="t"/>
+          <a:lstStyle/>
+          <a:p>
+            <a:pPr indent="0" marL="0">
+              <a:buNone/>
+            </a:pPr>
+            <a:r>
+              <a:rPr lang="en-US" sz="1150" b="1" dirty="0">
+                <a:solidFill>
+                  <a:srgbClr val="0B1F3A"/>
+                </a:solidFill>
+                <a:latin typeface="Calibri" pitchFamily="34" charset="0"/>
+                <a:ea typeface="Calibri" pitchFamily="34" charset="-122"/>
+                <a:cs typeface="Calibri" pitchFamily="34" charset="-120"/>
+              </a:rPr>
+              <a:t>API</a:t>
+            </a:r>
+            <a:endParaRPr lang="en-US" sz="1150" dirty="0"/>
+          </a:p>
+        </p:txBody>
       </p:sp>
       <p:sp>
         <p:nvSpPr>
@@ -53088,8 +53052,8 @@
         </p:nvSpPr>
         <p:spPr>
           <a:xfrm>
-            <a:off x="786384" y="3328416"/>
-            <a:ext cx="3064154" cy="219456"/>
+            <a:off x="3493008" y="2295144"/>
+            <a:ext cx="4023360" cy="274320"/>
           </a:xfrm>
           <a:prstGeom prst="rect">
             <a:avLst/>
@@ -53113,7 +53077,7 @@
                 <a:ea typeface="Courier New" pitchFamily="34" charset="-122"/>
                 <a:cs typeface="Courier New" pitchFamily="34" charset="-120"/>
               </a:rPr>
-              <a:t>POST /api/v1/questions/answer</a:t>
+              <a:t>FastAPI · Pydantic 2 · SSE</a:t>
             </a:r>
             <a:endParaRPr lang="en-US" sz="950" dirty="0"/>
           </a:p>
@@ -53127,23 +53091,20 @@
         </p:nvSpPr>
         <p:spPr>
           <a:xfrm>
-            <a:off x="786384" y="3566160"/>
-            <a:ext cx="3064154" cy="329184"/>
-          </a:xfrm>
-          <a:prstGeom prst="rect">
-            <a:avLst/>
-          </a:prstGeom>
-          <a:noFill/>
-          <a:ln/>
-        </p:spPr>
-        <p:txBody>
-          <a:bodyPr wrap="square" lIns="0" tIns="0" rIns="0" bIns="0" rtlCol="0" anchor="t"/>
-          <a:lstStyle/>
-          <a:p>
-            <a:pPr indent="0" marL="0">
-              <a:lnSpc>
-                <a:spcPct val="102000"/>
-              </a:lnSpc>
+            <a:off x="7699248" y="2295144"/>
+            <a:ext cx="3779215" cy="274320"/>
+          </a:xfrm>
+          <a:prstGeom prst="rect">
+            <a:avLst/>
+          </a:prstGeom>
+          <a:noFill/>
+          <a:ln/>
+        </p:spPr>
+        <p:txBody>
+          <a:bodyPr wrap="square" lIns="0" tIns="0" rIns="0" bIns="0" rtlCol="0" anchor="t"/>
+          <a:lstStyle/>
+          <a:p>
+            <a:pPr indent="0" marL="0">
               <a:buNone/>
             </a:pPr>
             <a:r>
@@ -53155,7 +53116,7 @@
                 <a:ea typeface="Calibri" pitchFamily="34" charset="-122"/>
                 <a:cs typeface="Calibri" pitchFamily="34" charset="-120"/>
               </a:rPr>
-              <a:t>Consulta documental con citas; admite respuesta por SSE</a:t>
+              <a:t>Contrato tipado y publicación del OpenAPI que consume el cliente</a:t>
             </a:r>
             <a:endParaRPr lang="en-US" sz="1050" dirty="0"/>
           </a:p>
@@ -53169,12 +53130,12 @@
         </p:nvSpPr>
         <p:spPr>
           <a:xfrm>
-            <a:off x="566928" y="4059936"/>
-            <a:ext cx="3503066" cy="768096"/>
+            <a:off x="566928" y="2615184"/>
+            <a:ext cx="11057839" cy="420624"/>
           </a:xfrm>
           <a:prstGeom prst="roundRect">
             <a:avLst>
-              <a:gd name="adj" fmla="val 10714"/>
+              <a:gd name="adj" fmla="val 19565"/>
             </a:avLst>
           </a:prstGeom>
           <a:solidFill>
@@ -53191,8 +53152,47 @@
         </p:nvSpPr>
         <p:spPr>
           <a:xfrm>
-            <a:off x="786384" y="4187952"/>
-            <a:ext cx="3064154" cy="219456"/>
+            <a:off x="713232" y="2743200"/>
+            <a:ext cx="2651760" cy="274320"/>
+          </a:xfrm>
+          <a:prstGeom prst="rect">
+            <a:avLst/>
+          </a:prstGeom>
+          <a:noFill/>
+          <a:ln/>
+        </p:spPr>
+        <p:txBody>
+          <a:bodyPr wrap="square" lIns="0" tIns="0" rIns="0" bIns="0" rtlCol="0" anchor="t"/>
+          <a:lstStyle/>
+          <a:p>
+            <a:pPr indent="0" marL="0">
+              <a:buNone/>
+            </a:pPr>
+            <a:r>
+              <a:rPr lang="en-US" sz="1150" b="1" dirty="0">
+                <a:solidFill>
+                  <a:srgbClr val="0B1F3A"/>
+                </a:solidFill>
+                <a:latin typeface="Calibri" pitchFamily="34" charset="0"/>
+                <a:ea typeface="Calibri" pitchFamily="34" charset="-122"/>
+                <a:cs typeface="Calibri" pitchFamily="34" charset="-120"/>
+              </a:rPr>
+              <a:t>Orquestación</a:t>
+            </a:r>
+            <a:endParaRPr lang="en-US" sz="1150" dirty="0"/>
+          </a:p>
+        </p:txBody>
+      </p:sp>
+      <p:sp>
+        <p:nvSpPr>
+          <p:cNvPr id="15" name="Text 12"/>
+          <p:cNvSpPr txBox="1"/>
+          <p:nvPr/>
+        </p:nvSpPr>
+        <p:spPr>
+          <a:xfrm>
+            <a:off x="3493008" y="2752344"/>
+            <a:ext cx="4023360" cy="274320"/>
           </a:xfrm>
           <a:prstGeom prst="rect">
             <a:avLst/>
@@ -53216,7 +53216,7 @@
                 <a:ea typeface="Courier New" pitchFamily="34" charset="-122"/>
                 <a:cs typeface="Courier New" pitchFamily="34" charset="-120"/>
               </a:rPr>
-              <a:t>POST /api/v1/claims/analyze</a:t>
+              <a:t>LangGraph · MemorySaver</a:t>
             </a:r>
             <a:endParaRPr lang="en-US" sz="950" dirty="0"/>
           </a:p>
@@ -53224,29 +53224,26 @@
       </p:sp>
       <p:sp>
         <p:nvSpPr>
-          <p:cNvPr id="15" name="Text 12"/>
-          <p:cNvSpPr txBox="1"/>
-          <p:nvPr/>
-        </p:nvSpPr>
-        <p:spPr>
-          <a:xfrm>
-            <a:off x="786384" y="4425696"/>
-            <a:ext cx="3064154" cy="329184"/>
-          </a:xfrm>
-          <a:prstGeom prst="rect">
-            <a:avLst/>
-          </a:prstGeom>
-          <a:noFill/>
-          <a:ln/>
-        </p:spPr>
-        <p:txBody>
-          <a:bodyPr wrap="square" lIns="0" tIns="0" rIns="0" bIns="0" rtlCol="0" anchor="t"/>
-          <a:lstStyle/>
-          <a:p>
-            <a:pPr indent="0" marL="0">
-              <a:lnSpc>
-                <a:spcPct val="102000"/>
-              </a:lnSpc>
+          <p:cNvPr id="16" name="Text 13"/>
+          <p:cNvSpPr txBox="1"/>
+          <p:nvPr/>
+        </p:nvSpPr>
+        <p:spPr>
+          <a:xfrm>
+            <a:off x="7699248" y="2752344"/>
+            <a:ext cx="3779215" cy="274320"/>
+          </a:xfrm>
+          <a:prstGeom prst="rect">
+            <a:avLst/>
+          </a:prstGeom>
+          <a:noFill/>
+          <a:ln/>
+        </p:spPr>
+        <p:txBody>
+          <a:bodyPr wrap="square" lIns="0" tIns="0" rIns="0" bIns="0" rtlCol="0" anchor="t"/>
+          <a:lstStyle/>
+          <a:p>
+            <a:pPr indent="0" marL="0">
               <a:buNone/>
             </a:pPr>
             <a:r>
@@ -53258,7 +53255,7 @@
                 <a:ea typeface="Calibri" pitchFamily="34" charset="-122"/>
                 <a:cs typeface="Calibri" pitchFamily="34" charset="-120"/>
               </a:rPr>
-              <a:t>Análisis de siniestro; puede devolver una petición de datos</a:t>
+              <a:t>Grafos tipados con checkpoint e interrupción humana</a:t>
             </a:r>
             <a:endParaRPr lang="en-US" sz="1050" dirty="0"/>
           </a:p>
@@ -53266,64 +53263,42 @@
       </p:sp>
       <p:sp>
         <p:nvSpPr>
-          <p:cNvPr id="16" name="Text 13"/>
-          <p:cNvSpPr txBox="1"/>
-          <p:nvPr/>
-        </p:nvSpPr>
-        <p:spPr>
-          <a:xfrm>
-            <a:off x="4344314" y="2011680"/>
-            <a:ext cx="3503066" cy="219456"/>
-          </a:xfrm>
-          <a:prstGeom prst="rect">
-            <a:avLst/>
-          </a:prstGeom>
-          <a:noFill/>
-          <a:ln/>
-        </p:spPr>
-        <p:txBody>
-          <a:bodyPr wrap="square" lIns="0" tIns="0" rIns="0" bIns="0" rtlCol="0" anchor="t"/>
-          <a:lstStyle/>
-          <a:p>
-            <a:pPr indent="0" marL="0">
-              <a:buNone/>
-            </a:pPr>
-            <a:r>
-              <a:rPr lang="en-US" sz="950" b="1" spc="120" kern="0" dirty="0">
-                <a:solidFill>
-                  <a:srgbClr val="0079C1"/>
-                </a:solidFill>
-                <a:latin typeface="Arial" pitchFamily="34" charset="0"/>
-                <a:ea typeface="Arial" pitchFamily="34" charset="-122"/>
-                <a:cs typeface="Arial" pitchFamily="34" charset="-120"/>
-              </a:rPr>
-              <a:t>EVIDENCIA Y DEMO</a:t>
-            </a:r>
-            <a:endParaRPr lang="en-US" sz="950" dirty="0"/>
-          </a:p>
-        </p:txBody>
-      </p:sp>
-      <p:sp>
-        <p:nvSpPr>
-          <p:cNvPr id="17" name="Shape 14"/>
-          <p:cNvSpPr/>
-          <p:nvPr/>
-        </p:nvSpPr>
-        <p:spPr>
-          <a:xfrm>
-            <a:off x="4344314" y="2340864"/>
-            <a:ext cx="3503066" cy="768096"/>
-          </a:xfrm>
-          <a:prstGeom prst="roundRect">
-            <a:avLst>
-              <a:gd name="adj" fmla="val 10714"/>
-            </a:avLst>
-          </a:prstGeom>
-          <a:solidFill>
-            <a:srgbClr val="F1F6FC"/>
-          </a:solidFill>
-          <a:ln/>
-        </p:spPr>
+          <p:cNvPr id="17" name="Text 14"/>
+          <p:cNvSpPr txBox="1"/>
+          <p:nvPr/>
+        </p:nvSpPr>
+        <p:spPr>
+          <a:xfrm>
+            <a:off x="713232" y="3200400"/>
+            <a:ext cx="2651760" cy="274320"/>
+          </a:xfrm>
+          <a:prstGeom prst="rect">
+            <a:avLst/>
+          </a:prstGeom>
+          <a:noFill/>
+          <a:ln/>
+        </p:spPr>
+        <p:txBody>
+          <a:bodyPr wrap="square" lIns="0" tIns="0" rIns="0" bIns="0" rtlCol="0" anchor="t"/>
+          <a:lstStyle/>
+          <a:p>
+            <a:pPr indent="0" marL="0">
+              <a:buNone/>
+            </a:pPr>
+            <a:r>
+              <a:rPr lang="en-US" sz="1150" b="1" dirty="0">
+                <a:solidFill>
+                  <a:srgbClr val="0B1F3A"/>
+                </a:solidFill>
+                <a:latin typeface="Calibri" pitchFamily="34" charset="0"/>
+                <a:ea typeface="Calibri" pitchFamily="34" charset="-122"/>
+                <a:cs typeface="Calibri" pitchFamily="34" charset="-120"/>
+              </a:rPr>
+              <a:t>Modelos</a:t>
+            </a:r>
+            <a:endParaRPr lang="en-US" sz="1150" dirty="0"/>
+          </a:p>
+        </p:txBody>
       </p:sp>
       <p:sp>
         <p:nvSpPr>
@@ -53333,8 +53308,8 @@
         </p:nvSpPr>
         <p:spPr>
           <a:xfrm>
-            <a:off x="4563770" y="2468880"/>
-            <a:ext cx="3064154" cy="219456"/>
+            <a:off x="3493008" y="3209544"/>
+            <a:ext cx="4023360" cy="274320"/>
           </a:xfrm>
           <a:prstGeom prst="rect">
             <a:avLst/>
@@ -53352,13 +53327,13 @@
             <a:r>
               <a:rPr lang="en-US" sz="950" dirty="0">
                 <a:solidFill>
-                  <a:srgbClr val="0079C1"/>
+                  <a:srgbClr val="003781"/>
                 </a:solidFill>
                 <a:latin typeface="Courier New" pitchFamily="34" charset="0"/>
                 <a:ea typeface="Courier New" pitchFamily="34" charset="-122"/>
                 <a:cs typeface="Courier New" pitchFamily="34" charset="-120"/>
               </a:rPr>
-              <a:t>GET /api/v1/evidence/{id}</a:t>
+              <a:t>OpenAI (generación, extracción, embeddings, enrutado)</a:t>
             </a:r>
             <a:endParaRPr lang="en-US" sz="950" dirty="0"/>
           </a:p>
@@ -53372,23 +53347,20 @@
         </p:nvSpPr>
         <p:spPr>
           <a:xfrm>
-            <a:off x="4563770" y="2706624"/>
-            <a:ext cx="3064154" cy="329184"/>
-          </a:xfrm>
-          <a:prstGeom prst="rect">
-            <a:avLst/>
-          </a:prstGeom>
-          <a:noFill/>
-          <a:ln/>
-        </p:spPr>
-        <p:txBody>
-          <a:bodyPr wrap="square" lIns="0" tIns="0" rIns="0" bIns="0" rtlCol="0" anchor="t"/>
-          <a:lstStyle/>
-          <a:p>
-            <a:pPr indent="0" marL="0">
-              <a:lnSpc>
-                <a:spcPct val="102000"/>
-              </a:lnSpc>
+            <a:off x="7699248" y="3209544"/>
+            <a:ext cx="3779215" cy="274320"/>
+          </a:xfrm>
+          <a:prstGeom prst="rect">
+            <a:avLst/>
+          </a:prstGeom>
+          <a:noFill/>
+          <a:ln/>
+        </p:spPr>
+        <p:txBody>
+          <a:bodyPr wrap="square" lIns="0" tIns="0" rIns="0" bIns="0" rtlCol="0" anchor="t"/>
+          <a:lstStyle/>
+          <a:p>
+            <a:pPr indent="0" marL="0">
               <a:buNone/>
             </a:pPr>
             <a:r>
@@ -53400,7 +53372,7 @@
                 <a:ea typeface="Calibri" pitchFamily="34" charset="-122"/>
                 <a:cs typeface="Calibri" pitchFamily="34" charset="-120"/>
               </a:rPr>
-              <a:t>Devuelve la evidencia por su identificador estable</a:t>
+              <a:t>Cuatro usos distintos tras tres puertos separados</a:t>
             </a:r>
             <a:endParaRPr lang="en-US" sz="1050" dirty="0"/>
           </a:p>
@@ -53414,12 +53386,12 @@
         </p:nvSpPr>
         <p:spPr>
           <a:xfrm>
-            <a:off x="4344314" y="3200400"/>
-            <a:ext cx="3503066" cy="768096"/>
+            <a:off x="566928" y="3529584"/>
+            <a:ext cx="11057839" cy="420624"/>
           </a:xfrm>
           <a:prstGeom prst="roundRect">
             <a:avLst>
-              <a:gd name="adj" fmla="val 10714"/>
+              <a:gd name="adj" fmla="val 19565"/>
             </a:avLst>
           </a:prstGeom>
           <a:solidFill>
@@ -53436,8 +53408,47 @@
         </p:nvSpPr>
         <p:spPr>
           <a:xfrm>
-            <a:off x="4563770" y="3328416"/>
-            <a:ext cx="3064154" cy="219456"/>
+            <a:off x="713232" y="3657600"/>
+            <a:ext cx="2651760" cy="274320"/>
+          </a:xfrm>
+          <a:prstGeom prst="rect">
+            <a:avLst/>
+          </a:prstGeom>
+          <a:noFill/>
+          <a:ln/>
+        </p:spPr>
+        <p:txBody>
+          <a:bodyPr wrap="square" lIns="0" tIns="0" rIns="0" bIns="0" rtlCol="0" anchor="t"/>
+          <a:lstStyle/>
+          <a:p>
+            <a:pPr indent="0" marL="0">
+              <a:buNone/>
+            </a:pPr>
+            <a:r>
+              <a:rPr lang="en-US" sz="1150" b="1" dirty="0">
+                <a:solidFill>
+                  <a:srgbClr val="0B1F3A"/>
+                </a:solidFill>
+                <a:latin typeface="Calibri" pitchFamily="34" charset="0"/>
+                <a:ea typeface="Calibri" pitchFamily="34" charset="-122"/>
+                <a:cs typeface="Calibri" pitchFamily="34" charset="-120"/>
+              </a:rPr>
+              <a:t>Índice</a:t>
+            </a:r>
+            <a:endParaRPr lang="en-US" sz="1150" dirty="0"/>
+          </a:p>
+        </p:txBody>
+      </p:sp>
+      <p:sp>
+        <p:nvSpPr>
+          <p:cNvPr id="22" name="Text 19"/>
+          <p:cNvSpPr txBox="1"/>
+          <p:nvPr/>
+        </p:nvSpPr>
+        <p:spPr>
+          <a:xfrm>
+            <a:off x="3493008" y="3666744"/>
+            <a:ext cx="4023360" cy="274320"/>
           </a:xfrm>
           <a:prstGeom prst="rect">
             <a:avLst/>
@@ -53455,13 +53466,13 @@
             <a:r>
               <a:rPr lang="en-US" sz="950" dirty="0">
                 <a:solidFill>
-                  <a:srgbClr val="0079C1"/>
+                  <a:srgbClr val="003781"/>
                 </a:solidFill>
                 <a:latin typeface="Courier New" pitchFamily="34" charset="0"/>
                 <a:ea typeface="Courier New" pitchFamily="34" charset="-122"/>
                 <a:cs typeface="Courier New" pitchFamily="34" charset="-120"/>
               </a:rPr>
-              <a:t>GET /api/v1/demo/cases</a:t>
+              <a:t>Qdrant · denso + BM25 español (fastembed) · RRF nativo</a:t>
             </a:r>
             <a:endParaRPr lang="en-US" sz="950" dirty="0"/>
           </a:p>
@@ -53469,29 +53480,26 @@
       </p:sp>
       <p:sp>
         <p:nvSpPr>
-          <p:cNvPr id="22" name="Text 19"/>
-          <p:cNvSpPr txBox="1"/>
-          <p:nvPr/>
-        </p:nvSpPr>
-        <p:spPr>
-          <a:xfrm>
-            <a:off x="4563770" y="3566160"/>
-            <a:ext cx="3064154" cy="329184"/>
-          </a:xfrm>
-          <a:prstGeom prst="rect">
-            <a:avLst/>
-          </a:prstGeom>
-          <a:noFill/>
-          <a:ln/>
-        </p:spPr>
-        <p:txBody>
-          <a:bodyPr wrap="square" lIns="0" tIns="0" rIns="0" bIns="0" rtlCol="0" anchor="t"/>
-          <a:lstStyle/>
-          <a:p>
-            <a:pPr indent="0" marL="0">
-              <a:lnSpc>
-                <a:spcPct val="102000"/>
-              </a:lnSpc>
+          <p:cNvPr id="23" name="Text 20"/>
+          <p:cNvSpPr txBox="1"/>
+          <p:nvPr/>
+        </p:nvSpPr>
+        <p:spPr>
+          <a:xfrm>
+            <a:off x="7699248" y="3666744"/>
+            <a:ext cx="3779215" cy="274320"/>
+          </a:xfrm>
+          <a:prstGeom prst="rect">
+            <a:avLst/>
+          </a:prstGeom>
+          <a:noFill/>
+          <a:ln/>
+        </p:spPr>
+        <p:txBody>
+          <a:bodyPr wrap="square" lIns="0" tIns="0" rIns="0" bIns="0" rtlCol="0" anchor="t"/>
+          <a:lstStyle/>
+          <a:p>
+            <a:pPr indent="0" marL="0">
               <a:buNone/>
             </a:pPr>
             <a:r>
@@ -53503,7 +53511,7 @@
                 <a:ea typeface="Calibri" pitchFamily="34" charset="-122"/>
                 <a:cs typeface="Calibri" pitchFamily="34" charset="-120"/>
               </a:rPr>
-              <a:t>Casos de demo, leídos del golden real sin exponer la respuesta esperada</a:t>
+              <a:t>Fusión determinista dentro del motor</a:t>
             </a:r>
             <a:endParaRPr lang="en-US" sz="1050" dirty="0"/>
           </a:p>
@@ -53511,36 +53519,53 @@
       </p:sp>
       <p:sp>
         <p:nvSpPr>
-          <p:cNvPr id="23" name="Shape 20"/>
-          <p:cNvSpPr/>
-          <p:nvPr/>
-        </p:nvSpPr>
-        <p:spPr>
-          <a:xfrm>
-            <a:off x="4344314" y="4059936"/>
-            <a:ext cx="3503066" cy="768096"/>
-          </a:xfrm>
-          <a:prstGeom prst="roundRect">
-            <a:avLst>
-              <a:gd name="adj" fmla="val 10714"/>
-            </a:avLst>
-          </a:prstGeom>
-          <a:solidFill>
-            <a:srgbClr val="F1F6FC"/>
-          </a:solidFill>
-          <a:ln/>
-        </p:spPr>
-      </p:sp>
-      <p:sp>
-        <p:nvSpPr>
           <p:cNvPr id="24" name="Text 21"/>
           <p:cNvSpPr txBox="1"/>
           <p:nvPr/>
         </p:nvSpPr>
         <p:spPr>
           <a:xfrm>
-            <a:off x="4563770" y="4187952"/>
-            <a:ext cx="3064154" cy="219456"/>
+            <a:off x="713232" y="4114800"/>
+            <a:ext cx="2651760" cy="274320"/>
+          </a:xfrm>
+          <a:prstGeom prst="rect">
+            <a:avLst/>
+          </a:prstGeom>
+          <a:noFill/>
+          <a:ln/>
+        </p:spPr>
+        <p:txBody>
+          <a:bodyPr wrap="square" lIns="0" tIns="0" rIns="0" bIns="0" rtlCol="0" anchor="t"/>
+          <a:lstStyle/>
+          <a:p>
+            <a:pPr indent="0" marL="0">
+              <a:buNone/>
+            </a:pPr>
+            <a:r>
+              <a:rPr lang="en-US" sz="1150" b="1" dirty="0">
+                <a:solidFill>
+                  <a:srgbClr val="0B1F3A"/>
+                </a:solidFill>
+                <a:latin typeface="Calibri" pitchFamily="34" charset="0"/>
+                <a:ea typeface="Calibri" pitchFamily="34" charset="-122"/>
+                <a:cs typeface="Calibri" pitchFamily="34" charset="-120"/>
+              </a:rPr>
+              <a:t>Extracción de PDF</a:t>
+            </a:r>
+            <a:endParaRPr lang="en-US" sz="1150" dirty="0"/>
+          </a:p>
+        </p:txBody>
+      </p:sp>
+      <p:sp>
+        <p:nvSpPr>
+          <p:cNvPr id="25" name="Text 22"/>
+          <p:cNvSpPr txBox="1"/>
+          <p:nvPr/>
+        </p:nvSpPr>
+        <p:spPr>
+          <a:xfrm>
+            <a:off x="3493008" y="4123944"/>
+            <a:ext cx="4023360" cy="274320"/>
           </a:xfrm>
           <a:prstGeom prst="rect">
             <a:avLst/>
@@ -53558,13 +53583,13 @@
             <a:r>
               <a:rPr lang="en-US" sz="950" dirty="0">
                 <a:solidFill>
-                  <a:srgbClr val="0079C1"/>
+                  <a:srgbClr val="003781"/>
                 </a:solidFill>
                 <a:latin typeface="Courier New" pitchFamily="34" charset="0"/>
                 <a:ea typeface="Courier New" pitchFamily="34" charset="-122"/>
                 <a:cs typeface="Courier New" pitchFamily="34" charset="-120"/>
               </a:rPr>
-              <a:t>GET /api/v1/manual/…</a:t>
+              <a:t>pypdf 6.16.2 · Docling 2.124.0</a:t>
             </a:r>
             <a:endParaRPr lang="en-US" sz="950" dirty="0"/>
           </a:p>
@@ -53572,29 +53597,26 @@
       </p:sp>
       <p:sp>
         <p:nvSpPr>
-          <p:cNvPr id="25" name="Text 22"/>
-          <p:cNvSpPr txBox="1"/>
-          <p:nvPr/>
-        </p:nvSpPr>
-        <p:spPr>
-          <a:xfrm>
-            <a:off x="4563770" y="4425696"/>
-            <a:ext cx="3064154" cy="329184"/>
-          </a:xfrm>
-          <a:prstGeom prst="rect">
-            <a:avLst/>
-          </a:prstGeom>
-          <a:noFill/>
-          <a:ln/>
-        </p:spPr>
-        <p:txBody>
-          <a:bodyPr wrap="square" lIns="0" tIns="0" rIns="0" bIns="0" rtlCol="0" anchor="t"/>
-          <a:lstStyle/>
-          <a:p>
-            <a:pPr indent="0" marL="0">
-              <a:lnSpc>
-                <a:spcPct val="102000"/>
-              </a:lnSpc>
+          <p:cNvPr id="26" name="Text 23"/>
+          <p:cNvSpPr txBox="1"/>
+          <p:nvPr/>
+        </p:nvSpPr>
+        <p:spPr>
+          <a:xfrm>
+            <a:off x="7699248" y="4123944"/>
+            <a:ext cx="3779215" cy="274320"/>
+          </a:xfrm>
+          <a:prstGeom prst="rect">
+            <a:avLst/>
+          </a:prstGeom>
+          <a:noFill/>
+          <a:ln/>
+        </p:spPr>
+        <p:txBody>
+          <a:bodyPr wrap="square" lIns="0" tIns="0" rIns="0" bIns="0" rtlCol="0" anchor="t"/>
+          <a:lstStyle/>
+          <a:p>
+            <a:pPr indent="0" marL="0">
               <a:buNone/>
             </a:pPr>
             <a:r>
@@ -53606,7 +53628,7 @@
                 <a:ea typeface="Calibri" pitchFamily="34" charset="-122"/>
                 <a:cs typeface="Calibri" pitchFamily="34" charset="-120"/>
               </a:rPr>
-              <a:t>Inspección del manual publicado: páginas, extracciones y diagnósticos</a:t>
+              <a:t>Dos perfiles publicados para el mismo documento verificado</a:t>
             </a:r>
             <a:endParaRPr lang="en-US" sz="1050" dirty="0"/>
           </a:p>
@@ -53614,57 +53636,18 @@
       </p:sp>
       <p:sp>
         <p:nvSpPr>
-          <p:cNvPr id="26" name="Text 23"/>
-          <p:cNvSpPr txBox="1"/>
-          <p:nvPr/>
-        </p:nvSpPr>
-        <p:spPr>
-          <a:xfrm>
-            <a:off x="8121701" y="2011680"/>
-            <a:ext cx="3503066" cy="219456"/>
-          </a:xfrm>
-          <a:prstGeom prst="rect">
-            <a:avLst/>
-          </a:prstGeom>
-          <a:noFill/>
-          <a:ln/>
-        </p:spPr>
-        <p:txBody>
-          <a:bodyPr wrap="square" lIns="0" tIns="0" rIns="0" bIns="0" rtlCol="0" anchor="t"/>
-          <a:lstStyle/>
-          <a:p>
-            <a:pPr indent="0" marL="0">
-              <a:buNone/>
-            </a:pPr>
-            <a:r>
-              <a:rPr lang="en-US" sz="950" b="1" spc="120" kern="0" dirty="0">
-                <a:solidFill>
-                  <a:srgbClr val="00807E"/>
-                </a:solidFill>
-                <a:latin typeface="Arial" pitchFamily="34" charset="0"/>
-                <a:ea typeface="Arial" pitchFamily="34" charset="-122"/>
-                <a:cs typeface="Arial" pitchFamily="34" charset="-120"/>
-              </a:rPr>
-              <a:t>ADMINISTRACIÓN Y SALUD</a:t>
-            </a:r>
-            <a:endParaRPr lang="en-US" sz="950" dirty="0"/>
-          </a:p>
-        </p:txBody>
-      </p:sp>
-      <p:sp>
-        <p:nvSpPr>
           <p:cNvPr id="27" name="Shape 24"/>
           <p:cNvSpPr/>
           <p:nvPr/>
         </p:nvSpPr>
         <p:spPr>
           <a:xfrm>
-            <a:off x="8121701" y="2340864"/>
-            <a:ext cx="3503066" cy="768096"/>
+            <a:off x="566928" y="4443984"/>
+            <a:ext cx="11057839" cy="420624"/>
           </a:xfrm>
           <a:prstGeom prst="roundRect">
             <a:avLst>
-              <a:gd name="adj" fmla="val 10714"/>
+              <a:gd name="adj" fmla="val 19565"/>
             </a:avLst>
           </a:prstGeom>
           <a:solidFill>
@@ -53681,8 +53664,47 @@
         </p:nvSpPr>
         <p:spPr>
           <a:xfrm>
-            <a:off x="8341157" y="2468880"/>
-            <a:ext cx="3064154" cy="219456"/>
+            <a:off x="713232" y="4572000"/>
+            <a:ext cx="2651760" cy="274320"/>
+          </a:xfrm>
+          <a:prstGeom prst="rect">
+            <a:avLst/>
+          </a:prstGeom>
+          <a:noFill/>
+          <a:ln/>
+        </p:spPr>
+        <p:txBody>
+          <a:bodyPr wrap="square" lIns="0" tIns="0" rIns="0" bIns="0" rtlCol="0" anchor="t"/>
+          <a:lstStyle/>
+          <a:p>
+            <a:pPr indent="0" marL="0">
+              <a:buNone/>
+            </a:pPr>
+            <a:r>
+              <a:rPr lang="en-US" sz="1150" b="1" dirty="0">
+                <a:solidFill>
+                  <a:srgbClr val="0B1F3A"/>
+                </a:solidFill>
+                <a:latin typeface="Calibri" pitchFamily="34" charset="0"/>
+                <a:ea typeface="Calibri" pitchFamily="34" charset="-122"/>
+                <a:cs typeface="Calibri" pitchFamily="34" charset="-120"/>
+              </a:rPr>
+              <a:t>Observabilidad y evaluación</a:t>
+            </a:r>
+            <a:endParaRPr lang="en-US" sz="1150" dirty="0"/>
+          </a:p>
+        </p:txBody>
+      </p:sp>
+      <p:sp>
+        <p:nvSpPr>
+          <p:cNvPr id="29" name="Text 26"/>
+          <p:cNvSpPr txBox="1"/>
+          <p:nvPr/>
+        </p:nvSpPr>
+        <p:spPr>
+          <a:xfrm>
+            <a:off x="3493008" y="4581144"/>
+            <a:ext cx="4023360" cy="274320"/>
           </a:xfrm>
           <a:prstGeom prst="rect">
             <a:avLst/>
@@ -53700,13 +53722,13 @@
             <a:r>
               <a:rPr lang="en-US" sz="950" dirty="0">
                 <a:solidFill>
-                  <a:srgbClr val="00807E"/>
+                  <a:srgbClr val="003781"/>
                 </a:solidFill>
                 <a:latin typeface="Courier New" pitchFamily="34" charset="0"/>
                 <a:ea typeface="Courier New" pitchFamily="34" charset="-122"/>
                 <a:cs typeface="Courier New" pitchFamily="34" charset="-120"/>
               </a:rPr>
-              <a:t>POST /api/v1/admin/ingest</a:t>
+              <a:t>Langfuse autoalojado · Ragas</a:t>
             </a:r>
             <a:endParaRPr lang="en-US" sz="950" dirty="0"/>
           </a:p>
@@ -53714,29 +53736,26 @@
       </p:sp>
       <p:sp>
         <p:nvSpPr>
-          <p:cNvPr id="29" name="Text 26"/>
-          <p:cNvSpPr txBox="1"/>
-          <p:nvPr/>
-        </p:nvSpPr>
-        <p:spPr>
-          <a:xfrm>
-            <a:off x="8341157" y="2706624"/>
-            <a:ext cx="3064154" cy="329184"/>
-          </a:xfrm>
-          <a:prstGeom prst="rect">
-            <a:avLst/>
-          </a:prstGeom>
-          <a:noFill/>
-          <a:ln/>
-        </p:spPr>
-        <p:txBody>
-          <a:bodyPr wrap="square" lIns="0" tIns="0" rIns="0" bIns="0" rtlCol="0" anchor="t"/>
-          <a:lstStyle/>
-          <a:p>
-            <a:pPr indent="0" marL="0">
-              <a:lnSpc>
-                <a:spcPct val="102000"/>
-              </a:lnSpc>
+          <p:cNvPr id="30" name="Text 27"/>
+          <p:cNvSpPr txBox="1"/>
+          <p:nvPr/>
+        </p:nvSpPr>
+        <p:spPr>
+          <a:xfrm>
+            <a:off x="7699248" y="4581144"/>
+            <a:ext cx="3779215" cy="274320"/>
+          </a:xfrm>
+          <a:prstGeom prst="rect">
+            <a:avLst/>
+          </a:prstGeom>
+          <a:noFill/>
+          <a:ln/>
+        </p:spPr>
+        <p:txBody>
+          <a:bodyPr wrap="square" lIns="0" tIns="0" rIns="0" bIns="0" rtlCol="0" anchor="t"/>
+          <a:lstStyle/>
+          <a:p>
+            <a:pPr indent="0" marL="0">
               <a:buNone/>
             </a:pPr>
             <a:r>
@@ -53748,7 +53767,7 @@
                 <a:ea typeface="Calibri" pitchFamily="34" charset="-122"/>
                 <a:cs typeface="Calibri" pitchFamily="34" charset="-120"/>
               </a:rPr>
-              <a:t>Ingesta por API; sólo acepta el manual verificado por hash</a:t>
+              <a:t>Trazas, datasets, releases y experimentos en local</a:t>
             </a:r>
             <a:endParaRPr lang="en-US" sz="1050" dirty="0"/>
           </a:p>
@@ -53756,36 +53775,53 @@
       </p:sp>
       <p:sp>
         <p:nvSpPr>
-          <p:cNvPr id="30" name="Shape 27"/>
-          <p:cNvSpPr/>
-          <p:nvPr/>
-        </p:nvSpPr>
-        <p:spPr>
-          <a:xfrm>
-            <a:off x="8121701" y="3200400"/>
-            <a:ext cx="3503066" cy="768096"/>
-          </a:xfrm>
-          <a:prstGeom prst="roundRect">
-            <a:avLst>
-              <a:gd name="adj" fmla="val 10714"/>
-            </a:avLst>
-          </a:prstGeom>
-          <a:solidFill>
-            <a:srgbClr val="F1F6FC"/>
-          </a:solidFill>
-          <a:ln/>
-        </p:spPr>
-      </p:sp>
-      <p:sp>
-        <p:nvSpPr>
           <p:cNvPr id="31" name="Text 28"/>
           <p:cNvSpPr txBox="1"/>
           <p:nvPr/>
         </p:nvSpPr>
         <p:spPr>
           <a:xfrm>
-            <a:off x="8341157" y="3328416"/>
-            <a:ext cx="3064154" cy="219456"/>
+            <a:off x="713232" y="5029200"/>
+            <a:ext cx="2651760" cy="274320"/>
+          </a:xfrm>
+          <a:prstGeom prst="rect">
+            <a:avLst/>
+          </a:prstGeom>
+          <a:noFill/>
+          <a:ln/>
+        </p:spPr>
+        <p:txBody>
+          <a:bodyPr wrap="square" lIns="0" tIns="0" rIns="0" bIns="0" rtlCol="0" anchor="t"/>
+          <a:lstStyle/>
+          <a:p>
+            <a:pPr indent="0" marL="0">
+              <a:buNone/>
+            </a:pPr>
+            <a:r>
+              <a:rPr lang="en-US" sz="1150" b="1" dirty="0">
+                <a:solidFill>
+                  <a:srgbClr val="0B1F3A"/>
+                </a:solidFill>
+                <a:latin typeface="Calibri" pitchFamily="34" charset="0"/>
+                <a:ea typeface="Calibri" pitchFamily="34" charset="-122"/>
+                <a:cs typeface="Calibri" pitchFamily="34" charset="-120"/>
+              </a:rPr>
+              <a:t>Cliente</a:t>
+            </a:r>
+            <a:endParaRPr lang="en-US" sz="1150" dirty="0"/>
+          </a:p>
+        </p:txBody>
+      </p:sp>
+      <p:sp>
+        <p:nvSpPr>
+          <p:cNvPr id="32" name="Text 29"/>
+          <p:cNvSpPr txBox="1"/>
+          <p:nvPr/>
+        </p:nvSpPr>
+        <p:spPr>
+          <a:xfrm>
+            <a:off x="3493008" y="5038344"/>
+            <a:ext cx="4023360" cy="274320"/>
           </a:xfrm>
           <a:prstGeom prst="rect">
             <a:avLst/>
@@ -53803,13 +53839,13 @@
             <a:r>
               <a:rPr lang="en-US" sz="950" dirty="0">
                 <a:solidFill>
-                  <a:srgbClr val="00807E"/>
+                  <a:srgbClr val="003781"/>
                 </a:solidFill>
                 <a:latin typeface="Courier New" pitchFamily="34" charset="0"/>
                 <a:ea typeface="Courier New" pitchFamily="34" charset="-122"/>
                 <a:cs typeface="Courier New" pitchFamily="34" charset="-120"/>
               </a:rPr>
-              <a:t>GET /health/ready</a:t>
+              <a:t>React 19 · Vite · TypeScript estricto · pdfjs-dist</a:t>
             </a:r>
             <a:endParaRPr lang="en-US" sz="950" dirty="0"/>
           </a:p>
@@ -53817,29 +53853,26 @@
       </p:sp>
       <p:sp>
         <p:nvSpPr>
-          <p:cNvPr id="32" name="Text 29"/>
-          <p:cNvSpPr txBox="1"/>
-          <p:nvPr/>
-        </p:nvSpPr>
-        <p:spPr>
-          <a:xfrm>
-            <a:off x="8341157" y="3566160"/>
-            <a:ext cx="3064154" cy="329184"/>
-          </a:xfrm>
-          <a:prstGeom prst="rect">
-            <a:avLst/>
-          </a:prstGeom>
-          <a:noFill/>
-          <a:ln/>
-        </p:spPr>
-        <p:txBody>
-          <a:bodyPr wrap="square" lIns="0" tIns="0" rIns="0" bIns="0" rtlCol="0" anchor="t"/>
-          <a:lstStyle/>
-          <a:p>
-            <a:pPr indent="0" marL="0">
-              <a:lnSpc>
-                <a:spcPct val="102000"/>
-              </a:lnSpc>
+          <p:cNvPr id="33" name="Text 30"/>
+          <p:cNvSpPr txBox="1"/>
+          <p:nvPr/>
+        </p:nvSpPr>
+        <p:spPr>
+          <a:xfrm>
+            <a:off x="7699248" y="5038344"/>
+            <a:ext cx="3779215" cy="274320"/>
+          </a:xfrm>
+          <a:prstGeom prst="rect">
+            <a:avLst/>
+          </a:prstGeom>
+          <a:noFill/>
+          <a:ln/>
+        </p:spPr>
+        <p:txBody>
+          <a:bodyPr wrap="square" lIns="0" tIns="0" rIns="0" bIns="0" rtlCol="0" anchor="t"/>
+          <a:lstStyle/>
+          <a:p>
+            <a:pPr indent="0" marL="0">
               <a:buNone/>
             </a:pPr>
             <a:r>
@@ -53851,7 +53884,7 @@
                 <a:ea typeface="Calibri" pitchFamily="34" charset="-122"/>
                 <a:cs typeface="Calibri" pitchFamily="34" charset="-120"/>
               </a:rPr>
-              <a:t>Preparación real de dependencias, sin llamadas pagadas al modelo</a:t>
+              <a:t>Tipos generados del OpenAPI; visor que rasteriza sólo la página visible</a:t>
             </a:r>
             <a:endParaRPr lang="en-US" sz="1050" dirty="0"/>
           </a:p>
@@ -53859,18 +53892,18 @@
       </p:sp>
       <p:sp>
         <p:nvSpPr>
-          <p:cNvPr id="33" name="Shape 30"/>
-          <p:cNvSpPr/>
-          <p:nvPr/>
-        </p:nvSpPr>
-        <p:spPr>
-          <a:xfrm>
-            <a:off x="8121701" y="4059936"/>
-            <a:ext cx="3503066" cy="768096"/>
+          <p:cNvPr id="34" name="Shape 31"/>
+          <p:cNvSpPr/>
+          <p:nvPr/>
+        </p:nvSpPr>
+        <p:spPr>
+          <a:xfrm>
+            <a:off x="566928" y="5358384"/>
+            <a:ext cx="11057839" cy="420624"/>
           </a:xfrm>
           <a:prstGeom prst="roundRect">
             <a:avLst>
-              <a:gd name="adj" fmla="val 10714"/>
+              <a:gd name="adj" fmla="val 19565"/>
             </a:avLst>
           </a:prstGeom>
           <a:solidFill>
@@ -53881,14 +53914,53 @@
       </p:sp>
       <p:sp>
         <p:nvSpPr>
-          <p:cNvPr id="34" name="Text 31"/>
-          <p:cNvSpPr txBox="1"/>
-          <p:nvPr/>
-        </p:nvSpPr>
-        <p:spPr>
-          <a:xfrm>
-            <a:off x="8341157" y="4187952"/>
-            <a:ext cx="3064154" cy="219456"/>
+          <p:cNvPr id="35" name="Text 32"/>
+          <p:cNvSpPr txBox="1"/>
+          <p:nvPr/>
+        </p:nvSpPr>
+        <p:spPr>
+          <a:xfrm>
+            <a:off x="713232" y="5486400"/>
+            <a:ext cx="2651760" cy="274320"/>
+          </a:xfrm>
+          <a:prstGeom prst="rect">
+            <a:avLst/>
+          </a:prstGeom>
+          <a:noFill/>
+          <a:ln/>
+        </p:spPr>
+        <p:txBody>
+          <a:bodyPr wrap="square" lIns="0" tIns="0" rIns="0" bIns="0" rtlCol="0" anchor="t"/>
+          <a:lstStyle/>
+          <a:p>
+            <a:pPr indent="0" marL="0">
+              <a:buNone/>
+            </a:pPr>
+            <a:r>
+              <a:rPr lang="en-US" sz="1150" b="1" dirty="0">
+                <a:solidFill>
+                  <a:srgbClr val="0B1F3A"/>
+                </a:solidFill>
+                <a:latin typeface="Calibri" pitchFamily="34" charset="0"/>
+                <a:ea typeface="Calibri" pitchFamily="34" charset="-122"/>
+                <a:cs typeface="Calibri" pitchFamily="34" charset="-120"/>
+              </a:rPr>
+              <a:t>Calidad</a:t>
+            </a:r>
+            <a:endParaRPr lang="en-US" sz="1150" dirty="0"/>
+          </a:p>
+        </p:txBody>
+      </p:sp>
+      <p:sp>
+        <p:nvSpPr>
+          <p:cNvPr id="36" name="Text 33"/>
+          <p:cNvSpPr txBox="1"/>
+          <p:nvPr/>
+        </p:nvSpPr>
+        <p:spPr>
+          <a:xfrm>
+            <a:off x="3493008" y="5495544"/>
+            <a:ext cx="4023360" cy="274320"/>
           </a:xfrm>
           <a:prstGeom prst="rect">
             <a:avLst/>
@@ -53906,13 +53978,13 @@
             <a:r>
               <a:rPr lang="en-US" sz="950" dirty="0">
                 <a:solidFill>
-                  <a:srgbClr val="00807E"/>
+                  <a:srgbClr val="003781"/>
                 </a:solidFill>
                 <a:latin typeface="Courier New" pitchFamily="34" charset="0"/>
                 <a:ea typeface="Courier New" pitchFamily="34" charset="-122"/>
                 <a:cs typeface="Courier New" pitchFamily="34" charset="-120"/>
               </a:rPr>
-              <a:t>GET /openapi.json</a:t>
+              <a:t>pytest · vitest · pyright · ruff · eslint</a:t>
             </a:r>
             <a:endParaRPr lang="en-US" sz="950" dirty="0"/>
           </a:p>
@@ -53920,29 +53992,26 @@
       </p:sp>
       <p:sp>
         <p:nvSpPr>
-          <p:cNvPr id="35" name="Text 32"/>
-          <p:cNvSpPr txBox="1"/>
-          <p:nvPr/>
-        </p:nvSpPr>
-        <p:spPr>
-          <a:xfrm>
-            <a:off x="8341157" y="4425696"/>
-            <a:ext cx="3064154" cy="329184"/>
-          </a:xfrm>
-          <a:prstGeom prst="rect">
-            <a:avLst/>
-          </a:prstGeom>
-          <a:noFill/>
-          <a:ln/>
-        </p:spPr>
-        <p:txBody>
-          <a:bodyPr wrap="square" lIns="0" tIns="0" rIns="0" bIns="0" rtlCol="0" anchor="t"/>
-          <a:lstStyle/>
-          <a:p>
-            <a:pPr indent="0" marL="0">
-              <a:lnSpc>
-                <a:spcPct val="102000"/>
-              </a:lnSpc>
+          <p:cNvPr id="37" name="Text 34"/>
+          <p:cNvSpPr txBox="1"/>
+          <p:nvPr/>
+        </p:nvSpPr>
+        <p:spPr>
+          <a:xfrm>
+            <a:off x="7699248" y="5495544"/>
+            <a:ext cx="3779215" cy="274320"/>
+          </a:xfrm>
+          <a:prstGeom prst="rect">
+            <a:avLst/>
+          </a:prstGeom>
+          <a:noFill/>
+          <a:ln/>
+        </p:spPr>
+        <p:txBody>
+          <a:bodyPr wrap="square" lIns="0" tIns="0" rIns="0" bIns="0" rtlCol="0" anchor="t"/>
+          <a:lstStyle/>
+          <a:p>
+            <a:pPr indent="0" marL="0">
               <a:buNone/>
             </a:pPr>
             <a:r>
@@ -53954,146 +54023,9 @@
                 <a:ea typeface="Calibri" pitchFamily="34" charset="-122"/>
                 <a:cs typeface="Calibri" pitchFamily="34" charset="-120"/>
               </a:rPr>
-              <a:t>Contrato del que se generan los tipos del cliente</a:t>
+              <a:t>Cinco puertas reproducibles con un comando</a:t>
             </a:r>
             <a:endParaRPr lang="en-US" sz="1050" dirty="0"/>
-          </a:p>
-        </p:txBody>
-      </p:sp>
-      <p:sp>
-        <p:nvSpPr>
-          <p:cNvPr id="36" name="Shape 33"/>
-          <p:cNvSpPr/>
-          <p:nvPr/>
-        </p:nvSpPr>
-        <p:spPr>
-          <a:xfrm>
-            <a:off x="566928" y="5138928"/>
-            <a:ext cx="11057839" cy="548640"/>
-          </a:xfrm>
-          <a:prstGeom prst="roundRect">
-            <a:avLst>
-              <a:gd name="adj" fmla="val 16667"/>
-            </a:avLst>
-          </a:prstGeom>
-          <a:solidFill>
-            <a:srgbClr val="FFFFFF"/>
-          </a:solidFill>
-          <a:ln w="12700">
-            <a:solidFill>
-              <a:srgbClr val="D9E4F0"/>
-            </a:solidFill>
-            <a:prstDash val="solid"/>
-          </a:ln>
-          <a:effectLst>
-            <a:outerShdw sx="100000" sy="100000" kx="0" ky="0" algn="bl" rotWithShape="0" blurRad="88900" dist="19050" dir="5400000">
-              <a:srgbClr val="99AEC6">
-                <a:alpha val="28000"/>
-              </a:srgbClr>
-            </a:outerShdw>
-          </a:effectLst>
-        </p:spPr>
-      </p:sp>
-      <p:sp>
-        <p:nvSpPr>
-          <p:cNvPr id="37" name="Text 34"/>
-          <p:cNvSpPr txBox="1"/>
-          <p:nvPr/>
-        </p:nvSpPr>
-        <p:spPr>
-          <a:xfrm>
-            <a:off x="841248" y="5294376"/>
-            <a:ext cx="10509199" cy="256032"/>
-          </a:xfrm>
-          <a:prstGeom prst="rect">
-            <a:avLst/>
-          </a:prstGeom>
-          <a:noFill/>
-          <a:ln/>
-        </p:spPr>
-        <p:txBody>
-          <a:bodyPr wrap="square" lIns="0" tIns="0" rIns="0" bIns="0" rtlCol="0" anchor="t"/>
-          <a:lstStyle/>
-          <a:p>
-            <a:pPr algn="ctr" indent="0" marL="0">
-              <a:buNone/>
-            </a:pPr>
-            <a:r>
-              <a:rPr lang="en-US" sz="1150" dirty="0">
-                <a:solidFill>
-                  <a:srgbClr val="0B1F3A"/>
-                </a:solidFill>
-                <a:latin typeface="Calibri" pitchFamily="34" charset="0"/>
-                <a:ea typeface="Calibri" pitchFamily="34" charset="-122"/>
-                <a:cs typeface="Calibri" pitchFamily="34" charset="-120"/>
-              </a:rPr>
-              <a:t>El sobre de respuesta es común a los tres recorridos: identifica el modo seguido, las etapas ejecutadas, las citas y el estado — por eso la interfaz enseña el razonamiento sin duplicar lógica.</a:t>
-            </a:r>
-            <a:endParaRPr lang="en-US" sz="1150" dirty="0"/>
-          </a:p>
-        </p:txBody>
-      </p:sp>
-      <p:sp>
-        <p:nvSpPr>
-          <p:cNvPr id="38" name="Shape 35"/>
-          <p:cNvSpPr/>
-          <p:nvPr/>
-        </p:nvSpPr>
-        <p:spPr>
-          <a:xfrm>
-            <a:off x="566928" y="5852160"/>
-            <a:ext cx="11057839" cy="493776"/>
-          </a:xfrm>
-          <a:prstGeom prst="roundRect">
-            <a:avLst>
-              <a:gd name="adj" fmla="val 16667"/>
-            </a:avLst>
-          </a:prstGeom>
-          <a:solidFill>
-            <a:srgbClr val="003781"/>
-          </a:solidFill>
-          <a:ln/>
-        </p:spPr>
-      </p:sp>
-      <p:sp>
-        <p:nvSpPr>
-          <p:cNvPr id="39" name="Text 36"/>
-          <p:cNvSpPr txBox="1"/>
-          <p:nvPr/>
-        </p:nvSpPr>
-        <p:spPr>
-          <a:xfrm>
-            <a:off x="841248" y="5943600"/>
-            <a:ext cx="10509199" cy="329184"/>
-          </a:xfrm>
-          <a:prstGeom prst="rect">
-            <a:avLst/>
-          </a:prstGeom>
-          <a:noFill/>
-          <a:ln/>
-        </p:spPr>
-        <p:txBody>
-          <a:bodyPr wrap="square" lIns="0" tIns="0" rIns="0" bIns="0" rtlCol="0" anchor="t"/>
-          <a:lstStyle/>
-          <a:p>
-            <a:pPr algn="ctr" indent="0" marL="0">
-              <a:lnSpc>
-                <a:spcPct val="95000"/>
-              </a:lnSpc>
-              <a:buNone/>
-            </a:pPr>
-            <a:r>
-              <a:rPr lang="en-US" sz="1250" b="1" dirty="0">
-                <a:solidFill>
-                  <a:srgbClr val="FFFFFF"/>
-                </a:solidFill>
-                <a:latin typeface="Calibri" pitchFamily="34" charset="0"/>
-                <a:ea typeface="Calibri" pitchFamily="34" charset="-122"/>
-                <a:cs typeface="Calibri" pitchFamily="34" charset="-120"/>
-              </a:rPr>
-              <a:t>Un solo contrato publicado en OpenAPI; los tipos del cliente se generan de él, y una comprobación falla si se separan.</a:t>
-            </a:r>
-            <a:endParaRPr lang="en-US" sz="1250" dirty="0"/>
           </a:p>
         </p:txBody>
       </p:sp>
@@ -54162,7 +54094,7 @@
                 <a:ea typeface="Arial" pitchFamily="34" charset="-122"/>
                 <a:cs typeface="Arial" pitchFamily="34" charset="-120"/>
               </a:rPr>
-              <a:t>APÉNDICE · DOMINIO</a:t>
+              <a:t>APÉNDICE · API</a:t>
             </a:r>
             <a:endParaRPr lang="en-US" sz="1050" dirty="0"/>
           </a:p>
@@ -54266,7 +54198,7 @@
                 <a:ea typeface="Arial" pitchFamily="34" charset="-122"/>
                 <a:cs typeface="Arial" pitchFamily="34" charset="-120"/>
               </a:rPr>
-              <a:t>Glosario mínimo del dominio, para que nadie asienta sin seguirlo.</a:t>
+              <a:t>Superficie de API: un sobre común tipado para los tres recorridos.</a:t>
             </a:r>
             <a:endParaRPr lang="en-US" sz="2600" dirty="0"/>
           </a:p>
@@ -54274,22 +54206,1066 @@
       </p:sp>
       <p:sp>
         <p:nvSpPr>
-          <p:cNvPr id="6" name="Shape 3"/>
-          <p:cNvSpPr/>
-          <p:nvPr/>
-        </p:nvSpPr>
-        <p:spPr>
-          <a:xfrm>
-            <a:off x="566928" y="1865376"/>
-            <a:ext cx="5363870" cy="1005840"/>
+          <p:cNvPr id="6" name="Text 3"/>
+          <p:cNvSpPr txBox="1"/>
+          <p:nvPr/>
+        </p:nvSpPr>
+        <p:spPr>
+          <a:xfrm>
+            <a:off x="566928" y="2011680"/>
+            <a:ext cx="3503066" cy="219456"/>
+          </a:xfrm>
+          <a:prstGeom prst="rect">
+            <a:avLst/>
+          </a:prstGeom>
+          <a:noFill/>
+          <a:ln/>
+        </p:spPr>
+        <p:txBody>
+          <a:bodyPr wrap="square" lIns="0" tIns="0" rIns="0" bIns="0" rtlCol="0" anchor="t"/>
+          <a:lstStyle/>
+          <a:p>
+            <a:pPr indent="0" marL="0">
+              <a:buNone/>
+            </a:pPr>
+            <a:r>
+              <a:rPr lang="en-US" sz="950" b="1" spc="120" kern="0" dirty="0">
+                <a:solidFill>
+                  <a:srgbClr val="003781"/>
+                </a:solidFill>
+                <a:latin typeface="Arial" pitchFamily="34" charset="0"/>
+                <a:ea typeface="Arial" pitchFamily="34" charset="-122"/>
+                <a:cs typeface="Arial" pitchFamily="34" charset="-120"/>
+              </a:rPr>
+              <a:t>CONVERSACIÓN</a:t>
+            </a:r>
+            <a:endParaRPr lang="en-US" sz="950" dirty="0"/>
+          </a:p>
+        </p:txBody>
+      </p:sp>
+      <p:sp>
+        <p:nvSpPr>
+          <p:cNvPr id="7" name="Shape 4"/>
+          <p:cNvSpPr/>
+          <p:nvPr/>
+        </p:nvSpPr>
+        <p:spPr>
+          <a:xfrm>
+            <a:off x="566928" y="2340864"/>
+            <a:ext cx="3503066" cy="768096"/>
           </a:xfrm>
           <a:prstGeom prst="roundRect">
             <a:avLst>
-              <a:gd name="adj" fmla="val 9091"/>
+              <a:gd name="adj" fmla="val 10714"/>
             </a:avLst>
           </a:prstGeom>
           <a:solidFill>
             <a:srgbClr val="F1F6FC"/>
+          </a:solidFill>
+          <a:ln/>
+        </p:spPr>
+      </p:sp>
+      <p:sp>
+        <p:nvSpPr>
+          <p:cNvPr id="8" name="Text 5"/>
+          <p:cNvSpPr txBox="1"/>
+          <p:nvPr/>
+        </p:nvSpPr>
+        <p:spPr>
+          <a:xfrm>
+            <a:off x="786384" y="2468880"/>
+            <a:ext cx="3064154" cy="219456"/>
+          </a:xfrm>
+          <a:prstGeom prst="rect">
+            <a:avLst/>
+          </a:prstGeom>
+          <a:noFill/>
+          <a:ln/>
+        </p:spPr>
+        <p:txBody>
+          <a:bodyPr wrap="square" lIns="0" tIns="0" rIns="0" bIns="0" rtlCol="0" anchor="t"/>
+          <a:lstStyle/>
+          <a:p>
+            <a:pPr indent="0" marL="0">
+              <a:buNone/>
+            </a:pPr>
+            <a:r>
+              <a:rPr lang="en-US" sz="950" dirty="0">
+                <a:solidFill>
+                  <a:srgbClr val="003781"/>
+                </a:solidFill>
+                <a:latin typeface="Courier New" pitchFamily="34" charset="0"/>
+                <a:ea typeface="Courier New" pitchFamily="34" charset="-122"/>
+                <a:cs typeface="Courier New" pitchFamily="34" charset="-120"/>
+              </a:rPr>
+              <a:t>POST /api/v1/queries/resolve</a:t>
+            </a:r>
+            <a:endParaRPr lang="en-US" sz="950" dirty="0"/>
+          </a:p>
+        </p:txBody>
+      </p:sp>
+      <p:sp>
+        <p:nvSpPr>
+          <p:cNvPr id="9" name="Text 6"/>
+          <p:cNvSpPr txBox="1"/>
+          <p:nvPr/>
+        </p:nvSpPr>
+        <p:spPr>
+          <a:xfrm>
+            <a:off x="786384" y="2706624"/>
+            <a:ext cx="3064154" cy="329184"/>
+          </a:xfrm>
+          <a:prstGeom prst="rect">
+            <a:avLst/>
+          </a:prstGeom>
+          <a:noFill/>
+          <a:ln/>
+        </p:spPr>
+        <p:txBody>
+          <a:bodyPr wrap="square" lIns="0" tIns="0" rIns="0" bIns="0" rtlCol="0" anchor="t"/>
+          <a:lstStyle/>
+          <a:p>
+            <a:pPr indent="0" marL="0">
+              <a:lnSpc>
+                <a:spcPct val="102000"/>
+              </a:lnSpc>
+              <a:buNone/>
+            </a:pPr>
+            <a:r>
+              <a:rPr lang="en-US" sz="1050" dirty="0">
+                <a:solidFill>
+                  <a:srgbClr val="5D7189"/>
+                </a:solidFill>
+                <a:latin typeface="Calibri" pitchFamily="34" charset="0"/>
+                <a:ea typeface="Calibri" pitchFamily="34" charset="-122"/>
+                <a:cs typeface="Calibri" pitchFamily="34" charset="-120"/>
+              </a:rPr>
+              <a:t>Modo automático: clasifica y delega en el recorrido correcto</a:t>
+            </a:r>
+            <a:endParaRPr lang="en-US" sz="1050" dirty="0"/>
+          </a:p>
+        </p:txBody>
+      </p:sp>
+      <p:sp>
+        <p:nvSpPr>
+          <p:cNvPr id="10" name="Shape 7"/>
+          <p:cNvSpPr/>
+          <p:nvPr/>
+        </p:nvSpPr>
+        <p:spPr>
+          <a:xfrm>
+            <a:off x="566928" y="3200400"/>
+            <a:ext cx="3503066" cy="768096"/>
+          </a:xfrm>
+          <a:prstGeom prst="roundRect">
+            <a:avLst>
+              <a:gd name="adj" fmla="val 10714"/>
+            </a:avLst>
+          </a:prstGeom>
+          <a:solidFill>
+            <a:srgbClr val="F1F6FC"/>
+          </a:solidFill>
+          <a:ln/>
+        </p:spPr>
+      </p:sp>
+      <p:sp>
+        <p:nvSpPr>
+          <p:cNvPr id="11" name="Text 8"/>
+          <p:cNvSpPr txBox="1"/>
+          <p:nvPr/>
+        </p:nvSpPr>
+        <p:spPr>
+          <a:xfrm>
+            <a:off x="786384" y="3328416"/>
+            <a:ext cx="3064154" cy="219456"/>
+          </a:xfrm>
+          <a:prstGeom prst="rect">
+            <a:avLst/>
+          </a:prstGeom>
+          <a:noFill/>
+          <a:ln/>
+        </p:spPr>
+        <p:txBody>
+          <a:bodyPr wrap="square" lIns="0" tIns="0" rIns="0" bIns="0" rtlCol="0" anchor="t"/>
+          <a:lstStyle/>
+          <a:p>
+            <a:pPr indent="0" marL="0">
+              <a:buNone/>
+            </a:pPr>
+            <a:r>
+              <a:rPr lang="en-US" sz="950" dirty="0">
+                <a:solidFill>
+                  <a:srgbClr val="003781"/>
+                </a:solidFill>
+                <a:latin typeface="Courier New" pitchFamily="34" charset="0"/>
+                <a:ea typeface="Courier New" pitchFamily="34" charset="-122"/>
+                <a:cs typeface="Courier New" pitchFamily="34" charset="-120"/>
+              </a:rPr>
+              <a:t>POST /api/v1/questions/answer</a:t>
+            </a:r>
+            <a:endParaRPr lang="en-US" sz="950" dirty="0"/>
+          </a:p>
+        </p:txBody>
+      </p:sp>
+      <p:sp>
+        <p:nvSpPr>
+          <p:cNvPr id="12" name="Text 9"/>
+          <p:cNvSpPr txBox="1"/>
+          <p:nvPr/>
+        </p:nvSpPr>
+        <p:spPr>
+          <a:xfrm>
+            <a:off x="786384" y="3566160"/>
+            <a:ext cx="3064154" cy="329184"/>
+          </a:xfrm>
+          <a:prstGeom prst="rect">
+            <a:avLst/>
+          </a:prstGeom>
+          <a:noFill/>
+          <a:ln/>
+        </p:spPr>
+        <p:txBody>
+          <a:bodyPr wrap="square" lIns="0" tIns="0" rIns="0" bIns="0" rtlCol="0" anchor="t"/>
+          <a:lstStyle/>
+          <a:p>
+            <a:pPr indent="0" marL="0">
+              <a:lnSpc>
+                <a:spcPct val="102000"/>
+              </a:lnSpc>
+              <a:buNone/>
+            </a:pPr>
+            <a:r>
+              <a:rPr lang="en-US" sz="1050" dirty="0">
+                <a:solidFill>
+                  <a:srgbClr val="5D7189"/>
+                </a:solidFill>
+                <a:latin typeface="Calibri" pitchFamily="34" charset="0"/>
+                <a:ea typeface="Calibri" pitchFamily="34" charset="-122"/>
+                <a:cs typeface="Calibri" pitchFamily="34" charset="-120"/>
+              </a:rPr>
+              <a:t>Consulta documental con citas; admite respuesta por SSE</a:t>
+            </a:r>
+            <a:endParaRPr lang="en-US" sz="1050" dirty="0"/>
+          </a:p>
+        </p:txBody>
+      </p:sp>
+      <p:sp>
+        <p:nvSpPr>
+          <p:cNvPr id="13" name="Shape 10"/>
+          <p:cNvSpPr/>
+          <p:nvPr/>
+        </p:nvSpPr>
+        <p:spPr>
+          <a:xfrm>
+            <a:off x="566928" y="4059936"/>
+            <a:ext cx="3503066" cy="768096"/>
+          </a:xfrm>
+          <a:prstGeom prst="roundRect">
+            <a:avLst>
+              <a:gd name="adj" fmla="val 10714"/>
+            </a:avLst>
+          </a:prstGeom>
+          <a:solidFill>
+            <a:srgbClr val="F1F6FC"/>
+          </a:solidFill>
+          <a:ln/>
+        </p:spPr>
+      </p:sp>
+      <p:sp>
+        <p:nvSpPr>
+          <p:cNvPr id="14" name="Text 11"/>
+          <p:cNvSpPr txBox="1"/>
+          <p:nvPr/>
+        </p:nvSpPr>
+        <p:spPr>
+          <a:xfrm>
+            <a:off x="786384" y="4187952"/>
+            <a:ext cx="3064154" cy="219456"/>
+          </a:xfrm>
+          <a:prstGeom prst="rect">
+            <a:avLst/>
+          </a:prstGeom>
+          <a:noFill/>
+          <a:ln/>
+        </p:spPr>
+        <p:txBody>
+          <a:bodyPr wrap="square" lIns="0" tIns="0" rIns="0" bIns="0" rtlCol="0" anchor="t"/>
+          <a:lstStyle/>
+          <a:p>
+            <a:pPr indent="0" marL="0">
+              <a:buNone/>
+            </a:pPr>
+            <a:r>
+              <a:rPr lang="en-US" sz="950" dirty="0">
+                <a:solidFill>
+                  <a:srgbClr val="003781"/>
+                </a:solidFill>
+                <a:latin typeface="Courier New" pitchFamily="34" charset="0"/>
+                <a:ea typeface="Courier New" pitchFamily="34" charset="-122"/>
+                <a:cs typeface="Courier New" pitchFamily="34" charset="-120"/>
+              </a:rPr>
+              <a:t>POST /api/v1/claims/analyze</a:t>
+            </a:r>
+            <a:endParaRPr lang="en-US" sz="950" dirty="0"/>
+          </a:p>
+        </p:txBody>
+      </p:sp>
+      <p:sp>
+        <p:nvSpPr>
+          <p:cNvPr id="15" name="Text 12"/>
+          <p:cNvSpPr txBox="1"/>
+          <p:nvPr/>
+        </p:nvSpPr>
+        <p:spPr>
+          <a:xfrm>
+            <a:off x="786384" y="4425696"/>
+            <a:ext cx="3064154" cy="329184"/>
+          </a:xfrm>
+          <a:prstGeom prst="rect">
+            <a:avLst/>
+          </a:prstGeom>
+          <a:noFill/>
+          <a:ln/>
+        </p:spPr>
+        <p:txBody>
+          <a:bodyPr wrap="square" lIns="0" tIns="0" rIns="0" bIns="0" rtlCol="0" anchor="t"/>
+          <a:lstStyle/>
+          <a:p>
+            <a:pPr indent="0" marL="0">
+              <a:lnSpc>
+                <a:spcPct val="102000"/>
+              </a:lnSpc>
+              <a:buNone/>
+            </a:pPr>
+            <a:r>
+              <a:rPr lang="en-US" sz="1050" dirty="0">
+                <a:solidFill>
+                  <a:srgbClr val="5D7189"/>
+                </a:solidFill>
+                <a:latin typeface="Calibri" pitchFamily="34" charset="0"/>
+                <a:ea typeface="Calibri" pitchFamily="34" charset="-122"/>
+                <a:cs typeface="Calibri" pitchFamily="34" charset="-120"/>
+              </a:rPr>
+              <a:t>Análisis de siniestro; puede devolver una petición de datos</a:t>
+            </a:r>
+            <a:endParaRPr lang="en-US" sz="1050" dirty="0"/>
+          </a:p>
+        </p:txBody>
+      </p:sp>
+      <p:sp>
+        <p:nvSpPr>
+          <p:cNvPr id="16" name="Text 13"/>
+          <p:cNvSpPr txBox="1"/>
+          <p:nvPr/>
+        </p:nvSpPr>
+        <p:spPr>
+          <a:xfrm>
+            <a:off x="4344314" y="2011680"/>
+            <a:ext cx="3503066" cy="219456"/>
+          </a:xfrm>
+          <a:prstGeom prst="rect">
+            <a:avLst/>
+          </a:prstGeom>
+          <a:noFill/>
+          <a:ln/>
+        </p:spPr>
+        <p:txBody>
+          <a:bodyPr wrap="square" lIns="0" tIns="0" rIns="0" bIns="0" rtlCol="0" anchor="t"/>
+          <a:lstStyle/>
+          <a:p>
+            <a:pPr indent="0" marL="0">
+              <a:buNone/>
+            </a:pPr>
+            <a:r>
+              <a:rPr lang="en-US" sz="950" b="1" spc="120" kern="0" dirty="0">
+                <a:solidFill>
+                  <a:srgbClr val="0079C1"/>
+                </a:solidFill>
+                <a:latin typeface="Arial" pitchFamily="34" charset="0"/>
+                <a:ea typeface="Arial" pitchFamily="34" charset="-122"/>
+                <a:cs typeface="Arial" pitchFamily="34" charset="-120"/>
+              </a:rPr>
+              <a:t>EVIDENCIA Y DEMO</a:t>
+            </a:r>
+            <a:endParaRPr lang="en-US" sz="950" dirty="0"/>
+          </a:p>
+        </p:txBody>
+      </p:sp>
+      <p:sp>
+        <p:nvSpPr>
+          <p:cNvPr id="17" name="Shape 14"/>
+          <p:cNvSpPr/>
+          <p:nvPr/>
+        </p:nvSpPr>
+        <p:spPr>
+          <a:xfrm>
+            <a:off x="4344314" y="2340864"/>
+            <a:ext cx="3503066" cy="768096"/>
+          </a:xfrm>
+          <a:prstGeom prst="roundRect">
+            <a:avLst>
+              <a:gd name="adj" fmla="val 10714"/>
+            </a:avLst>
+          </a:prstGeom>
+          <a:solidFill>
+            <a:srgbClr val="F1F6FC"/>
+          </a:solidFill>
+          <a:ln/>
+        </p:spPr>
+      </p:sp>
+      <p:sp>
+        <p:nvSpPr>
+          <p:cNvPr id="18" name="Text 15"/>
+          <p:cNvSpPr txBox="1"/>
+          <p:nvPr/>
+        </p:nvSpPr>
+        <p:spPr>
+          <a:xfrm>
+            <a:off x="4563770" y="2468880"/>
+            <a:ext cx="3064154" cy="219456"/>
+          </a:xfrm>
+          <a:prstGeom prst="rect">
+            <a:avLst/>
+          </a:prstGeom>
+          <a:noFill/>
+          <a:ln/>
+        </p:spPr>
+        <p:txBody>
+          <a:bodyPr wrap="square" lIns="0" tIns="0" rIns="0" bIns="0" rtlCol="0" anchor="t"/>
+          <a:lstStyle/>
+          <a:p>
+            <a:pPr indent="0" marL="0">
+              <a:buNone/>
+            </a:pPr>
+            <a:r>
+              <a:rPr lang="en-US" sz="950" dirty="0">
+                <a:solidFill>
+                  <a:srgbClr val="0079C1"/>
+                </a:solidFill>
+                <a:latin typeface="Courier New" pitchFamily="34" charset="0"/>
+                <a:ea typeface="Courier New" pitchFamily="34" charset="-122"/>
+                <a:cs typeface="Courier New" pitchFamily="34" charset="-120"/>
+              </a:rPr>
+              <a:t>GET /api/v1/evidence/{id}</a:t>
+            </a:r>
+            <a:endParaRPr lang="en-US" sz="950" dirty="0"/>
+          </a:p>
+        </p:txBody>
+      </p:sp>
+      <p:sp>
+        <p:nvSpPr>
+          <p:cNvPr id="19" name="Text 16"/>
+          <p:cNvSpPr txBox="1"/>
+          <p:nvPr/>
+        </p:nvSpPr>
+        <p:spPr>
+          <a:xfrm>
+            <a:off x="4563770" y="2706624"/>
+            <a:ext cx="3064154" cy="329184"/>
+          </a:xfrm>
+          <a:prstGeom prst="rect">
+            <a:avLst/>
+          </a:prstGeom>
+          <a:noFill/>
+          <a:ln/>
+        </p:spPr>
+        <p:txBody>
+          <a:bodyPr wrap="square" lIns="0" tIns="0" rIns="0" bIns="0" rtlCol="0" anchor="t"/>
+          <a:lstStyle/>
+          <a:p>
+            <a:pPr indent="0" marL="0">
+              <a:lnSpc>
+                <a:spcPct val="102000"/>
+              </a:lnSpc>
+              <a:buNone/>
+            </a:pPr>
+            <a:r>
+              <a:rPr lang="en-US" sz="1050" dirty="0">
+                <a:solidFill>
+                  <a:srgbClr val="5D7189"/>
+                </a:solidFill>
+                <a:latin typeface="Calibri" pitchFamily="34" charset="0"/>
+                <a:ea typeface="Calibri" pitchFamily="34" charset="-122"/>
+                <a:cs typeface="Calibri" pitchFamily="34" charset="-120"/>
+              </a:rPr>
+              <a:t>Devuelve la evidencia por su identificador estable</a:t>
+            </a:r>
+            <a:endParaRPr lang="en-US" sz="1050" dirty="0"/>
+          </a:p>
+        </p:txBody>
+      </p:sp>
+      <p:sp>
+        <p:nvSpPr>
+          <p:cNvPr id="20" name="Shape 17"/>
+          <p:cNvSpPr/>
+          <p:nvPr/>
+        </p:nvSpPr>
+        <p:spPr>
+          <a:xfrm>
+            <a:off x="4344314" y="3200400"/>
+            <a:ext cx="3503066" cy="768096"/>
+          </a:xfrm>
+          <a:prstGeom prst="roundRect">
+            <a:avLst>
+              <a:gd name="adj" fmla="val 10714"/>
+            </a:avLst>
+          </a:prstGeom>
+          <a:solidFill>
+            <a:srgbClr val="F1F6FC"/>
+          </a:solidFill>
+          <a:ln/>
+        </p:spPr>
+      </p:sp>
+      <p:sp>
+        <p:nvSpPr>
+          <p:cNvPr id="21" name="Text 18"/>
+          <p:cNvSpPr txBox="1"/>
+          <p:nvPr/>
+        </p:nvSpPr>
+        <p:spPr>
+          <a:xfrm>
+            <a:off x="4563770" y="3328416"/>
+            <a:ext cx="3064154" cy="219456"/>
+          </a:xfrm>
+          <a:prstGeom prst="rect">
+            <a:avLst/>
+          </a:prstGeom>
+          <a:noFill/>
+          <a:ln/>
+        </p:spPr>
+        <p:txBody>
+          <a:bodyPr wrap="square" lIns="0" tIns="0" rIns="0" bIns="0" rtlCol="0" anchor="t"/>
+          <a:lstStyle/>
+          <a:p>
+            <a:pPr indent="0" marL="0">
+              <a:buNone/>
+            </a:pPr>
+            <a:r>
+              <a:rPr lang="en-US" sz="950" dirty="0">
+                <a:solidFill>
+                  <a:srgbClr val="0079C1"/>
+                </a:solidFill>
+                <a:latin typeface="Courier New" pitchFamily="34" charset="0"/>
+                <a:ea typeface="Courier New" pitchFamily="34" charset="-122"/>
+                <a:cs typeface="Courier New" pitchFamily="34" charset="-120"/>
+              </a:rPr>
+              <a:t>GET /api/v1/demo/cases</a:t>
+            </a:r>
+            <a:endParaRPr lang="en-US" sz="950" dirty="0"/>
+          </a:p>
+        </p:txBody>
+      </p:sp>
+      <p:sp>
+        <p:nvSpPr>
+          <p:cNvPr id="22" name="Text 19"/>
+          <p:cNvSpPr txBox="1"/>
+          <p:nvPr/>
+        </p:nvSpPr>
+        <p:spPr>
+          <a:xfrm>
+            <a:off x="4563770" y="3566160"/>
+            <a:ext cx="3064154" cy="329184"/>
+          </a:xfrm>
+          <a:prstGeom prst="rect">
+            <a:avLst/>
+          </a:prstGeom>
+          <a:noFill/>
+          <a:ln/>
+        </p:spPr>
+        <p:txBody>
+          <a:bodyPr wrap="square" lIns="0" tIns="0" rIns="0" bIns="0" rtlCol="0" anchor="t"/>
+          <a:lstStyle/>
+          <a:p>
+            <a:pPr indent="0" marL="0">
+              <a:lnSpc>
+                <a:spcPct val="102000"/>
+              </a:lnSpc>
+              <a:buNone/>
+            </a:pPr>
+            <a:r>
+              <a:rPr lang="en-US" sz="1050" dirty="0">
+                <a:solidFill>
+                  <a:srgbClr val="5D7189"/>
+                </a:solidFill>
+                <a:latin typeface="Calibri" pitchFamily="34" charset="0"/>
+                <a:ea typeface="Calibri" pitchFamily="34" charset="-122"/>
+                <a:cs typeface="Calibri" pitchFamily="34" charset="-120"/>
+              </a:rPr>
+              <a:t>Casos de demo, leídos del golden real sin exponer la respuesta esperada</a:t>
+            </a:r>
+            <a:endParaRPr lang="en-US" sz="1050" dirty="0"/>
+          </a:p>
+        </p:txBody>
+      </p:sp>
+      <p:sp>
+        <p:nvSpPr>
+          <p:cNvPr id="23" name="Shape 20"/>
+          <p:cNvSpPr/>
+          <p:nvPr/>
+        </p:nvSpPr>
+        <p:spPr>
+          <a:xfrm>
+            <a:off x="4344314" y="4059936"/>
+            <a:ext cx="3503066" cy="768096"/>
+          </a:xfrm>
+          <a:prstGeom prst="roundRect">
+            <a:avLst>
+              <a:gd name="adj" fmla="val 10714"/>
+            </a:avLst>
+          </a:prstGeom>
+          <a:solidFill>
+            <a:srgbClr val="F1F6FC"/>
+          </a:solidFill>
+          <a:ln/>
+        </p:spPr>
+      </p:sp>
+      <p:sp>
+        <p:nvSpPr>
+          <p:cNvPr id="24" name="Text 21"/>
+          <p:cNvSpPr txBox="1"/>
+          <p:nvPr/>
+        </p:nvSpPr>
+        <p:spPr>
+          <a:xfrm>
+            <a:off x="4563770" y="4187952"/>
+            <a:ext cx="3064154" cy="219456"/>
+          </a:xfrm>
+          <a:prstGeom prst="rect">
+            <a:avLst/>
+          </a:prstGeom>
+          <a:noFill/>
+          <a:ln/>
+        </p:spPr>
+        <p:txBody>
+          <a:bodyPr wrap="square" lIns="0" tIns="0" rIns="0" bIns="0" rtlCol="0" anchor="t"/>
+          <a:lstStyle/>
+          <a:p>
+            <a:pPr indent="0" marL="0">
+              <a:buNone/>
+            </a:pPr>
+            <a:r>
+              <a:rPr lang="en-US" sz="950" dirty="0">
+                <a:solidFill>
+                  <a:srgbClr val="0079C1"/>
+                </a:solidFill>
+                <a:latin typeface="Courier New" pitchFamily="34" charset="0"/>
+                <a:ea typeface="Courier New" pitchFamily="34" charset="-122"/>
+                <a:cs typeface="Courier New" pitchFamily="34" charset="-120"/>
+              </a:rPr>
+              <a:t>GET /api/v1/manual/…</a:t>
+            </a:r>
+            <a:endParaRPr lang="en-US" sz="950" dirty="0"/>
+          </a:p>
+        </p:txBody>
+      </p:sp>
+      <p:sp>
+        <p:nvSpPr>
+          <p:cNvPr id="25" name="Text 22"/>
+          <p:cNvSpPr txBox="1"/>
+          <p:nvPr/>
+        </p:nvSpPr>
+        <p:spPr>
+          <a:xfrm>
+            <a:off x="4563770" y="4425696"/>
+            <a:ext cx="3064154" cy="329184"/>
+          </a:xfrm>
+          <a:prstGeom prst="rect">
+            <a:avLst/>
+          </a:prstGeom>
+          <a:noFill/>
+          <a:ln/>
+        </p:spPr>
+        <p:txBody>
+          <a:bodyPr wrap="square" lIns="0" tIns="0" rIns="0" bIns="0" rtlCol="0" anchor="t"/>
+          <a:lstStyle/>
+          <a:p>
+            <a:pPr indent="0" marL="0">
+              <a:lnSpc>
+                <a:spcPct val="102000"/>
+              </a:lnSpc>
+              <a:buNone/>
+            </a:pPr>
+            <a:r>
+              <a:rPr lang="en-US" sz="1050" dirty="0">
+                <a:solidFill>
+                  <a:srgbClr val="5D7189"/>
+                </a:solidFill>
+                <a:latin typeface="Calibri" pitchFamily="34" charset="0"/>
+                <a:ea typeface="Calibri" pitchFamily="34" charset="-122"/>
+                <a:cs typeface="Calibri" pitchFamily="34" charset="-120"/>
+              </a:rPr>
+              <a:t>Inspección del manual publicado: páginas, extracciones y diagnósticos</a:t>
+            </a:r>
+            <a:endParaRPr lang="en-US" sz="1050" dirty="0"/>
+          </a:p>
+        </p:txBody>
+      </p:sp>
+      <p:sp>
+        <p:nvSpPr>
+          <p:cNvPr id="26" name="Text 23"/>
+          <p:cNvSpPr txBox="1"/>
+          <p:nvPr/>
+        </p:nvSpPr>
+        <p:spPr>
+          <a:xfrm>
+            <a:off x="8121701" y="2011680"/>
+            <a:ext cx="3503066" cy="219456"/>
+          </a:xfrm>
+          <a:prstGeom prst="rect">
+            <a:avLst/>
+          </a:prstGeom>
+          <a:noFill/>
+          <a:ln/>
+        </p:spPr>
+        <p:txBody>
+          <a:bodyPr wrap="square" lIns="0" tIns="0" rIns="0" bIns="0" rtlCol="0" anchor="t"/>
+          <a:lstStyle/>
+          <a:p>
+            <a:pPr indent="0" marL="0">
+              <a:buNone/>
+            </a:pPr>
+            <a:r>
+              <a:rPr lang="en-US" sz="950" b="1" spc="120" kern="0" dirty="0">
+                <a:solidFill>
+                  <a:srgbClr val="00807E"/>
+                </a:solidFill>
+                <a:latin typeface="Arial" pitchFamily="34" charset="0"/>
+                <a:ea typeface="Arial" pitchFamily="34" charset="-122"/>
+                <a:cs typeface="Arial" pitchFamily="34" charset="-120"/>
+              </a:rPr>
+              <a:t>ADMINISTRACIÓN Y SALUD</a:t>
+            </a:r>
+            <a:endParaRPr lang="en-US" sz="950" dirty="0"/>
+          </a:p>
+        </p:txBody>
+      </p:sp>
+      <p:sp>
+        <p:nvSpPr>
+          <p:cNvPr id="27" name="Shape 24"/>
+          <p:cNvSpPr/>
+          <p:nvPr/>
+        </p:nvSpPr>
+        <p:spPr>
+          <a:xfrm>
+            <a:off x="8121701" y="2340864"/>
+            <a:ext cx="3503066" cy="768096"/>
+          </a:xfrm>
+          <a:prstGeom prst="roundRect">
+            <a:avLst>
+              <a:gd name="adj" fmla="val 10714"/>
+            </a:avLst>
+          </a:prstGeom>
+          <a:solidFill>
+            <a:srgbClr val="F1F6FC"/>
+          </a:solidFill>
+          <a:ln/>
+        </p:spPr>
+      </p:sp>
+      <p:sp>
+        <p:nvSpPr>
+          <p:cNvPr id="28" name="Text 25"/>
+          <p:cNvSpPr txBox="1"/>
+          <p:nvPr/>
+        </p:nvSpPr>
+        <p:spPr>
+          <a:xfrm>
+            <a:off x="8341157" y="2468880"/>
+            <a:ext cx="3064154" cy="219456"/>
+          </a:xfrm>
+          <a:prstGeom prst="rect">
+            <a:avLst/>
+          </a:prstGeom>
+          <a:noFill/>
+          <a:ln/>
+        </p:spPr>
+        <p:txBody>
+          <a:bodyPr wrap="square" lIns="0" tIns="0" rIns="0" bIns="0" rtlCol="0" anchor="t"/>
+          <a:lstStyle/>
+          <a:p>
+            <a:pPr indent="0" marL="0">
+              <a:buNone/>
+            </a:pPr>
+            <a:r>
+              <a:rPr lang="en-US" sz="950" dirty="0">
+                <a:solidFill>
+                  <a:srgbClr val="00807E"/>
+                </a:solidFill>
+                <a:latin typeface="Courier New" pitchFamily="34" charset="0"/>
+                <a:ea typeface="Courier New" pitchFamily="34" charset="-122"/>
+                <a:cs typeface="Courier New" pitchFamily="34" charset="-120"/>
+              </a:rPr>
+              <a:t>POST /api/v1/admin/ingest</a:t>
+            </a:r>
+            <a:endParaRPr lang="en-US" sz="950" dirty="0"/>
+          </a:p>
+        </p:txBody>
+      </p:sp>
+      <p:sp>
+        <p:nvSpPr>
+          <p:cNvPr id="29" name="Text 26"/>
+          <p:cNvSpPr txBox="1"/>
+          <p:nvPr/>
+        </p:nvSpPr>
+        <p:spPr>
+          <a:xfrm>
+            <a:off x="8341157" y="2706624"/>
+            <a:ext cx="3064154" cy="329184"/>
+          </a:xfrm>
+          <a:prstGeom prst="rect">
+            <a:avLst/>
+          </a:prstGeom>
+          <a:noFill/>
+          <a:ln/>
+        </p:spPr>
+        <p:txBody>
+          <a:bodyPr wrap="square" lIns="0" tIns="0" rIns="0" bIns="0" rtlCol="0" anchor="t"/>
+          <a:lstStyle/>
+          <a:p>
+            <a:pPr indent="0" marL="0">
+              <a:lnSpc>
+                <a:spcPct val="102000"/>
+              </a:lnSpc>
+              <a:buNone/>
+            </a:pPr>
+            <a:r>
+              <a:rPr lang="en-US" sz="1050" dirty="0">
+                <a:solidFill>
+                  <a:srgbClr val="5D7189"/>
+                </a:solidFill>
+                <a:latin typeface="Calibri" pitchFamily="34" charset="0"/>
+                <a:ea typeface="Calibri" pitchFamily="34" charset="-122"/>
+                <a:cs typeface="Calibri" pitchFamily="34" charset="-120"/>
+              </a:rPr>
+              <a:t>Ingesta por API; sólo acepta el manual verificado por hash</a:t>
+            </a:r>
+            <a:endParaRPr lang="en-US" sz="1050" dirty="0"/>
+          </a:p>
+        </p:txBody>
+      </p:sp>
+      <p:sp>
+        <p:nvSpPr>
+          <p:cNvPr id="30" name="Shape 27"/>
+          <p:cNvSpPr/>
+          <p:nvPr/>
+        </p:nvSpPr>
+        <p:spPr>
+          <a:xfrm>
+            <a:off x="8121701" y="3200400"/>
+            <a:ext cx="3503066" cy="768096"/>
+          </a:xfrm>
+          <a:prstGeom prst="roundRect">
+            <a:avLst>
+              <a:gd name="adj" fmla="val 10714"/>
+            </a:avLst>
+          </a:prstGeom>
+          <a:solidFill>
+            <a:srgbClr val="F1F6FC"/>
+          </a:solidFill>
+          <a:ln/>
+        </p:spPr>
+      </p:sp>
+      <p:sp>
+        <p:nvSpPr>
+          <p:cNvPr id="31" name="Text 28"/>
+          <p:cNvSpPr txBox="1"/>
+          <p:nvPr/>
+        </p:nvSpPr>
+        <p:spPr>
+          <a:xfrm>
+            <a:off x="8341157" y="3328416"/>
+            <a:ext cx="3064154" cy="219456"/>
+          </a:xfrm>
+          <a:prstGeom prst="rect">
+            <a:avLst/>
+          </a:prstGeom>
+          <a:noFill/>
+          <a:ln/>
+        </p:spPr>
+        <p:txBody>
+          <a:bodyPr wrap="square" lIns="0" tIns="0" rIns="0" bIns="0" rtlCol="0" anchor="t"/>
+          <a:lstStyle/>
+          <a:p>
+            <a:pPr indent="0" marL="0">
+              <a:buNone/>
+            </a:pPr>
+            <a:r>
+              <a:rPr lang="en-US" sz="950" dirty="0">
+                <a:solidFill>
+                  <a:srgbClr val="00807E"/>
+                </a:solidFill>
+                <a:latin typeface="Courier New" pitchFamily="34" charset="0"/>
+                <a:ea typeface="Courier New" pitchFamily="34" charset="-122"/>
+                <a:cs typeface="Courier New" pitchFamily="34" charset="-120"/>
+              </a:rPr>
+              <a:t>GET /health/ready</a:t>
+            </a:r>
+            <a:endParaRPr lang="en-US" sz="950" dirty="0"/>
+          </a:p>
+        </p:txBody>
+      </p:sp>
+      <p:sp>
+        <p:nvSpPr>
+          <p:cNvPr id="32" name="Text 29"/>
+          <p:cNvSpPr txBox="1"/>
+          <p:nvPr/>
+        </p:nvSpPr>
+        <p:spPr>
+          <a:xfrm>
+            <a:off x="8341157" y="3566160"/>
+            <a:ext cx="3064154" cy="329184"/>
+          </a:xfrm>
+          <a:prstGeom prst="rect">
+            <a:avLst/>
+          </a:prstGeom>
+          <a:noFill/>
+          <a:ln/>
+        </p:spPr>
+        <p:txBody>
+          <a:bodyPr wrap="square" lIns="0" tIns="0" rIns="0" bIns="0" rtlCol="0" anchor="t"/>
+          <a:lstStyle/>
+          <a:p>
+            <a:pPr indent="0" marL="0">
+              <a:lnSpc>
+                <a:spcPct val="102000"/>
+              </a:lnSpc>
+              <a:buNone/>
+            </a:pPr>
+            <a:r>
+              <a:rPr lang="en-US" sz="1050" dirty="0">
+                <a:solidFill>
+                  <a:srgbClr val="5D7189"/>
+                </a:solidFill>
+                <a:latin typeface="Calibri" pitchFamily="34" charset="0"/>
+                <a:ea typeface="Calibri" pitchFamily="34" charset="-122"/>
+                <a:cs typeface="Calibri" pitchFamily="34" charset="-120"/>
+              </a:rPr>
+              <a:t>Preparación real de dependencias, sin llamadas pagadas al modelo</a:t>
+            </a:r>
+            <a:endParaRPr lang="en-US" sz="1050" dirty="0"/>
+          </a:p>
+        </p:txBody>
+      </p:sp>
+      <p:sp>
+        <p:nvSpPr>
+          <p:cNvPr id="33" name="Shape 30"/>
+          <p:cNvSpPr/>
+          <p:nvPr/>
+        </p:nvSpPr>
+        <p:spPr>
+          <a:xfrm>
+            <a:off x="8121701" y="4059936"/>
+            <a:ext cx="3503066" cy="768096"/>
+          </a:xfrm>
+          <a:prstGeom prst="roundRect">
+            <a:avLst>
+              <a:gd name="adj" fmla="val 10714"/>
+            </a:avLst>
+          </a:prstGeom>
+          <a:solidFill>
+            <a:srgbClr val="F1F6FC"/>
+          </a:solidFill>
+          <a:ln/>
+        </p:spPr>
+      </p:sp>
+      <p:sp>
+        <p:nvSpPr>
+          <p:cNvPr id="34" name="Text 31"/>
+          <p:cNvSpPr txBox="1"/>
+          <p:nvPr/>
+        </p:nvSpPr>
+        <p:spPr>
+          <a:xfrm>
+            <a:off x="8341157" y="4187952"/>
+            <a:ext cx="3064154" cy="219456"/>
+          </a:xfrm>
+          <a:prstGeom prst="rect">
+            <a:avLst/>
+          </a:prstGeom>
+          <a:noFill/>
+          <a:ln/>
+        </p:spPr>
+        <p:txBody>
+          <a:bodyPr wrap="square" lIns="0" tIns="0" rIns="0" bIns="0" rtlCol="0" anchor="t"/>
+          <a:lstStyle/>
+          <a:p>
+            <a:pPr indent="0" marL="0">
+              <a:buNone/>
+            </a:pPr>
+            <a:r>
+              <a:rPr lang="en-US" sz="950" dirty="0">
+                <a:solidFill>
+                  <a:srgbClr val="00807E"/>
+                </a:solidFill>
+                <a:latin typeface="Courier New" pitchFamily="34" charset="0"/>
+                <a:ea typeface="Courier New" pitchFamily="34" charset="-122"/>
+                <a:cs typeface="Courier New" pitchFamily="34" charset="-120"/>
+              </a:rPr>
+              <a:t>GET /openapi.json</a:t>
+            </a:r>
+            <a:endParaRPr lang="en-US" sz="950" dirty="0"/>
+          </a:p>
+        </p:txBody>
+      </p:sp>
+      <p:sp>
+        <p:nvSpPr>
+          <p:cNvPr id="35" name="Text 32"/>
+          <p:cNvSpPr txBox="1"/>
+          <p:nvPr/>
+        </p:nvSpPr>
+        <p:spPr>
+          <a:xfrm>
+            <a:off x="8341157" y="4425696"/>
+            <a:ext cx="3064154" cy="329184"/>
+          </a:xfrm>
+          <a:prstGeom prst="rect">
+            <a:avLst/>
+          </a:prstGeom>
+          <a:noFill/>
+          <a:ln/>
+        </p:spPr>
+        <p:txBody>
+          <a:bodyPr wrap="square" lIns="0" tIns="0" rIns="0" bIns="0" rtlCol="0" anchor="t"/>
+          <a:lstStyle/>
+          <a:p>
+            <a:pPr indent="0" marL="0">
+              <a:lnSpc>
+                <a:spcPct val="102000"/>
+              </a:lnSpc>
+              <a:buNone/>
+            </a:pPr>
+            <a:r>
+              <a:rPr lang="en-US" sz="1050" dirty="0">
+                <a:solidFill>
+                  <a:srgbClr val="5D7189"/>
+                </a:solidFill>
+                <a:latin typeface="Calibri" pitchFamily="34" charset="0"/>
+                <a:ea typeface="Calibri" pitchFamily="34" charset="-122"/>
+                <a:cs typeface="Calibri" pitchFamily="34" charset="-120"/>
+              </a:rPr>
+              <a:t>Contrato del que se generan los tipos del cliente</a:t>
+            </a:r>
+            <a:endParaRPr lang="en-US" sz="1050" dirty="0"/>
+          </a:p>
+        </p:txBody>
+      </p:sp>
+      <p:sp>
+        <p:nvSpPr>
+          <p:cNvPr id="36" name="Shape 33"/>
+          <p:cNvSpPr/>
+          <p:nvPr/>
+        </p:nvSpPr>
+        <p:spPr>
+          <a:xfrm>
+            <a:off x="566928" y="5138928"/>
+            <a:ext cx="11057839" cy="548640"/>
+          </a:xfrm>
+          <a:prstGeom prst="roundRect">
+            <a:avLst>
+              <a:gd name="adj" fmla="val 16667"/>
+            </a:avLst>
+          </a:prstGeom>
+          <a:solidFill>
+            <a:srgbClr val="FFFFFF"/>
           </a:solidFill>
           <a:ln w="12700">
             <a:solidFill>
@@ -54308,663 +55284,46 @@
       </p:sp>
       <p:sp>
         <p:nvSpPr>
-          <p:cNvPr id="7" name="Text 4"/>
-          <p:cNvSpPr txBox="1"/>
-          <p:nvPr/>
-        </p:nvSpPr>
-        <p:spPr>
-          <a:xfrm>
-            <a:off x="822960" y="2048256"/>
-            <a:ext cx="4851806" cy="256032"/>
-          </a:xfrm>
-          <a:prstGeom prst="rect">
-            <a:avLst/>
-          </a:prstGeom>
-          <a:noFill/>
-          <a:ln/>
-        </p:spPr>
-        <p:txBody>
-          <a:bodyPr wrap="square" lIns="0" tIns="0" rIns="0" bIns="0" rtlCol="0" anchor="t"/>
-          <a:lstStyle/>
-          <a:p>
-            <a:pPr indent="0" marL="0">
-              <a:buNone/>
-            </a:pPr>
-            <a:r>
-              <a:rPr lang="en-US" sz="1400" b="1" dirty="0">
-                <a:solidFill>
-                  <a:srgbClr val="003781"/>
-                </a:solidFill>
-                <a:latin typeface="Arial" pitchFamily="34" charset="0"/>
-                <a:ea typeface="Arial" pitchFamily="34" charset="-122"/>
-                <a:cs typeface="Arial" pitchFamily="34" charset="-120"/>
-              </a:rPr>
-              <a:t>CIDE</a:t>
-            </a:r>
-            <a:endParaRPr lang="en-US" sz="1400" dirty="0"/>
-          </a:p>
-        </p:txBody>
-      </p:sp>
-      <p:sp>
-        <p:nvSpPr>
-          <p:cNvPr id="8" name="Text 5"/>
-          <p:cNvSpPr txBox="1"/>
-          <p:nvPr/>
-        </p:nvSpPr>
-        <p:spPr>
-          <a:xfrm>
-            <a:off x="822960" y="2340864"/>
-            <a:ext cx="4851806" cy="493776"/>
-          </a:xfrm>
-          <a:prstGeom prst="rect">
-            <a:avLst/>
-          </a:prstGeom>
-          <a:noFill/>
-          <a:ln/>
-        </p:spPr>
-        <p:txBody>
-          <a:bodyPr wrap="square" lIns="0" tIns="0" rIns="0" bIns="0" rtlCol="0" anchor="t"/>
-          <a:lstStyle/>
-          <a:p>
-            <a:pPr indent="0" marL="0">
-              <a:lnSpc>
-                <a:spcPct val="104000"/>
-              </a:lnSpc>
-              <a:buNone/>
-            </a:pPr>
-            <a:r>
-              <a:rPr lang="en-US" sz="1100" dirty="0">
-                <a:solidFill>
-                  <a:srgbClr val="5D7189"/>
+          <p:cNvPr id="37" name="Text 34"/>
+          <p:cNvSpPr txBox="1"/>
+          <p:nvPr/>
+        </p:nvSpPr>
+        <p:spPr>
+          <a:xfrm>
+            <a:off x="841248" y="5294376"/>
+            <a:ext cx="10509199" cy="256032"/>
+          </a:xfrm>
+          <a:prstGeom prst="rect">
+            <a:avLst/>
+          </a:prstGeom>
+          <a:noFill/>
+          <a:ln/>
+        </p:spPr>
+        <p:txBody>
+          <a:bodyPr wrap="square" lIns="0" tIns="0" rIns="0" bIns="0" rtlCol="0" anchor="t"/>
+          <a:lstStyle/>
+          <a:p>
+            <a:pPr algn="ctr" indent="0" marL="0">
+              <a:buNone/>
+            </a:pPr>
+            <a:r>
+              <a:rPr lang="en-US" sz="1150" dirty="0">
+                <a:solidFill>
+                  <a:srgbClr val="0B1F3A"/>
                 </a:solidFill>
                 <a:latin typeface="Calibri" pitchFamily="34" charset="0"/>
                 <a:ea typeface="Calibri" pitchFamily="34" charset="-122"/>
                 <a:cs typeface="Calibri" pitchFamily="34" charset="-120"/>
               </a:rPr>
-              <a:t>Convenio de Indemnización Directa Española. Reparto de responsabilidad entre aseguradoras a partir de la declaración amistosa firmada por ambos conductores.</a:t>
-            </a:r>
-            <a:endParaRPr lang="en-US" sz="1100" dirty="0"/>
-          </a:p>
-        </p:txBody>
-      </p:sp>
-      <p:sp>
-        <p:nvSpPr>
-          <p:cNvPr id="9" name="Shape 6"/>
-          <p:cNvSpPr/>
-          <p:nvPr/>
-        </p:nvSpPr>
-        <p:spPr>
-          <a:xfrm>
-            <a:off x="6259982" y="1865376"/>
-            <a:ext cx="5363870" cy="1005840"/>
-          </a:xfrm>
-          <a:prstGeom prst="roundRect">
-            <a:avLst>
-              <a:gd name="adj" fmla="val 9091"/>
-            </a:avLst>
-          </a:prstGeom>
-          <a:solidFill>
-            <a:srgbClr val="F1F6FC"/>
-          </a:solidFill>
-          <a:ln w="12700">
-            <a:solidFill>
-              <a:srgbClr val="D9E4F0"/>
-            </a:solidFill>
-            <a:prstDash val="solid"/>
-          </a:ln>
-          <a:effectLst>
-            <a:outerShdw sx="100000" sy="100000" kx="0" ky="0" algn="bl" rotWithShape="0" blurRad="88900" dist="19050" dir="5400000">
-              <a:srgbClr val="99AEC6">
-                <a:alpha val="28000"/>
-              </a:srgbClr>
-            </a:outerShdw>
-          </a:effectLst>
-        </p:spPr>
-      </p:sp>
-      <p:sp>
-        <p:nvSpPr>
-          <p:cNvPr id="10" name="Text 7"/>
-          <p:cNvSpPr txBox="1"/>
-          <p:nvPr/>
-        </p:nvSpPr>
-        <p:spPr>
-          <a:xfrm>
-            <a:off x="6516014" y="2048256"/>
-            <a:ext cx="4851806" cy="256032"/>
-          </a:xfrm>
-          <a:prstGeom prst="rect">
-            <a:avLst/>
-          </a:prstGeom>
-          <a:noFill/>
-          <a:ln/>
-        </p:spPr>
-        <p:txBody>
-          <a:bodyPr wrap="square" lIns="0" tIns="0" rIns="0" bIns="0" rtlCol="0" anchor="t"/>
-          <a:lstStyle/>
-          <a:p>
-            <a:pPr indent="0" marL="0">
-              <a:buNone/>
-            </a:pPr>
-            <a:r>
-              <a:rPr lang="en-US" sz="1400" b="1" dirty="0">
-                <a:solidFill>
-                  <a:srgbClr val="003781"/>
-                </a:solidFill>
-                <a:latin typeface="Arial" pitchFamily="34" charset="0"/>
-                <a:ea typeface="Arial" pitchFamily="34" charset="-122"/>
-                <a:cs typeface="Arial" pitchFamily="34" charset="-120"/>
-              </a:rPr>
-              <a:t>ASCIDE</a:t>
-            </a:r>
-            <a:endParaRPr lang="en-US" sz="1400" dirty="0"/>
-          </a:p>
-        </p:txBody>
-      </p:sp>
-      <p:sp>
-        <p:nvSpPr>
-          <p:cNvPr id="11" name="Text 8"/>
-          <p:cNvSpPr txBox="1"/>
-          <p:nvPr/>
-        </p:nvSpPr>
-        <p:spPr>
-          <a:xfrm>
-            <a:off x="6516014" y="2340864"/>
-            <a:ext cx="4851806" cy="493776"/>
-          </a:xfrm>
-          <a:prstGeom prst="rect">
-            <a:avLst/>
-          </a:prstGeom>
-          <a:noFill/>
-          <a:ln/>
-        </p:spPr>
-        <p:txBody>
-          <a:bodyPr wrap="square" lIns="0" tIns="0" rIns="0" bIns="0" rtlCol="0" anchor="t"/>
-          <a:lstStyle/>
-          <a:p>
-            <a:pPr indent="0" marL="0">
-              <a:lnSpc>
-                <a:spcPct val="104000"/>
-              </a:lnSpc>
-              <a:buNone/>
-            </a:pPr>
-            <a:r>
-              <a:rPr lang="en-US" sz="1100" dirty="0">
-                <a:solidFill>
-                  <a:srgbClr val="5D7189"/>
-                </a:solidFill>
-                <a:latin typeface="Calibri" pitchFamily="34" charset="0"/>
-                <a:ea typeface="Calibri" pitchFamily="34" charset="-122"/>
-                <a:cs typeface="Calibri" pitchFamily="34" charset="-120"/>
-              </a:rPr>
-              <a:t>Acuerdo Suplementario al CIDE. Aporta la vía informatizada y las normas subsidiarias que resuelven supuestos concretos cuando las versiones no coinciden.</a:t>
-            </a:r>
-            <a:endParaRPr lang="en-US" sz="1100" dirty="0"/>
-          </a:p>
-        </p:txBody>
-      </p:sp>
-      <p:sp>
-        <p:nvSpPr>
-          <p:cNvPr id="12" name="Shape 9"/>
-          <p:cNvSpPr/>
-          <p:nvPr/>
-        </p:nvSpPr>
-        <p:spPr>
-          <a:xfrm>
-            <a:off x="566928" y="3054096"/>
-            <a:ext cx="5363870" cy="1005840"/>
-          </a:xfrm>
-          <a:prstGeom prst="roundRect">
-            <a:avLst>
-              <a:gd name="adj" fmla="val 9091"/>
-            </a:avLst>
-          </a:prstGeom>
-          <a:solidFill>
-            <a:srgbClr val="F1F6FC"/>
-          </a:solidFill>
-          <a:ln w="12700">
-            <a:solidFill>
-              <a:srgbClr val="D9E4F0"/>
-            </a:solidFill>
-            <a:prstDash val="solid"/>
-          </a:ln>
-          <a:effectLst>
-            <a:outerShdw sx="100000" sy="100000" kx="0" ky="0" algn="bl" rotWithShape="0" blurRad="88900" dist="19050" dir="5400000">
-              <a:srgbClr val="99AEC6">
-                <a:alpha val="28000"/>
-              </a:srgbClr>
-            </a:outerShdw>
-          </a:effectLst>
-        </p:spPr>
-      </p:sp>
-      <p:sp>
-        <p:nvSpPr>
-          <p:cNvPr id="13" name="Text 10"/>
-          <p:cNvSpPr txBox="1"/>
-          <p:nvPr/>
-        </p:nvSpPr>
-        <p:spPr>
-          <a:xfrm>
-            <a:off x="822960" y="3236976"/>
-            <a:ext cx="4851806" cy="256032"/>
-          </a:xfrm>
-          <a:prstGeom prst="rect">
-            <a:avLst/>
-          </a:prstGeom>
-          <a:noFill/>
-          <a:ln/>
-        </p:spPr>
-        <p:txBody>
-          <a:bodyPr wrap="square" lIns="0" tIns="0" rIns="0" bIns="0" rtlCol="0" anchor="t"/>
-          <a:lstStyle/>
-          <a:p>
-            <a:pPr indent="0" marL="0">
-              <a:buNone/>
-            </a:pPr>
-            <a:r>
-              <a:rPr lang="en-US" sz="1400" b="1" dirty="0">
-                <a:solidFill>
-                  <a:srgbClr val="003781"/>
-                </a:solidFill>
-                <a:latin typeface="Arial" pitchFamily="34" charset="0"/>
-                <a:ea typeface="Arial" pitchFamily="34" charset="-122"/>
-                <a:cs typeface="Arial" pitchFamily="34" charset="-120"/>
-              </a:rPr>
-              <a:t>CICOS</a:t>
-            </a:r>
-            <a:endParaRPr lang="en-US" sz="1400" dirty="0"/>
-          </a:p>
-        </p:txBody>
-      </p:sp>
-      <p:sp>
-        <p:nvSpPr>
-          <p:cNvPr id="14" name="Text 11"/>
-          <p:cNvSpPr txBox="1"/>
-          <p:nvPr/>
-        </p:nvSpPr>
-        <p:spPr>
-          <a:xfrm>
-            <a:off x="822960" y="3529584"/>
-            <a:ext cx="4851806" cy="493776"/>
-          </a:xfrm>
-          <a:prstGeom prst="rect">
-            <a:avLst/>
-          </a:prstGeom>
-          <a:noFill/>
-          <a:ln/>
-        </p:spPr>
-        <p:txBody>
-          <a:bodyPr wrap="square" lIns="0" tIns="0" rIns="0" bIns="0" rtlCol="0" anchor="t"/>
-          <a:lstStyle/>
-          <a:p>
-            <a:pPr indent="0" marL="0">
-              <a:lnSpc>
-                <a:spcPct val="104000"/>
-              </a:lnSpc>
-              <a:buNone/>
-            </a:pPr>
-            <a:r>
-              <a:rPr lang="en-US" sz="1100" dirty="0">
-                <a:solidFill>
-                  <a:srgbClr val="5D7189"/>
-                </a:solidFill>
-                <a:latin typeface="Calibri" pitchFamily="34" charset="0"/>
-                <a:ea typeface="Calibri" pitchFamily="34" charset="-122"/>
-                <a:cs typeface="Calibri" pitchFamily="34" charset="-120"/>
-              </a:rPr>
-              <a:t>Centro Informático de Compensación de Siniestros: la infraestructura común que liquida entre entidades adheridas.</a:t>
-            </a:r>
-            <a:endParaRPr lang="en-US" sz="1100" dirty="0"/>
-          </a:p>
-        </p:txBody>
-      </p:sp>
-      <p:sp>
-        <p:nvSpPr>
-          <p:cNvPr id="15" name="Shape 12"/>
-          <p:cNvSpPr/>
-          <p:nvPr/>
-        </p:nvSpPr>
-        <p:spPr>
-          <a:xfrm>
-            <a:off x="6259982" y="3054096"/>
-            <a:ext cx="5363870" cy="1005840"/>
-          </a:xfrm>
-          <a:prstGeom prst="roundRect">
-            <a:avLst>
-              <a:gd name="adj" fmla="val 9091"/>
-            </a:avLst>
-          </a:prstGeom>
-          <a:solidFill>
-            <a:srgbClr val="F1F6FC"/>
-          </a:solidFill>
-          <a:ln w="12700">
-            <a:solidFill>
-              <a:srgbClr val="D9E4F0"/>
-            </a:solidFill>
-            <a:prstDash val="solid"/>
-          </a:ln>
-          <a:effectLst>
-            <a:outerShdw sx="100000" sy="100000" kx="0" ky="0" algn="bl" rotWithShape="0" blurRad="88900" dist="19050" dir="5400000">
-              <a:srgbClr val="99AEC6">
-                <a:alpha val="28000"/>
-              </a:srgbClr>
-            </a:outerShdw>
-          </a:effectLst>
-        </p:spPr>
-      </p:sp>
-      <p:sp>
-        <p:nvSpPr>
-          <p:cNvPr id="16" name="Text 13"/>
-          <p:cNvSpPr txBox="1"/>
-          <p:nvPr/>
-        </p:nvSpPr>
-        <p:spPr>
-          <a:xfrm>
-            <a:off x="6516014" y="3236976"/>
-            <a:ext cx="4851806" cy="256032"/>
-          </a:xfrm>
-          <a:prstGeom prst="rect">
-            <a:avLst/>
-          </a:prstGeom>
-          <a:noFill/>
-          <a:ln/>
-        </p:spPr>
-        <p:txBody>
-          <a:bodyPr wrap="square" lIns="0" tIns="0" rIns="0" bIns="0" rtlCol="0" anchor="t"/>
-          <a:lstStyle/>
-          <a:p>
-            <a:pPr indent="0" marL="0">
-              <a:buNone/>
-            </a:pPr>
-            <a:r>
-              <a:rPr lang="en-US" sz="1400" b="1" dirty="0">
-                <a:solidFill>
-                  <a:srgbClr val="003781"/>
-                </a:solidFill>
-                <a:latin typeface="Arial" pitchFamily="34" charset="0"/>
-                <a:ea typeface="Arial" pitchFamily="34" charset="-122"/>
-                <a:cs typeface="Arial" pitchFamily="34" charset="-120"/>
-              </a:rPr>
-              <a:t>D.A.A.</a:t>
-            </a:r>
-            <a:endParaRPr lang="en-US" sz="1400" dirty="0"/>
-          </a:p>
-        </p:txBody>
-      </p:sp>
-      <p:sp>
-        <p:nvSpPr>
-          <p:cNvPr id="17" name="Text 14"/>
-          <p:cNvSpPr txBox="1"/>
-          <p:nvPr/>
-        </p:nvSpPr>
-        <p:spPr>
-          <a:xfrm>
-            <a:off x="6516014" y="3529584"/>
-            <a:ext cx="4851806" cy="493776"/>
-          </a:xfrm>
-          <a:prstGeom prst="rect">
-            <a:avLst/>
-          </a:prstGeom>
-          <a:noFill/>
-          <a:ln/>
-        </p:spPr>
-        <p:txBody>
-          <a:bodyPr wrap="square" lIns="0" tIns="0" rIns="0" bIns="0" rtlCol="0" anchor="t"/>
-          <a:lstStyle/>
-          <a:p>
-            <a:pPr indent="0" marL="0">
-              <a:lnSpc>
-                <a:spcPct val="104000"/>
-              </a:lnSpc>
-              <a:buNone/>
-            </a:pPr>
-            <a:r>
-              <a:rPr lang="en-US" sz="1100" dirty="0">
-                <a:solidFill>
-                  <a:srgbClr val="5D7189"/>
-                </a:solidFill>
-                <a:latin typeface="Calibri" pitchFamily="34" charset="0"/>
-                <a:ea typeface="Calibri" pitchFamily="34" charset="-122"/>
-                <a:cs typeface="Calibri" pitchFamily="34" charset="-120"/>
-              </a:rPr>
-              <a:t>Declaración Amistosa de Accidente, el parte europeo. Su apartado 12 son las casillas que cada conductor marca describiendo su maniobra.</a:t>
-            </a:r>
-            <a:endParaRPr lang="en-US" sz="1100" dirty="0"/>
-          </a:p>
-        </p:txBody>
-      </p:sp>
-      <p:sp>
-        <p:nvSpPr>
-          <p:cNvPr id="18" name="Shape 15"/>
-          <p:cNvSpPr/>
-          <p:nvPr/>
-        </p:nvSpPr>
-        <p:spPr>
-          <a:xfrm>
-            <a:off x="566928" y="4242816"/>
-            <a:ext cx="5363870" cy="1005840"/>
-          </a:xfrm>
-          <a:prstGeom prst="roundRect">
-            <a:avLst>
-              <a:gd name="adj" fmla="val 9091"/>
-            </a:avLst>
-          </a:prstGeom>
-          <a:solidFill>
-            <a:srgbClr val="F1F6FC"/>
-          </a:solidFill>
-          <a:ln w="12700">
-            <a:solidFill>
-              <a:srgbClr val="D9E4F0"/>
-            </a:solidFill>
-            <a:prstDash val="solid"/>
-          </a:ln>
-          <a:effectLst>
-            <a:outerShdw sx="100000" sy="100000" kx="0" ky="0" algn="bl" rotWithShape="0" blurRad="88900" dist="19050" dir="5400000">
-              <a:srgbClr val="99AEC6">
-                <a:alpha val="28000"/>
-              </a:srgbClr>
-            </a:outerShdw>
-          </a:effectLst>
-        </p:spPr>
-      </p:sp>
-      <p:sp>
-        <p:nvSpPr>
-          <p:cNvPr id="19" name="Text 16"/>
-          <p:cNvSpPr txBox="1"/>
-          <p:nvPr/>
-        </p:nvSpPr>
-        <p:spPr>
-          <a:xfrm>
-            <a:off x="822960" y="4425696"/>
-            <a:ext cx="4851806" cy="256032"/>
-          </a:xfrm>
-          <a:prstGeom prst="rect">
-            <a:avLst/>
-          </a:prstGeom>
-          <a:noFill/>
-          <a:ln/>
-        </p:spPr>
-        <p:txBody>
-          <a:bodyPr wrap="square" lIns="0" tIns="0" rIns="0" bIns="0" rtlCol="0" anchor="t"/>
-          <a:lstStyle/>
-          <a:p>
-            <a:pPr indent="0" marL="0">
-              <a:buNone/>
-            </a:pPr>
-            <a:r>
-              <a:rPr lang="en-US" sz="1400" b="1" dirty="0">
-                <a:solidFill>
-                  <a:srgbClr val="003781"/>
-                </a:solidFill>
-                <a:latin typeface="Arial" pitchFamily="34" charset="0"/>
-                <a:ea typeface="Arial" pitchFamily="34" charset="-122"/>
-                <a:cs typeface="Arial" pitchFamily="34" charset="-120"/>
-              </a:rPr>
-              <a:t>Casillas A0–A17 / B0–B17</a:t>
-            </a:r>
-            <a:endParaRPr lang="en-US" sz="1400" dirty="0"/>
-          </a:p>
-        </p:txBody>
-      </p:sp>
-      <p:sp>
-        <p:nvSpPr>
-          <p:cNvPr id="20" name="Text 17"/>
-          <p:cNvSpPr txBox="1"/>
-          <p:nvPr/>
-        </p:nvSpPr>
-        <p:spPr>
-          <a:xfrm>
-            <a:off x="822960" y="4718304"/>
-            <a:ext cx="4851806" cy="493776"/>
-          </a:xfrm>
-          <a:prstGeom prst="rect">
-            <a:avLst/>
-          </a:prstGeom>
-          <a:noFill/>
-          <a:ln/>
-        </p:spPr>
-        <p:txBody>
-          <a:bodyPr wrap="square" lIns="0" tIns="0" rIns="0" bIns="0" rtlCol="0" anchor="t"/>
-          <a:lstStyle/>
-          <a:p>
-            <a:pPr indent="0" marL="0">
-              <a:lnSpc>
-                <a:spcPct val="104000"/>
-              </a:lnSpc>
-              <a:buNone/>
-            </a:pPr>
-            <a:r>
-              <a:rPr lang="en-US" sz="1100" dirty="0">
-                <a:solidFill>
-                  <a:srgbClr val="5D7189"/>
-                </a:solidFill>
-                <a:latin typeface="Calibri" pitchFamily="34" charset="0"/>
-                <a:ea typeface="Calibri" pitchFamily="34" charset="-122"/>
-                <a:cs typeface="Calibri" pitchFamily="34" charset="-120"/>
-              </a:rPr>
-              <a:t>Las dieciocho maniobras del apartado 12 para cada vehículo. Cruzarlas en la tabla de culpabilidad da 324 combinaciones.</a:t>
-            </a:r>
-            <a:endParaRPr lang="en-US" sz="1100" dirty="0"/>
-          </a:p>
-        </p:txBody>
-      </p:sp>
-      <p:sp>
-        <p:nvSpPr>
-          <p:cNvPr id="21" name="Shape 18"/>
-          <p:cNvSpPr/>
-          <p:nvPr/>
-        </p:nvSpPr>
-        <p:spPr>
-          <a:xfrm>
-            <a:off x="6259982" y="4242816"/>
-            <a:ext cx="5363870" cy="1005840"/>
-          </a:xfrm>
-          <a:prstGeom prst="roundRect">
-            <a:avLst>
-              <a:gd name="adj" fmla="val 9091"/>
-            </a:avLst>
-          </a:prstGeom>
-          <a:solidFill>
-            <a:srgbClr val="F1F6FC"/>
-          </a:solidFill>
-          <a:ln w="12700">
-            <a:solidFill>
-              <a:srgbClr val="D9E4F0"/>
-            </a:solidFill>
-            <a:prstDash val="solid"/>
-          </a:ln>
-          <a:effectLst>
-            <a:outerShdw sx="100000" sy="100000" kx="0" ky="0" algn="bl" rotWithShape="0" blurRad="88900" dist="19050" dir="5400000">
-              <a:srgbClr val="99AEC6">
-                <a:alpha val="28000"/>
-              </a:srgbClr>
-            </a:outerShdw>
-          </a:effectLst>
-        </p:spPr>
-      </p:sp>
-      <p:sp>
-        <p:nvSpPr>
-          <p:cNvPr id="22" name="Text 19"/>
-          <p:cNvSpPr txBox="1"/>
-          <p:nvPr/>
-        </p:nvSpPr>
-        <p:spPr>
-          <a:xfrm>
-            <a:off x="6516014" y="4425696"/>
-            <a:ext cx="4851806" cy="256032"/>
-          </a:xfrm>
-          <a:prstGeom prst="rect">
-            <a:avLst/>
-          </a:prstGeom>
-          <a:noFill/>
-          <a:ln/>
-        </p:spPr>
-        <p:txBody>
-          <a:bodyPr wrap="square" lIns="0" tIns="0" rIns="0" bIns="0" rtlCol="0" anchor="t"/>
-          <a:lstStyle/>
-          <a:p>
-            <a:pPr indent="0" marL="0">
-              <a:buNone/>
-            </a:pPr>
-            <a:r>
-              <a:rPr lang="en-US" sz="1400" b="1" dirty="0">
-                <a:solidFill>
-                  <a:srgbClr val="003781"/>
-                </a:solidFill>
-                <a:latin typeface="Arial" pitchFamily="34" charset="0"/>
-                <a:ea typeface="Arial" pitchFamily="34" charset="-122"/>
-                <a:cs typeface="Arial" pitchFamily="34" charset="-120"/>
-              </a:rPr>
-              <a:t>Norma subsidiaria</a:t>
-            </a:r>
-            <a:endParaRPr lang="en-US" sz="1400" dirty="0"/>
-          </a:p>
-        </p:txBody>
-      </p:sp>
-      <p:sp>
-        <p:nvSpPr>
-          <p:cNvPr id="23" name="Text 20"/>
-          <p:cNvSpPr txBox="1"/>
-          <p:nvPr/>
-        </p:nvSpPr>
-        <p:spPr>
-          <a:xfrm>
-            <a:off x="6516014" y="4718304"/>
-            <a:ext cx="4851806" cy="493776"/>
-          </a:xfrm>
-          <a:prstGeom prst="rect">
-            <a:avLst/>
-          </a:prstGeom>
-          <a:noFill/>
-          <a:ln/>
-        </p:spPr>
-        <p:txBody>
-          <a:bodyPr wrap="square" lIns="0" tIns="0" rIns="0" bIns="0" rtlCol="0" anchor="t"/>
-          <a:lstStyle/>
-          <a:p>
-            <a:pPr indent="0" marL="0">
-              <a:lnSpc>
-                <a:spcPct val="104000"/>
-              </a:lnSpc>
-              <a:buNone/>
-            </a:pPr>
-            <a:r>
-              <a:rPr lang="en-US" sz="1100" dirty="0">
-                <a:solidFill>
-                  <a:srgbClr val="5D7189"/>
-                </a:solidFill>
-                <a:latin typeface="Calibri" pitchFamily="34" charset="0"/>
-                <a:ea typeface="Calibri" pitchFamily="34" charset="-122"/>
-                <a:cs typeface="Calibri" pitchFamily="34" charset="-120"/>
-              </a:rPr>
-              <a:t>Regla del ASCIDE que resuelve un supuesto típico —cambio de carril, marcha atrás, rotonda— cuando las declaraciones discrepan.</a:t>
-            </a:r>
-            <a:endParaRPr lang="en-US" sz="1100" dirty="0"/>
-          </a:p>
-        </p:txBody>
-      </p:sp>
-      <p:sp>
-        <p:nvSpPr>
-          <p:cNvPr id="24" name="Shape 21"/>
+              <a:t>El sobre de respuesta es común a los tres recorridos: identifica el modo seguido, las etapas ejecutadas, las citas y el estado — por eso la interfaz enseña el razonamiento sin duplicar lógica.</a:t>
+            </a:r>
+            <a:endParaRPr lang="en-US" sz="1150" dirty="0"/>
+          </a:p>
+        </p:txBody>
+      </p:sp>
+      <p:sp>
+        <p:nvSpPr>
+          <p:cNvPr id="38" name="Shape 35"/>
           <p:cNvSpPr/>
           <p:nvPr/>
         </p:nvSpPr>
@@ -54986,7 +55345,7 @@
       </p:sp>
       <p:sp>
         <p:nvSpPr>
-          <p:cNvPr id="25" name="Text 22"/>
+          <p:cNvPr id="39" name="Text 36"/>
           <p:cNvSpPr txBox="1"/>
           <p:nvPr/>
         </p:nvSpPr>
@@ -55020,7 +55379,7 @@
                 <a:ea typeface="Calibri" pitchFamily="34" charset="-122"/>
                 <a:cs typeface="Calibri" pitchFamily="34" charset="-120"/>
               </a:rPr>
-              <a:t>El manual es de noviembre de 2004 y estos convenios han evolucionado. El sistema responde lo que este documento dice, y lo declara.</a:t>
+              <a:t>Un solo contrato publicado en OpenAPI; los tipos del cliente se generan de él, y una comprobación falla si se separan.</a:t>
             </a:r>
             <a:endParaRPr lang="en-US" sz="1250" dirty="0"/>
           </a:p>
@@ -55091,7 +55450,7 @@
                 <a:ea typeface="Arial" pitchFamily="34" charset="-122"/>
                 <a:cs typeface="Arial" pitchFamily="34" charset="-120"/>
               </a:rPr>
-              <a:t>APÉNDICE · REPRODUCIBILIDAD</a:t>
+              <a:t>APÉNDICE · DOMINIO</a:t>
             </a:r>
             <a:endParaRPr lang="en-US" sz="1050" dirty="0"/>
           </a:p>
@@ -55154,6 +55513,935 @@
                 <a:cs typeface="Arial" pitchFamily="34" charset="-120"/>
               </a:rPr>
               <a:t>45</a:t>
+            </a:r>
+            <a:endParaRPr lang="en-US" sz="950" dirty="0"/>
+          </a:p>
+        </p:txBody>
+      </p:sp>
+      <p:sp>
+        <p:nvSpPr>
+          <p:cNvPr id="5" name="Text 2"/>
+          <p:cNvSpPr txBox="1"/>
+          <p:nvPr/>
+        </p:nvSpPr>
+        <p:spPr>
+          <a:xfrm>
+            <a:off x="566928" y="804672"/>
+            <a:ext cx="10149840" cy="822960"/>
+          </a:xfrm>
+          <a:prstGeom prst="rect">
+            <a:avLst/>
+          </a:prstGeom>
+          <a:noFill/>
+          <a:ln/>
+        </p:spPr>
+        <p:txBody>
+          <a:bodyPr wrap="square" lIns="0" tIns="0" rIns="0" bIns="0" rtlCol="0" anchor="t"/>
+          <a:lstStyle/>
+          <a:p>
+            <a:pPr indent="0" marL="0">
+              <a:lnSpc>
+                <a:spcPct val="102000"/>
+              </a:lnSpc>
+              <a:buNone/>
+            </a:pPr>
+            <a:r>
+              <a:rPr lang="en-US" sz="2600" b="1" dirty="0">
+                <a:solidFill>
+                  <a:srgbClr val="0B1F3A"/>
+                </a:solidFill>
+                <a:latin typeface="Arial" pitchFamily="34" charset="0"/>
+                <a:ea typeface="Arial" pitchFamily="34" charset="-122"/>
+                <a:cs typeface="Arial" pitchFamily="34" charset="-120"/>
+              </a:rPr>
+              <a:t>Glosario mínimo del dominio, para que nadie asienta sin seguirlo.</a:t>
+            </a:r>
+            <a:endParaRPr lang="en-US" sz="2600" dirty="0"/>
+          </a:p>
+        </p:txBody>
+      </p:sp>
+      <p:sp>
+        <p:nvSpPr>
+          <p:cNvPr id="6" name="Shape 3"/>
+          <p:cNvSpPr/>
+          <p:nvPr/>
+        </p:nvSpPr>
+        <p:spPr>
+          <a:xfrm>
+            <a:off x="566928" y="1865376"/>
+            <a:ext cx="5363870" cy="1005840"/>
+          </a:xfrm>
+          <a:prstGeom prst="roundRect">
+            <a:avLst>
+              <a:gd name="adj" fmla="val 9091"/>
+            </a:avLst>
+          </a:prstGeom>
+          <a:solidFill>
+            <a:srgbClr val="F1F6FC"/>
+          </a:solidFill>
+          <a:ln w="12700">
+            <a:solidFill>
+              <a:srgbClr val="D9E4F0"/>
+            </a:solidFill>
+            <a:prstDash val="solid"/>
+          </a:ln>
+          <a:effectLst>
+            <a:outerShdw sx="100000" sy="100000" kx="0" ky="0" algn="bl" rotWithShape="0" blurRad="88900" dist="19050" dir="5400000">
+              <a:srgbClr val="99AEC6">
+                <a:alpha val="28000"/>
+              </a:srgbClr>
+            </a:outerShdw>
+          </a:effectLst>
+        </p:spPr>
+      </p:sp>
+      <p:sp>
+        <p:nvSpPr>
+          <p:cNvPr id="7" name="Text 4"/>
+          <p:cNvSpPr txBox="1"/>
+          <p:nvPr/>
+        </p:nvSpPr>
+        <p:spPr>
+          <a:xfrm>
+            <a:off x="822960" y="2048256"/>
+            <a:ext cx="4851806" cy="256032"/>
+          </a:xfrm>
+          <a:prstGeom prst="rect">
+            <a:avLst/>
+          </a:prstGeom>
+          <a:noFill/>
+          <a:ln/>
+        </p:spPr>
+        <p:txBody>
+          <a:bodyPr wrap="square" lIns="0" tIns="0" rIns="0" bIns="0" rtlCol="0" anchor="t"/>
+          <a:lstStyle/>
+          <a:p>
+            <a:pPr indent="0" marL="0">
+              <a:buNone/>
+            </a:pPr>
+            <a:r>
+              <a:rPr lang="en-US" sz="1400" b="1" dirty="0">
+                <a:solidFill>
+                  <a:srgbClr val="003781"/>
+                </a:solidFill>
+                <a:latin typeface="Arial" pitchFamily="34" charset="0"/>
+                <a:ea typeface="Arial" pitchFamily="34" charset="-122"/>
+                <a:cs typeface="Arial" pitchFamily="34" charset="-120"/>
+              </a:rPr>
+              <a:t>CIDE</a:t>
+            </a:r>
+            <a:endParaRPr lang="en-US" sz="1400" dirty="0"/>
+          </a:p>
+        </p:txBody>
+      </p:sp>
+      <p:sp>
+        <p:nvSpPr>
+          <p:cNvPr id="8" name="Text 5"/>
+          <p:cNvSpPr txBox="1"/>
+          <p:nvPr/>
+        </p:nvSpPr>
+        <p:spPr>
+          <a:xfrm>
+            <a:off x="822960" y="2340864"/>
+            <a:ext cx="4851806" cy="493776"/>
+          </a:xfrm>
+          <a:prstGeom prst="rect">
+            <a:avLst/>
+          </a:prstGeom>
+          <a:noFill/>
+          <a:ln/>
+        </p:spPr>
+        <p:txBody>
+          <a:bodyPr wrap="square" lIns="0" tIns="0" rIns="0" bIns="0" rtlCol="0" anchor="t"/>
+          <a:lstStyle/>
+          <a:p>
+            <a:pPr indent="0" marL="0">
+              <a:lnSpc>
+                <a:spcPct val="104000"/>
+              </a:lnSpc>
+              <a:buNone/>
+            </a:pPr>
+            <a:r>
+              <a:rPr lang="en-US" sz="1100" dirty="0">
+                <a:solidFill>
+                  <a:srgbClr val="5D7189"/>
+                </a:solidFill>
+                <a:latin typeface="Calibri" pitchFamily="34" charset="0"/>
+                <a:ea typeface="Calibri" pitchFamily="34" charset="-122"/>
+                <a:cs typeface="Calibri" pitchFamily="34" charset="-120"/>
+              </a:rPr>
+              <a:t>Convenio de Indemnización Directa Española. Reparto de responsabilidad entre aseguradoras a partir de la declaración amistosa firmada por ambos conductores.</a:t>
+            </a:r>
+            <a:endParaRPr lang="en-US" sz="1100" dirty="0"/>
+          </a:p>
+        </p:txBody>
+      </p:sp>
+      <p:sp>
+        <p:nvSpPr>
+          <p:cNvPr id="9" name="Shape 6"/>
+          <p:cNvSpPr/>
+          <p:nvPr/>
+        </p:nvSpPr>
+        <p:spPr>
+          <a:xfrm>
+            <a:off x="6259982" y="1865376"/>
+            <a:ext cx="5363870" cy="1005840"/>
+          </a:xfrm>
+          <a:prstGeom prst="roundRect">
+            <a:avLst>
+              <a:gd name="adj" fmla="val 9091"/>
+            </a:avLst>
+          </a:prstGeom>
+          <a:solidFill>
+            <a:srgbClr val="F1F6FC"/>
+          </a:solidFill>
+          <a:ln w="12700">
+            <a:solidFill>
+              <a:srgbClr val="D9E4F0"/>
+            </a:solidFill>
+            <a:prstDash val="solid"/>
+          </a:ln>
+          <a:effectLst>
+            <a:outerShdw sx="100000" sy="100000" kx="0" ky="0" algn="bl" rotWithShape="0" blurRad="88900" dist="19050" dir="5400000">
+              <a:srgbClr val="99AEC6">
+                <a:alpha val="28000"/>
+              </a:srgbClr>
+            </a:outerShdw>
+          </a:effectLst>
+        </p:spPr>
+      </p:sp>
+      <p:sp>
+        <p:nvSpPr>
+          <p:cNvPr id="10" name="Text 7"/>
+          <p:cNvSpPr txBox="1"/>
+          <p:nvPr/>
+        </p:nvSpPr>
+        <p:spPr>
+          <a:xfrm>
+            <a:off x="6516014" y="2048256"/>
+            <a:ext cx="4851806" cy="256032"/>
+          </a:xfrm>
+          <a:prstGeom prst="rect">
+            <a:avLst/>
+          </a:prstGeom>
+          <a:noFill/>
+          <a:ln/>
+        </p:spPr>
+        <p:txBody>
+          <a:bodyPr wrap="square" lIns="0" tIns="0" rIns="0" bIns="0" rtlCol="0" anchor="t"/>
+          <a:lstStyle/>
+          <a:p>
+            <a:pPr indent="0" marL="0">
+              <a:buNone/>
+            </a:pPr>
+            <a:r>
+              <a:rPr lang="en-US" sz="1400" b="1" dirty="0">
+                <a:solidFill>
+                  <a:srgbClr val="003781"/>
+                </a:solidFill>
+                <a:latin typeface="Arial" pitchFamily="34" charset="0"/>
+                <a:ea typeface="Arial" pitchFamily="34" charset="-122"/>
+                <a:cs typeface="Arial" pitchFamily="34" charset="-120"/>
+              </a:rPr>
+              <a:t>ASCIDE</a:t>
+            </a:r>
+            <a:endParaRPr lang="en-US" sz="1400" dirty="0"/>
+          </a:p>
+        </p:txBody>
+      </p:sp>
+      <p:sp>
+        <p:nvSpPr>
+          <p:cNvPr id="11" name="Text 8"/>
+          <p:cNvSpPr txBox="1"/>
+          <p:nvPr/>
+        </p:nvSpPr>
+        <p:spPr>
+          <a:xfrm>
+            <a:off x="6516014" y="2340864"/>
+            <a:ext cx="4851806" cy="493776"/>
+          </a:xfrm>
+          <a:prstGeom prst="rect">
+            <a:avLst/>
+          </a:prstGeom>
+          <a:noFill/>
+          <a:ln/>
+        </p:spPr>
+        <p:txBody>
+          <a:bodyPr wrap="square" lIns="0" tIns="0" rIns="0" bIns="0" rtlCol="0" anchor="t"/>
+          <a:lstStyle/>
+          <a:p>
+            <a:pPr indent="0" marL="0">
+              <a:lnSpc>
+                <a:spcPct val="104000"/>
+              </a:lnSpc>
+              <a:buNone/>
+            </a:pPr>
+            <a:r>
+              <a:rPr lang="en-US" sz="1100" dirty="0">
+                <a:solidFill>
+                  <a:srgbClr val="5D7189"/>
+                </a:solidFill>
+                <a:latin typeface="Calibri" pitchFamily="34" charset="0"/>
+                <a:ea typeface="Calibri" pitchFamily="34" charset="-122"/>
+                <a:cs typeface="Calibri" pitchFamily="34" charset="-120"/>
+              </a:rPr>
+              <a:t>Acuerdo Suplementario al CIDE. Aporta la vía informatizada y las normas subsidiarias que resuelven supuestos concretos cuando las versiones no coinciden.</a:t>
+            </a:r>
+            <a:endParaRPr lang="en-US" sz="1100" dirty="0"/>
+          </a:p>
+        </p:txBody>
+      </p:sp>
+      <p:sp>
+        <p:nvSpPr>
+          <p:cNvPr id="12" name="Shape 9"/>
+          <p:cNvSpPr/>
+          <p:nvPr/>
+        </p:nvSpPr>
+        <p:spPr>
+          <a:xfrm>
+            <a:off x="566928" y="3054096"/>
+            <a:ext cx="5363870" cy="1005840"/>
+          </a:xfrm>
+          <a:prstGeom prst="roundRect">
+            <a:avLst>
+              <a:gd name="adj" fmla="val 9091"/>
+            </a:avLst>
+          </a:prstGeom>
+          <a:solidFill>
+            <a:srgbClr val="F1F6FC"/>
+          </a:solidFill>
+          <a:ln w="12700">
+            <a:solidFill>
+              <a:srgbClr val="D9E4F0"/>
+            </a:solidFill>
+            <a:prstDash val="solid"/>
+          </a:ln>
+          <a:effectLst>
+            <a:outerShdw sx="100000" sy="100000" kx="0" ky="0" algn="bl" rotWithShape="0" blurRad="88900" dist="19050" dir="5400000">
+              <a:srgbClr val="99AEC6">
+                <a:alpha val="28000"/>
+              </a:srgbClr>
+            </a:outerShdw>
+          </a:effectLst>
+        </p:spPr>
+      </p:sp>
+      <p:sp>
+        <p:nvSpPr>
+          <p:cNvPr id="13" name="Text 10"/>
+          <p:cNvSpPr txBox="1"/>
+          <p:nvPr/>
+        </p:nvSpPr>
+        <p:spPr>
+          <a:xfrm>
+            <a:off x="822960" y="3236976"/>
+            <a:ext cx="4851806" cy="256032"/>
+          </a:xfrm>
+          <a:prstGeom prst="rect">
+            <a:avLst/>
+          </a:prstGeom>
+          <a:noFill/>
+          <a:ln/>
+        </p:spPr>
+        <p:txBody>
+          <a:bodyPr wrap="square" lIns="0" tIns="0" rIns="0" bIns="0" rtlCol="0" anchor="t"/>
+          <a:lstStyle/>
+          <a:p>
+            <a:pPr indent="0" marL="0">
+              <a:buNone/>
+            </a:pPr>
+            <a:r>
+              <a:rPr lang="en-US" sz="1400" b="1" dirty="0">
+                <a:solidFill>
+                  <a:srgbClr val="003781"/>
+                </a:solidFill>
+                <a:latin typeface="Arial" pitchFamily="34" charset="0"/>
+                <a:ea typeface="Arial" pitchFamily="34" charset="-122"/>
+                <a:cs typeface="Arial" pitchFamily="34" charset="-120"/>
+              </a:rPr>
+              <a:t>CICOS</a:t>
+            </a:r>
+            <a:endParaRPr lang="en-US" sz="1400" dirty="0"/>
+          </a:p>
+        </p:txBody>
+      </p:sp>
+      <p:sp>
+        <p:nvSpPr>
+          <p:cNvPr id="14" name="Text 11"/>
+          <p:cNvSpPr txBox="1"/>
+          <p:nvPr/>
+        </p:nvSpPr>
+        <p:spPr>
+          <a:xfrm>
+            <a:off x="822960" y="3529584"/>
+            <a:ext cx="4851806" cy="493776"/>
+          </a:xfrm>
+          <a:prstGeom prst="rect">
+            <a:avLst/>
+          </a:prstGeom>
+          <a:noFill/>
+          <a:ln/>
+        </p:spPr>
+        <p:txBody>
+          <a:bodyPr wrap="square" lIns="0" tIns="0" rIns="0" bIns="0" rtlCol="0" anchor="t"/>
+          <a:lstStyle/>
+          <a:p>
+            <a:pPr indent="0" marL="0">
+              <a:lnSpc>
+                <a:spcPct val="104000"/>
+              </a:lnSpc>
+              <a:buNone/>
+            </a:pPr>
+            <a:r>
+              <a:rPr lang="en-US" sz="1100" dirty="0">
+                <a:solidFill>
+                  <a:srgbClr val="5D7189"/>
+                </a:solidFill>
+                <a:latin typeface="Calibri" pitchFamily="34" charset="0"/>
+                <a:ea typeface="Calibri" pitchFamily="34" charset="-122"/>
+                <a:cs typeface="Calibri" pitchFamily="34" charset="-120"/>
+              </a:rPr>
+              <a:t>Centro Informático de Compensación de Siniestros: la infraestructura común que liquida entre entidades adheridas.</a:t>
+            </a:r>
+            <a:endParaRPr lang="en-US" sz="1100" dirty="0"/>
+          </a:p>
+        </p:txBody>
+      </p:sp>
+      <p:sp>
+        <p:nvSpPr>
+          <p:cNvPr id="15" name="Shape 12"/>
+          <p:cNvSpPr/>
+          <p:nvPr/>
+        </p:nvSpPr>
+        <p:spPr>
+          <a:xfrm>
+            <a:off x="6259982" y="3054096"/>
+            <a:ext cx="5363870" cy="1005840"/>
+          </a:xfrm>
+          <a:prstGeom prst="roundRect">
+            <a:avLst>
+              <a:gd name="adj" fmla="val 9091"/>
+            </a:avLst>
+          </a:prstGeom>
+          <a:solidFill>
+            <a:srgbClr val="F1F6FC"/>
+          </a:solidFill>
+          <a:ln w="12700">
+            <a:solidFill>
+              <a:srgbClr val="D9E4F0"/>
+            </a:solidFill>
+            <a:prstDash val="solid"/>
+          </a:ln>
+          <a:effectLst>
+            <a:outerShdw sx="100000" sy="100000" kx="0" ky="0" algn="bl" rotWithShape="0" blurRad="88900" dist="19050" dir="5400000">
+              <a:srgbClr val="99AEC6">
+                <a:alpha val="28000"/>
+              </a:srgbClr>
+            </a:outerShdw>
+          </a:effectLst>
+        </p:spPr>
+      </p:sp>
+      <p:sp>
+        <p:nvSpPr>
+          <p:cNvPr id="16" name="Text 13"/>
+          <p:cNvSpPr txBox="1"/>
+          <p:nvPr/>
+        </p:nvSpPr>
+        <p:spPr>
+          <a:xfrm>
+            <a:off x="6516014" y="3236976"/>
+            <a:ext cx="4851806" cy="256032"/>
+          </a:xfrm>
+          <a:prstGeom prst="rect">
+            <a:avLst/>
+          </a:prstGeom>
+          <a:noFill/>
+          <a:ln/>
+        </p:spPr>
+        <p:txBody>
+          <a:bodyPr wrap="square" lIns="0" tIns="0" rIns="0" bIns="0" rtlCol="0" anchor="t"/>
+          <a:lstStyle/>
+          <a:p>
+            <a:pPr indent="0" marL="0">
+              <a:buNone/>
+            </a:pPr>
+            <a:r>
+              <a:rPr lang="en-US" sz="1400" b="1" dirty="0">
+                <a:solidFill>
+                  <a:srgbClr val="003781"/>
+                </a:solidFill>
+                <a:latin typeface="Arial" pitchFamily="34" charset="0"/>
+                <a:ea typeface="Arial" pitchFamily="34" charset="-122"/>
+                <a:cs typeface="Arial" pitchFamily="34" charset="-120"/>
+              </a:rPr>
+              <a:t>D.A.A.</a:t>
+            </a:r>
+            <a:endParaRPr lang="en-US" sz="1400" dirty="0"/>
+          </a:p>
+        </p:txBody>
+      </p:sp>
+      <p:sp>
+        <p:nvSpPr>
+          <p:cNvPr id="17" name="Text 14"/>
+          <p:cNvSpPr txBox="1"/>
+          <p:nvPr/>
+        </p:nvSpPr>
+        <p:spPr>
+          <a:xfrm>
+            <a:off x="6516014" y="3529584"/>
+            <a:ext cx="4851806" cy="493776"/>
+          </a:xfrm>
+          <a:prstGeom prst="rect">
+            <a:avLst/>
+          </a:prstGeom>
+          <a:noFill/>
+          <a:ln/>
+        </p:spPr>
+        <p:txBody>
+          <a:bodyPr wrap="square" lIns="0" tIns="0" rIns="0" bIns="0" rtlCol="0" anchor="t"/>
+          <a:lstStyle/>
+          <a:p>
+            <a:pPr indent="0" marL="0">
+              <a:lnSpc>
+                <a:spcPct val="104000"/>
+              </a:lnSpc>
+              <a:buNone/>
+            </a:pPr>
+            <a:r>
+              <a:rPr lang="en-US" sz="1100" dirty="0">
+                <a:solidFill>
+                  <a:srgbClr val="5D7189"/>
+                </a:solidFill>
+                <a:latin typeface="Calibri" pitchFamily="34" charset="0"/>
+                <a:ea typeface="Calibri" pitchFamily="34" charset="-122"/>
+                <a:cs typeface="Calibri" pitchFamily="34" charset="-120"/>
+              </a:rPr>
+              <a:t>Declaración Amistosa de Accidente, el parte europeo. Su apartado 12 son las casillas que cada conductor marca describiendo su maniobra.</a:t>
+            </a:r>
+            <a:endParaRPr lang="en-US" sz="1100" dirty="0"/>
+          </a:p>
+        </p:txBody>
+      </p:sp>
+      <p:sp>
+        <p:nvSpPr>
+          <p:cNvPr id="18" name="Shape 15"/>
+          <p:cNvSpPr/>
+          <p:nvPr/>
+        </p:nvSpPr>
+        <p:spPr>
+          <a:xfrm>
+            <a:off x="566928" y="4242816"/>
+            <a:ext cx="5363870" cy="1005840"/>
+          </a:xfrm>
+          <a:prstGeom prst="roundRect">
+            <a:avLst>
+              <a:gd name="adj" fmla="val 9091"/>
+            </a:avLst>
+          </a:prstGeom>
+          <a:solidFill>
+            <a:srgbClr val="F1F6FC"/>
+          </a:solidFill>
+          <a:ln w="12700">
+            <a:solidFill>
+              <a:srgbClr val="D9E4F0"/>
+            </a:solidFill>
+            <a:prstDash val="solid"/>
+          </a:ln>
+          <a:effectLst>
+            <a:outerShdw sx="100000" sy="100000" kx="0" ky="0" algn="bl" rotWithShape="0" blurRad="88900" dist="19050" dir="5400000">
+              <a:srgbClr val="99AEC6">
+                <a:alpha val="28000"/>
+              </a:srgbClr>
+            </a:outerShdw>
+          </a:effectLst>
+        </p:spPr>
+      </p:sp>
+      <p:sp>
+        <p:nvSpPr>
+          <p:cNvPr id="19" name="Text 16"/>
+          <p:cNvSpPr txBox="1"/>
+          <p:nvPr/>
+        </p:nvSpPr>
+        <p:spPr>
+          <a:xfrm>
+            <a:off x="822960" y="4425696"/>
+            <a:ext cx="4851806" cy="256032"/>
+          </a:xfrm>
+          <a:prstGeom prst="rect">
+            <a:avLst/>
+          </a:prstGeom>
+          <a:noFill/>
+          <a:ln/>
+        </p:spPr>
+        <p:txBody>
+          <a:bodyPr wrap="square" lIns="0" tIns="0" rIns="0" bIns="0" rtlCol="0" anchor="t"/>
+          <a:lstStyle/>
+          <a:p>
+            <a:pPr indent="0" marL="0">
+              <a:buNone/>
+            </a:pPr>
+            <a:r>
+              <a:rPr lang="en-US" sz="1400" b="1" dirty="0">
+                <a:solidFill>
+                  <a:srgbClr val="003781"/>
+                </a:solidFill>
+                <a:latin typeface="Arial" pitchFamily="34" charset="0"/>
+                <a:ea typeface="Arial" pitchFamily="34" charset="-122"/>
+                <a:cs typeface="Arial" pitchFamily="34" charset="-120"/>
+              </a:rPr>
+              <a:t>Casillas A0–A17 / B0–B17</a:t>
+            </a:r>
+            <a:endParaRPr lang="en-US" sz="1400" dirty="0"/>
+          </a:p>
+        </p:txBody>
+      </p:sp>
+      <p:sp>
+        <p:nvSpPr>
+          <p:cNvPr id="20" name="Text 17"/>
+          <p:cNvSpPr txBox="1"/>
+          <p:nvPr/>
+        </p:nvSpPr>
+        <p:spPr>
+          <a:xfrm>
+            <a:off x="822960" y="4718304"/>
+            <a:ext cx="4851806" cy="493776"/>
+          </a:xfrm>
+          <a:prstGeom prst="rect">
+            <a:avLst/>
+          </a:prstGeom>
+          <a:noFill/>
+          <a:ln/>
+        </p:spPr>
+        <p:txBody>
+          <a:bodyPr wrap="square" lIns="0" tIns="0" rIns="0" bIns="0" rtlCol="0" anchor="t"/>
+          <a:lstStyle/>
+          <a:p>
+            <a:pPr indent="0" marL="0">
+              <a:lnSpc>
+                <a:spcPct val="104000"/>
+              </a:lnSpc>
+              <a:buNone/>
+            </a:pPr>
+            <a:r>
+              <a:rPr lang="en-US" sz="1100" dirty="0">
+                <a:solidFill>
+                  <a:srgbClr val="5D7189"/>
+                </a:solidFill>
+                <a:latin typeface="Calibri" pitchFamily="34" charset="0"/>
+                <a:ea typeface="Calibri" pitchFamily="34" charset="-122"/>
+                <a:cs typeface="Calibri" pitchFamily="34" charset="-120"/>
+              </a:rPr>
+              <a:t>Las dieciocho maniobras del apartado 12 para cada vehículo. Cruzarlas en la tabla de culpabilidad da 324 combinaciones.</a:t>
+            </a:r>
+            <a:endParaRPr lang="en-US" sz="1100" dirty="0"/>
+          </a:p>
+        </p:txBody>
+      </p:sp>
+      <p:sp>
+        <p:nvSpPr>
+          <p:cNvPr id="21" name="Shape 18"/>
+          <p:cNvSpPr/>
+          <p:nvPr/>
+        </p:nvSpPr>
+        <p:spPr>
+          <a:xfrm>
+            <a:off x="6259982" y="4242816"/>
+            <a:ext cx="5363870" cy="1005840"/>
+          </a:xfrm>
+          <a:prstGeom prst="roundRect">
+            <a:avLst>
+              <a:gd name="adj" fmla="val 9091"/>
+            </a:avLst>
+          </a:prstGeom>
+          <a:solidFill>
+            <a:srgbClr val="F1F6FC"/>
+          </a:solidFill>
+          <a:ln w="12700">
+            <a:solidFill>
+              <a:srgbClr val="D9E4F0"/>
+            </a:solidFill>
+            <a:prstDash val="solid"/>
+          </a:ln>
+          <a:effectLst>
+            <a:outerShdw sx="100000" sy="100000" kx="0" ky="0" algn="bl" rotWithShape="0" blurRad="88900" dist="19050" dir="5400000">
+              <a:srgbClr val="99AEC6">
+                <a:alpha val="28000"/>
+              </a:srgbClr>
+            </a:outerShdw>
+          </a:effectLst>
+        </p:spPr>
+      </p:sp>
+      <p:sp>
+        <p:nvSpPr>
+          <p:cNvPr id="22" name="Text 19"/>
+          <p:cNvSpPr txBox="1"/>
+          <p:nvPr/>
+        </p:nvSpPr>
+        <p:spPr>
+          <a:xfrm>
+            <a:off x="6516014" y="4425696"/>
+            <a:ext cx="4851806" cy="256032"/>
+          </a:xfrm>
+          <a:prstGeom prst="rect">
+            <a:avLst/>
+          </a:prstGeom>
+          <a:noFill/>
+          <a:ln/>
+        </p:spPr>
+        <p:txBody>
+          <a:bodyPr wrap="square" lIns="0" tIns="0" rIns="0" bIns="0" rtlCol="0" anchor="t"/>
+          <a:lstStyle/>
+          <a:p>
+            <a:pPr indent="0" marL="0">
+              <a:buNone/>
+            </a:pPr>
+            <a:r>
+              <a:rPr lang="en-US" sz="1400" b="1" dirty="0">
+                <a:solidFill>
+                  <a:srgbClr val="003781"/>
+                </a:solidFill>
+                <a:latin typeface="Arial" pitchFamily="34" charset="0"/>
+                <a:ea typeface="Arial" pitchFamily="34" charset="-122"/>
+                <a:cs typeface="Arial" pitchFamily="34" charset="-120"/>
+              </a:rPr>
+              <a:t>Norma subsidiaria</a:t>
+            </a:r>
+            <a:endParaRPr lang="en-US" sz="1400" dirty="0"/>
+          </a:p>
+        </p:txBody>
+      </p:sp>
+      <p:sp>
+        <p:nvSpPr>
+          <p:cNvPr id="23" name="Text 20"/>
+          <p:cNvSpPr txBox="1"/>
+          <p:nvPr/>
+        </p:nvSpPr>
+        <p:spPr>
+          <a:xfrm>
+            <a:off x="6516014" y="4718304"/>
+            <a:ext cx="4851806" cy="493776"/>
+          </a:xfrm>
+          <a:prstGeom prst="rect">
+            <a:avLst/>
+          </a:prstGeom>
+          <a:noFill/>
+          <a:ln/>
+        </p:spPr>
+        <p:txBody>
+          <a:bodyPr wrap="square" lIns="0" tIns="0" rIns="0" bIns="0" rtlCol="0" anchor="t"/>
+          <a:lstStyle/>
+          <a:p>
+            <a:pPr indent="0" marL="0">
+              <a:lnSpc>
+                <a:spcPct val="104000"/>
+              </a:lnSpc>
+              <a:buNone/>
+            </a:pPr>
+            <a:r>
+              <a:rPr lang="en-US" sz="1100" dirty="0">
+                <a:solidFill>
+                  <a:srgbClr val="5D7189"/>
+                </a:solidFill>
+                <a:latin typeface="Calibri" pitchFamily="34" charset="0"/>
+                <a:ea typeface="Calibri" pitchFamily="34" charset="-122"/>
+                <a:cs typeface="Calibri" pitchFamily="34" charset="-120"/>
+              </a:rPr>
+              <a:t>Regla del ASCIDE que resuelve un supuesto típico —cambio de carril, marcha atrás, rotonda— cuando las declaraciones discrepan.</a:t>
+            </a:r>
+            <a:endParaRPr lang="en-US" sz="1100" dirty="0"/>
+          </a:p>
+        </p:txBody>
+      </p:sp>
+      <p:sp>
+        <p:nvSpPr>
+          <p:cNvPr id="24" name="Shape 21"/>
+          <p:cNvSpPr/>
+          <p:nvPr/>
+        </p:nvSpPr>
+        <p:spPr>
+          <a:xfrm>
+            <a:off x="566928" y="5852160"/>
+            <a:ext cx="11057839" cy="493776"/>
+          </a:xfrm>
+          <a:prstGeom prst="roundRect">
+            <a:avLst>
+              <a:gd name="adj" fmla="val 16667"/>
+            </a:avLst>
+          </a:prstGeom>
+          <a:solidFill>
+            <a:srgbClr val="003781"/>
+          </a:solidFill>
+          <a:ln/>
+        </p:spPr>
+      </p:sp>
+      <p:sp>
+        <p:nvSpPr>
+          <p:cNvPr id="25" name="Text 22"/>
+          <p:cNvSpPr txBox="1"/>
+          <p:nvPr/>
+        </p:nvSpPr>
+        <p:spPr>
+          <a:xfrm>
+            <a:off x="841248" y="5943600"/>
+            <a:ext cx="10509199" cy="329184"/>
+          </a:xfrm>
+          <a:prstGeom prst="rect">
+            <a:avLst/>
+          </a:prstGeom>
+          <a:noFill/>
+          <a:ln/>
+        </p:spPr>
+        <p:txBody>
+          <a:bodyPr wrap="square" lIns="0" tIns="0" rIns="0" bIns="0" rtlCol="0" anchor="t"/>
+          <a:lstStyle/>
+          <a:p>
+            <a:pPr algn="ctr" indent="0" marL="0">
+              <a:lnSpc>
+                <a:spcPct val="95000"/>
+              </a:lnSpc>
+              <a:buNone/>
+            </a:pPr>
+            <a:r>
+              <a:rPr lang="en-US" sz="1250" b="1" dirty="0">
+                <a:solidFill>
+                  <a:srgbClr val="FFFFFF"/>
+                </a:solidFill>
+                <a:latin typeface="Calibri" pitchFamily="34" charset="0"/>
+                <a:ea typeface="Calibri" pitchFamily="34" charset="-122"/>
+                <a:cs typeface="Calibri" pitchFamily="34" charset="-120"/>
+              </a:rPr>
+              <a:t>El manual es de noviembre de 2004 y estos convenios han evolucionado. El sistema responde lo que este documento dice, y lo declara.</a:t>
+            </a:r>
+            <a:endParaRPr lang="en-US" sz="1250" dirty="0"/>
+          </a:p>
+        </p:txBody>
+      </p:sp>
+    </p:spTree>
+  </p:cSld>
+  <p:clrMapOvr>
+    <a:masterClrMapping/>
+  </p:clrMapOvr>
+</p:sld>
+</file>
+
+<file path=ppt/slides/slide46.xml><?xml version="1.0" encoding="utf-8"?>
+<p:sld xmlns:a="http://schemas.openxmlformats.org/drawingml/2006/main" xmlns:r="http://schemas.openxmlformats.org/officeDocument/2006/relationships" xmlns:p="http://schemas.openxmlformats.org/presentationml/2006/main">
+  <p:cSld name="Slide 46">
+    <p:bg>
+      <p:bgPr>
+        <a:solidFill>
+          <a:srgbClr val="FFFFFF"/>
+        </a:solidFill>
+      </p:bgPr>
+    </p:bg>
+    <p:spTree>
+      <p:nvGrpSpPr>
+        <p:cNvPr id="1" name=""/>
+        <p:cNvGrpSpPr/>
+        <p:nvPr/>
+      </p:nvGrpSpPr>
+      <p:grpSpPr>
+        <a:xfrm>
+          <a:off x="0" y="0"/>
+          <a:ext cx="0" cy="0"/>
+          <a:chOff x="0" y="0"/>
+          <a:chExt cx="0" cy="0"/>
+        </a:xfrm>
+      </p:grpSpPr>
+      <p:sp>
+        <p:nvSpPr>
+          <p:cNvPr id="2" name="Text 0"/>
+          <p:cNvSpPr txBox="1"/>
+          <p:nvPr/>
+        </p:nvSpPr>
+        <p:spPr>
+          <a:xfrm>
+            <a:off x="566928" y="347472"/>
+            <a:ext cx="7315200" cy="219456"/>
+          </a:xfrm>
+          <a:prstGeom prst="rect">
+            <a:avLst/>
+          </a:prstGeom>
+          <a:noFill/>
+          <a:ln/>
+        </p:spPr>
+        <p:txBody>
+          <a:bodyPr wrap="square" lIns="0" tIns="0" rIns="0" bIns="0" rtlCol="0" anchor="t"/>
+          <a:lstStyle/>
+          <a:p>
+            <a:pPr indent="0" marL="0">
+              <a:buNone/>
+            </a:pPr>
+            <a:r>
+              <a:rPr lang="en-US" sz="1050" b="1" spc="160" kern="0" dirty="0">
+                <a:solidFill>
+                  <a:srgbClr val="0079C1"/>
+                </a:solidFill>
+                <a:latin typeface="Arial" pitchFamily="34" charset="0"/>
+                <a:ea typeface="Arial" pitchFamily="34" charset="-122"/>
+                <a:cs typeface="Arial" pitchFamily="34" charset="-120"/>
+              </a:rPr>
+              <a:t>APÉNDICE · REPRODUCIBILIDAD</a:t>
+            </a:r>
+            <a:endParaRPr lang="en-US" sz="1050" dirty="0"/>
+          </a:p>
+        </p:txBody>
+      </p:sp>
+      <p:pic>
+        <p:nvPicPr>
+          <p:cNvPr id="3" name="Image 0" descr="/Users/aoc/proyectos/prueba-allianz/docs/entrega/deck/assets/allianz-logo.png">    </p:cNvPr>
+          <p:cNvPicPr>
+            <a:picLocks noChangeAspect="1"/>
+          </p:cNvPicPr>
+          <p:nvPr/>
+        </p:nvPicPr>
+        <p:blipFill>
+          <a:blip r:embed="rId1"/>
+          <a:srcRect l="0" r="0" t="0" b="0"/>
+          <a:stretch/>
+        </p:blipFill>
+        <p:spPr>
+          <a:xfrm>
+            <a:off x="10390327" y="329184"/>
+            <a:ext cx="1234440" cy="246888"/>
+          </a:xfrm>
+          <a:prstGeom prst="rect">
+            <a:avLst/>
+          </a:prstGeom>
+        </p:spPr>
+      </p:pic>
+      <p:sp>
+        <p:nvSpPr>
+          <p:cNvPr id="4" name="Text 1"/>
+          <p:cNvSpPr txBox="1"/>
+          <p:nvPr/>
+        </p:nvSpPr>
+        <p:spPr>
+          <a:xfrm>
+            <a:off x="11076127" y="6419088"/>
+            <a:ext cx="548640" cy="219456"/>
+          </a:xfrm>
+          <a:prstGeom prst="rect">
+            <a:avLst/>
+          </a:prstGeom>
+          <a:noFill/>
+          <a:ln/>
+        </p:spPr>
+        <p:txBody>
+          <a:bodyPr wrap="square" lIns="0" tIns="0" rIns="0" bIns="0" rtlCol="0" anchor="t"/>
+          <a:lstStyle/>
+          <a:p>
+            <a:pPr algn="r" indent="0" marL="0">
+              <a:buNone/>
+            </a:pPr>
+            <a:r>
+              <a:rPr lang="en-US" sz="950" b="1" dirty="0">
+                <a:solidFill>
+                  <a:srgbClr val="8296AC"/>
+                </a:solidFill>
+                <a:latin typeface="Arial" pitchFamily="34" charset="0"/>
+                <a:ea typeface="Arial" pitchFamily="34" charset="-122"/>
+                <a:cs typeface="Arial" pitchFamily="34" charset="-120"/>
+              </a:rPr>
+              <a:t>46</a:t>
             </a:r>
             <a:endParaRPr lang="en-US" sz="950" dirty="0"/>
           </a:p>
